--- a/NestHR_Tender_Presentation.pptx
+++ b/NestHR_Tender_Presentation.pptx
@@ -4,6 +4,9 @@
   <p:sldMasterIdLst>
     <p:sldMasterId id="2147483648" r:id="rId1"/>
   </p:sldMasterIdLst>
+  <p:notesMasterIdLst>
+    <p:notesMasterId r:id="rId31"/>
+  </p:notesMasterIdLst>
   <p:sldIdLst>
     <p:sldId id="256" r:id="rId2"/>
     <p:sldId id="257" r:id="rId3"/>
@@ -35,10 +38,7 @@
     <p:sldId id="283" r:id="rId29"/>
     <p:sldId id="284" r:id="rId30"/>
   </p:sldIdLst>
-  <p:notesMasterIdLst>
-    <p:notesMasterId r:id="rId31"/>
-  </p:notesMasterIdLst>
-  <p:sldSz cx="9144000" cy="5143500"/>
+  <p:sldSz cx="9144000" cy="5143500" type="screen16x9"/>
   <p:notesSz cx="5143500" cy="9144000"/>
   <p:defaultTextStyle>
     <a:lvl1pPr marL="0" algn="l" defTabSz="914400" rtl="0" eaLnBrk="1" latinLnBrk="0" hangingPunct="1">
@@ -135,12 +135,12 @@
   <p:extLst>
     <p:ext uri="{521415D9-36F7-43E2-AB2F-B90AF26B5E84}">
       <p14:sectionLst xmlns:p14="http://schemas.microsoft.com/office/powerpoint/2010/main">
-        <p14:section name="Introduction" id="{1647fd61-6cd0-ee00-4ef0-a8120a867f87}">
+        <p14:section name="Introduction" id="{1647FD61-6CD0-EE00-4EF0-A8120A867F87}">
           <p14:sldIdLst>
             <p14:sldId id="256"/>
           </p14:sldIdLst>
         </p14:section>
-        <p14:section name="Default-1" id="{c8275573-43c1-cbc9-6d43-975626bd96ba}">
+        <p14:section name="Default-1" id="{C8275573-43C1-CBC9-6D43-975626BD96BA}">
           <p14:sldIdLst>
             <p14:sldId id="257"/>
             <p14:sldId id="258"/>
@@ -161,7 +161,7 @@
             <p14:sldId id="273"/>
           </p14:sldIdLst>
         </p14:section>
-        <p14:section name="Scale" id="{48359ace-f556-874b-1450-3dad74042f61}">
+        <p14:section name="Scale" id="{48359ACE-F556-874B-1450-3DAD74042F61}">
           <p14:sldIdLst>
             <p14:sldId id="274"/>
             <p14:sldId id="275"/>
@@ -175,7 +175,7 @@
             <p14:sldId id="283"/>
           </p14:sldIdLst>
         </p14:section>
-        <p14:section name="Contact" id="{7e5c05b4-9cde-9af3-3258-7ca03a05ee92}">
+        <p14:section name="Contact" id="{7E5C05B4-9CDE-9AF3-3258-7CA03A05EE92}">
           <p14:sldIdLst>
             <p14:sldId id="284"/>
           </p14:sldIdLst>
@@ -190,9 +190,11 @@
 </file>
 
 <file path=ppt/charts/chart1.xml><?xml version="1.0" encoding="utf-8"?>
-<c:chartSpace xmlns:c="http://schemas.openxmlformats.org/drawingml/2006/chart" xmlns:a="http://schemas.openxmlformats.org/drawingml/2006/main" xmlns:r="http://schemas.openxmlformats.org/officeDocument/2006/relationships">
+<c:chartSpace xmlns:c="http://schemas.openxmlformats.org/drawingml/2006/chart" xmlns:a="http://schemas.openxmlformats.org/drawingml/2006/main" xmlns:r="http://schemas.openxmlformats.org/officeDocument/2006/relationships" xmlns:c16r2="http://schemas.microsoft.com/office/drawing/2015/06/chart">
   <c:date1904 val="0"/>
+  <c:lang val="en-US"/>
   <c:roundedCorners val="1"/>
+  <c:style val="2"/>
   <c:chart>
     <c:autoTitleDeleted val="1"/>
     <c:plotArea>
@@ -224,18 +226,26 @@
           <c:invertIfNegative val="0"/>
           <c:dLbls>
             <c:numFmt formatCode="#,##0" sourceLinked="0"/>
+            <c:spPr>
+              <a:noFill/>
+              <a:ln>
+                <a:noFill/>
+              </a:ln>
+              <a:effectLst/>
+            </c:spPr>
             <c:txPr>
               <a:bodyPr/>
               <a:lstStyle/>
               <a:p>
                 <a:pPr>
-                  <a:defRPr b="0" i="0" strike="noStrike" sz="1100" u="none">
+                  <a:defRPr sz="1100" b="0" i="0" u="none" strike="noStrike">
                     <a:solidFill>
                       <a:srgbClr val="000000"/>
                     </a:solidFill>
                     <a:latin typeface="+mn-lt"/>
                   </a:defRPr>
                 </a:pPr>
+                <a:endParaRPr lang="en-US"/>
               </a:p>
             </c:txPr>
             <c:showLegendKey val="0"/>
@@ -245,40 +255,43 @@
             <c:showPercent val="0"/>
             <c:showBubbleSize val="0"/>
             <c:showLeaderLines val="0"/>
+            <c:extLst>
+              <c:ext xmlns:c15="http://schemas.microsoft.com/office/drawing/2012/chart" uri="{CE6537A1-D6FC-4f65-9D91-7224C49458BB}">
+                <c15:showLeaderLines val="0"/>
+              </c:ext>
+            </c:extLst>
           </c:dLbls>
           <c:cat>
-            <c:multiLvlStrRef>
+            <c:strRef>
               <c:f>Sheet1!$A$2:$A$9</c:f>
-              <c:multiLvlStrCache>
+              <c:strCache>
                 <c:ptCount val="8"/>
-                <c:lvl>
-                  <c:pt idx="0">
-                    <c:v>Employees page (50)</c:v>
-                  </c:pt>
-                  <c:pt idx="1">
-                    <c:v>Employee search</c:v>
-                  </c:pt>
-                  <c:pt idx="2">
-                    <c:v>Dashboard (cached)</c:v>
-                  </c:pt>
-                  <c:pt idx="3">
-                    <c:v>Dashboard (cold)</c:v>
-                  </c:pt>
-                  <c:pt idx="4">
-                    <c:v>Month summary</c:v>
-                  </c:pt>
-                  <c:pt idx="5">
-                    <c:v>One day, 1,881 rows</c:v>
-                  </c:pt>
-                  <c:pt idx="6">
-                    <c:v>Performance overview</c:v>
-                  </c:pt>
-                  <c:pt idx="7">
-                    <c:v>All 2,000 employees</c:v>
-                  </c:pt>
-                </c:lvl>
-              </c:multiLvlStrCache>
-            </c:multiLvlStrRef>
+                <c:pt idx="0">
+                  <c:v>Employees page (50)</c:v>
+                </c:pt>
+                <c:pt idx="1">
+                  <c:v>Employee search</c:v>
+                </c:pt>
+                <c:pt idx="2">
+                  <c:v>Dashboard (cached)</c:v>
+                </c:pt>
+                <c:pt idx="3">
+                  <c:v>Dashboard (cold)</c:v>
+                </c:pt>
+                <c:pt idx="4">
+                  <c:v>Month summary</c:v>
+                </c:pt>
+                <c:pt idx="5">
+                  <c:v>One day, 1,881 rows</c:v>
+                </c:pt>
+                <c:pt idx="6">
+                  <c:v>Performance overview</c:v>
+                </c:pt>
+                <c:pt idx="7">
+                  <c:v>All 2,000 employees</c:v>
+                </c:pt>
+              </c:strCache>
+            </c:strRef>
           </c:cat>
           <c:val>
             <c:numRef>
@@ -313,36 +326,23 @@
               </c:numCache>
             </c:numRef>
           </c:val>
+          <c:extLst>
+            <c:ext xmlns:c16="http://schemas.microsoft.com/office/drawing/2014/chart" uri="{C3380CC4-5D6E-409C-BE32-E72D297353CC}">
+              <c16:uniqueId val="{00000000-BB70-4F75-92AF-B80CDCCAA7B1}"/>
+            </c:ext>
+          </c:extLst>
         </c:ser>
         <c:dLbls>
-          <c:numFmt formatCode="#,##0" sourceLinked="0"/>
-          <c:txPr>
-            <a:bodyPr/>
-            <a:lstStyle/>
-            <a:p>
-              <a:pPr>
-                <a:defRPr b="0" i="0" strike="noStrike" sz="1100" u="none">
-                  <a:solidFill>
-                    <a:srgbClr val="000000"/>
-                  </a:solidFill>
-                  <a:latin typeface="+mn-lt"/>
-                </a:defRPr>
-              </a:pPr>
-            </a:p>
-          </c:txPr>
           <c:showLegendKey val="0"/>
           <c:showVal val="1"/>
           <c:showCatName val="0"/>
           <c:showSerName val="0"/>
           <c:showPercent val="0"/>
           <c:showBubbleSize val="0"/>
-          <c:showLeaderLines val="0"/>
         </c:dLbls>
         <c:gapWidth val="150"/>
-        <c:overlap val="0"/>
         <c:axId val="2094734554"/>
         <c:axId val="2094734552"/>
-        <c:axId val="2094734556"/>
       </c:barChart>
       <c:catAx>
         <c:axId val="2094734554"/>
@@ -383,6 +383,7 @@
         <c:crosses val="autoZero"/>
         <c:auto val="1"/>
         <c:lblAlgn val="ctr"/>
+        <c:lblOffset val="100"/>
         <c:noMultiLvlLbl val="1"/>
       </c:catAx>
       <c:valAx>
@@ -391,7 +392,7 @@
           <c:orientation val="minMax"/>
         </c:scaling>
         <c:delete val="0"/>
-        <c:axPos val="b"/>
+        <c:axPos val="t"/>
         <c:majorGridlines>
           <c:spPr>
             <a:ln w="6350" cap="flat">
@@ -418,7 +419,7 @@
                   </a:defRPr>
                 </a:pPr>
                 <a:r>
-                  <a:rPr sz="1000" b="0" i="0" u="none" strike="noStrike">
+                  <a:rPr lang="en-IN" sz="1000" b="0" i="0" u="none" strike="noStrike">
                     <a:solidFill>
                       <a:srgbClr val="000000"/>
                     </a:solidFill>
@@ -429,7 +430,6 @@
               </a:p>
             </c:rich>
           </c:tx>
-          <c:layout/>
           <c:overlay val="0"/>
         </c:title>
         <c:numFmt formatCode="General" sourceLinked="0"/>
@@ -474,6 +474,7 @@
     </c:plotArea>
     <c:plotVisOnly val="1"/>
     <c:dispBlanksAs val="span"/>
+    <c:showDLblsOverMax val="1"/>
   </c:chart>
   <c:spPr>
     <a:noFill/>
@@ -489,9 +490,11 @@
 </file>
 
 <file path=ppt/charts/chart2.xml><?xml version="1.0" encoding="utf-8"?>
-<c:chartSpace xmlns:c="http://schemas.openxmlformats.org/drawingml/2006/chart" xmlns:a="http://schemas.openxmlformats.org/drawingml/2006/main" xmlns:r="http://schemas.openxmlformats.org/officeDocument/2006/relationships">
+<c:chartSpace xmlns:c="http://schemas.openxmlformats.org/drawingml/2006/chart" xmlns:a="http://schemas.openxmlformats.org/drawingml/2006/main" xmlns:r="http://schemas.openxmlformats.org/officeDocument/2006/relationships" xmlns:c16r2="http://schemas.microsoft.com/office/drawing/2015/06/chart">
   <c:date1904 val="0"/>
+  <c:lang val="en-US"/>
   <c:roundedCorners val="1"/>
+  <c:style val="2"/>
   <c:chart>
     <c:title>
       <c:tx>
@@ -508,7 +511,7 @@
               </a:defRPr>
             </a:pPr>
             <a:r>
-              <a:rPr sz="1300" b="0" i="0" u="none" strike="noStrike">
+              <a:rPr lang="en-IN" sz="1300" b="0" i="0" u="none" strike="noStrike">
                 <a:solidFill>
                   <a:srgbClr val="0F172A"/>
                 </a:solidFill>
@@ -519,7 +522,6 @@
           </a:p>
         </c:rich>
       </c:tx>
-      <c:layout/>
       <c:overlay val="0"/>
     </c:title>
     <c:autoTitleDeleted val="0"/>
@@ -550,40 +552,15 @@
             <a:effectLst/>
           </c:spPr>
           <c:invertIfNegative val="0"/>
-          <c:dLbls>
-            <c:numFmt formatCode="#,##0" sourceLinked="0"/>
-            <c:txPr>
-              <a:bodyPr/>
-              <a:lstStyle/>
-              <a:p>
-                <a:pPr>
-                  <a:defRPr b="0" i="0" strike="noStrike" sz="1400" u="none">
-                    <a:solidFill>
-                      <a:srgbClr val="000000"/>
-                    </a:solidFill>
-                    <a:latin typeface="+mn-lt"/>
-                  </a:defRPr>
-                </a:pPr>
-              </a:p>
-            </c:txPr>
-            <c:showLegendKey val="0"/>
-            <c:showVal val="1"/>
-            <c:showCatName val="0"/>
-            <c:showSerName val="0"/>
-            <c:showPercent val="0"/>
-            <c:showBubbleSize val="0"/>
-            <c:showLeaderLines val="0"/>
-          </c:dLbls>
           <c:dPt>
             <c:idx val="0"/>
             <c:invertIfNegative val="0"/>
             <c:bubble3D val="0"/>
-            <c:spPr>
-              <a:solidFill>
-                <a:srgbClr val="024BAB"/>
-              </a:solidFill>
-              <a:effectLst/>
-            </c:spPr>
+            <c:extLst>
+              <c:ext xmlns:c16="http://schemas.microsoft.com/office/drawing/2014/chart" uri="{C3380CC4-5D6E-409C-BE32-E72D297353CC}">
+                <c16:uniqueId val="{00000001-A328-4547-9354-AA284D0A49D2}"/>
+              </c:ext>
+            </c:extLst>
           </c:dPt>
           <c:dPt>
             <c:idx val="1"/>
@@ -595,22 +572,62 @@
               </a:solidFill>
               <a:effectLst/>
             </c:spPr>
+            <c:extLst>
+              <c:ext xmlns:c16="http://schemas.microsoft.com/office/drawing/2014/chart" uri="{C3380CC4-5D6E-409C-BE32-E72D297353CC}">
+                <c16:uniqueId val="{00000003-A328-4547-9354-AA284D0A49D2}"/>
+              </c:ext>
+            </c:extLst>
           </c:dPt>
+          <c:dLbls>
+            <c:numFmt formatCode="#,##0" sourceLinked="0"/>
+            <c:spPr>
+              <a:noFill/>
+              <a:ln>
+                <a:noFill/>
+              </a:ln>
+              <a:effectLst/>
+            </c:spPr>
+            <c:txPr>
+              <a:bodyPr/>
+              <a:lstStyle/>
+              <a:p>
+                <a:pPr>
+                  <a:defRPr sz="1400" b="0" i="0" u="none" strike="noStrike">
+                    <a:solidFill>
+                      <a:srgbClr val="000000"/>
+                    </a:solidFill>
+                    <a:latin typeface="+mn-lt"/>
+                  </a:defRPr>
+                </a:pPr>
+                <a:endParaRPr lang="en-US"/>
+              </a:p>
+            </c:txPr>
+            <c:showLegendKey val="0"/>
+            <c:showVal val="1"/>
+            <c:showCatName val="0"/>
+            <c:showSerName val="0"/>
+            <c:showPercent val="0"/>
+            <c:showBubbleSize val="0"/>
+            <c:showLeaderLines val="0"/>
+            <c:extLst>
+              <c:ext xmlns:c15="http://schemas.microsoft.com/office/drawing/2012/chart" uri="{CE6537A1-D6FC-4f65-9D91-7224C49458BB}">
+                <c15:showLeaderLines val="0"/>
+              </c:ext>
+            </c:extLst>
+          </c:dLbls>
           <c:cat>
-            <c:multiLvlStrRef>
+            <c:strRef>
               <c:f>Sheet1!$A$2:$A$3</c:f>
-              <c:multiLvlStrCache>
+              <c:strCache>
                 <c:ptCount val="2"/>
-                <c:lvl>
-                  <c:pt idx="0">
-                    <c:v>1 worker</c:v>
-                  </c:pt>
-                  <c:pt idx="1">
-                    <c:v>4 workers</c:v>
-                  </c:pt>
-                </c:lvl>
-              </c:multiLvlStrCache>
-            </c:multiLvlStrRef>
+                <c:pt idx="0">
+                  <c:v>1 worker</c:v>
+                </c:pt>
+                <c:pt idx="1">
+                  <c:v>4 workers</c:v>
+                </c:pt>
+              </c:strCache>
+            </c:strRef>
           </c:cat>
           <c:val>
             <c:numRef>
@@ -627,36 +644,23 @@
               </c:numCache>
             </c:numRef>
           </c:val>
+          <c:extLst>
+            <c:ext xmlns:c16="http://schemas.microsoft.com/office/drawing/2014/chart" uri="{C3380CC4-5D6E-409C-BE32-E72D297353CC}">
+              <c16:uniqueId val="{00000004-A328-4547-9354-AA284D0A49D2}"/>
+            </c:ext>
+          </c:extLst>
         </c:ser>
         <c:dLbls>
-          <c:numFmt formatCode="#,##0" sourceLinked="0"/>
-          <c:txPr>
-            <a:bodyPr/>
-            <a:lstStyle/>
-            <a:p>
-              <a:pPr>
-                <a:defRPr b="0" i="0" strike="noStrike" sz="1400" u="none">
-                  <a:solidFill>
-                    <a:srgbClr val="000000"/>
-                  </a:solidFill>
-                  <a:latin typeface="+mn-lt"/>
-                </a:defRPr>
-              </a:pPr>
-            </a:p>
-          </c:txPr>
           <c:showLegendKey val="0"/>
           <c:showVal val="1"/>
           <c:showCatName val="0"/>
           <c:showSerName val="0"/>
           <c:showPercent val="0"/>
           <c:showBubbleSize val="0"/>
-          <c:showLeaderLines val="0"/>
         </c:dLbls>
         <c:gapWidth val="150"/>
-        <c:overlap val="0"/>
         <c:axId val="2094734554"/>
         <c:axId val="2094734552"/>
-        <c:axId val="2094734556"/>
       </c:barChart>
       <c:catAx>
         <c:axId val="2094734554"/>
@@ -697,6 +701,7 @@
         <c:crosses val="autoZero"/>
         <c:auto val="1"/>
         <c:lblAlgn val="ctr"/>
+        <c:lblOffset val="100"/>
         <c:noMultiLvlLbl val="1"/>
       </c:catAx>
       <c:valAx>
@@ -759,6 +764,7 @@
     </c:plotArea>
     <c:plotVisOnly val="1"/>
     <c:dispBlanksAs val="span"/>
+    <c:showDLblsOverMax val="1"/>
   </c:chart>
   <c:spPr>
     <a:noFill/>
@@ -774,9 +780,11 @@
 </file>
 
 <file path=ppt/charts/chart3.xml><?xml version="1.0" encoding="utf-8"?>
-<c:chartSpace xmlns:c="http://schemas.openxmlformats.org/drawingml/2006/chart" xmlns:a="http://schemas.openxmlformats.org/drawingml/2006/main" xmlns:r="http://schemas.openxmlformats.org/officeDocument/2006/relationships">
+<c:chartSpace xmlns:c="http://schemas.openxmlformats.org/drawingml/2006/chart" xmlns:a="http://schemas.openxmlformats.org/drawingml/2006/main" xmlns:r="http://schemas.openxmlformats.org/officeDocument/2006/relationships" xmlns:c16r2="http://schemas.microsoft.com/office/drawing/2015/06/chart">
   <c:date1904 val="0"/>
+  <c:lang val="en-US"/>
   <c:roundedCorners val="1"/>
+  <c:style val="2"/>
   <c:chart>
     <c:title>
       <c:tx>
@@ -793,7 +801,7 @@
               </a:defRPr>
             </a:pPr>
             <a:r>
-              <a:rPr sz="1300" b="0" i="0" u="none" strike="noStrike">
+              <a:rPr lang="en-IN" sz="1300" b="0" i="0" u="none" strike="noStrike">
                 <a:solidFill>
                   <a:srgbClr val="0F172A"/>
                 </a:solidFill>
@@ -804,7 +812,6 @@
           </a:p>
         </c:rich>
       </c:tx>
-      <c:layout/>
       <c:overlay val="0"/>
     </c:title>
     <c:autoTitleDeleted val="0"/>
@@ -835,40 +842,15 @@
             <a:effectLst/>
           </c:spPr>
           <c:invertIfNegative val="0"/>
-          <c:dLbls>
-            <c:numFmt formatCode="#,##0" sourceLinked="0"/>
-            <c:txPr>
-              <a:bodyPr/>
-              <a:lstStyle/>
-              <a:p>
-                <a:pPr>
-                  <a:defRPr b="0" i="0" strike="noStrike" sz="1400" u="none">
-                    <a:solidFill>
-                      <a:srgbClr val="000000"/>
-                    </a:solidFill>
-                    <a:latin typeface="+mn-lt"/>
-                  </a:defRPr>
-                </a:pPr>
-              </a:p>
-            </c:txPr>
-            <c:showLegendKey val="0"/>
-            <c:showVal val="1"/>
-            <c:showCatName val="0"/>
-            <c:showSerName val="0"/>
-            <c:showPercent val="0"/>
-            <c:showBubbleSize val="0"/>
-            <c:showLeaderLines val="0"/>
-          </c:dLbls>
           <c:dPt>
             <c:idx val="0"/>
             <c:invertIfNegative val="0"/>
             <c:bubble3D val="0"/>
-            <c:spPr>
-              <a:solidFill>
-                <a:srgbClr val="024BAB"/>
-              </a:solidFill>
-              <a:effectLst/>
-            </c:spPr>
+            <c:extLst>
+              <c:ext xmlns:c16="http://schemas.microsoft.com/office/drawing/2014/chart" uri="{C3380CC4-5D6E-409C-BE32-E72D297353CC}">
+                <c16:uniqueId val="{00000001-7FDE-4200-BB60-5080B1E30435}"/>
+              </c:ext>
+            </c:extLst>
           </c:dPt>
           <c:dPt>
             <c:idx val="1"/>
@@ -880,22 +862,62 @@
               </a:solidFill>
               <a:effectLst/>
             </c:spPr>
+            <c:extLst>
+              <c:ext xmlns:c16="http://schemas.microsoft.com/office/drawing/2014/chart" uri="{C3380CC4-5D6E-409C-BE32-E72D297353CC}">
+                <c16:uniqueId val="{00000003-7FDE-4200-BB60-5080B1E30435}"/>
+              </c:ext>
+            </c:extLst>
           </c:dPt>
+          <c:dLbls>
+            <c:numFmt formatCode="#,##0" sourceLinked="0"/>
+            <c:spPr>
+              <a:noFill/>
+              <a:ln>
+                <a:noFill/>
+              </a:ln>
+              <a:effectLst/>
+            </c:spPr>
+            <c:txPr>
+              <a:bodyPr/>
+              <a:lstStyle/>
+              <a:p>
+                <a:pPr>
+                  <a:defRPr sz="1400" b="0" i="0" u="none" strike="noStrike">
+                    <a:solidFill>
+                      <a:srgbClr val="000000"/>
+                    </a:solidFill>
+                    <a:latin typeface="+mn-lt"/>
+                  </a:defRPr>
+                </a:pPr>
+                <a:endParaRPr lang="en-US"/>
+              </a:p>
+            </c:txPr>
+            <c:showLegendKey val="0"/>
+            <c:showVal val="1"/>
+            <c:showCatName val="0"/>
+            <c:showSerName val="0"/>
+            <c:showPercent val="0"/>
+            <c:showBubbleSize val="0"/>
+            <c:showLeaderLines val="0"/>
+            <c:extLst>
+              <c:ext xmlns:c15="http://schemas.microsoft.com/office/drawing/2012/chart" uri="{CE6537A1-D6FC-4f65-9D91-7224C49458BB}">
+                <c15:showLeaderLines val="0"/>
+              </c:ext>
+            </c:extLst>
+          </c:dLbls>
           <c:cat>
-            <c:multiLvlStrRef>
+            <c:strRef>
               <c:f>Sheet1!$A$2:$A$3</c:f>
-              <c:multiLvlStrCache>
+              <c:strCache>
                 <c:ptCount val="2"/>
-                <c:lvl>
-                  <c:pt idx="0">
-                    <c:v>1 worker</c:v>
-                  </c:pt>
-                  <c:pt idx="1">
-                    <c:v>4 workers</c:v>
-                  </c:pt>
-                </c:lvl>
-              </c:multiLvlStrCache>
-            </c:multiLvlStrRef>
+                <c:pt idx="0">
+                  <c:v>1 worker</c:v>
+                </c:pt>
+                <c:pt idx="1">
+                  <c:v>4 workers</c:v>
+                </c:pt>
+              </c:strCache>
+            </c:strRef>
           </c:cat>
           <c:val>
             <c:numRef>
@@ -912,36 +934,23 @@
               </c:numCache>
             </c:numRef>
           </c:val>
+          <c:extLst>
+            <c:ext xmlns:c16="http://schemas.microsoft.com/office/drawing/2014/chart" uri="{C3380CC4-5D6E-409C-BE32-E72D297353CC}">
+              <c16:uniqueId val="{00000004-7FDE-4200-BB60-5080B1E30435}"/>
+            </c:ext>
+          </c:extLst>
         </c:ser>
         <c:dLbls>
-          <c:numFmt formatCode="#,##0" sourceLinked="0"/>
-          <c:txPr>
-            <a:bodyPr/>
-            <a:lstStyle/>
-            <a:p>
-              <a:pPr>
-                <a:defRPr b="0" i="0" strike="noStrike" sz="1400" u="none">
-                  <a:solidFill>
-                    <a:srgbClr val="000000"/>
-                  </a:solidFill>
-                  <a:latin typeface="+mn-lt"/>
-                </a:defRPr>
-              </a:pPr>
-            </a:p>
-          </c:txPr>
           <c:showLegendKey val="0"/>
           <c:showVal val="1"/>
           <c:showCatName val="0"/>
           <c:showSerName val="0"/>
           <c:showPercent val="0"/>
           <c:showBubbleSize val="0"/>
-          <c:showLeaderLines val="0"/>
         </c:dLbls>
         <c:gapWidth val="150"/>
-        <c:overlap val="0"/>
         <c:axId val="2094734554"/>
         <c:axId val="2094734552"/>
-        <c:axId val="2094734556"/>
       </c:barChart>
       <c:catAx>
         <c:axId val="2094734554"/>
@@ -982,6 +991,7 @@
         <c:crosses val="autoZero"/>
         <c:auto val="1"/>
         <c:lblAlgn val="ctr"/>
+        <c:lblOffset val="100"/>
         <c:noMultiLvlLbl val="1"/>
       </c:catAx>
       <c:valAx>
@@ -1044,6 +1054,7 @@
     </c:plotArea>
     <c:plotVisOnly val="1"/>
     <c:dispBlanksAs val="span"/>
+    <c:showDLblsOverMax val="1"/>
   </c:chart>
   <c:spPr>
     <a:noFill/>
@@ -1080,234 +1091,10 @@
           <a:chExt cx="0" cy="0"/>
         </a:xfrm>
       </p:grpSpPr>
-      <p:sp>
-        <p:nvSpPr>
-          <p:cNvPr id="2" name="Header Placeholder 1"/>
-          <p:cNvSpPr>
-            <a:spLocks noGrp="1"/>
-          </p:cNvSpPr>
-          <p:nvPr>
-            <p:ph type="hdr" sz="quarter"/>
-          </p:nvPr>
-        </p:nvSpPr>
-        <p:spPr>
-          <a:xfrm>
-            <a:off x="0" y="0"/>
-            <a:ext cx="2971800" cy="458788"/>
-          </a:xfrm>
-          <a:prstGeom prst="rect">
-            <a:avLst/>
-          </a:prstGeom>
-        </p:spPr>
-        <p:txBody>
-          <a:bodyPr vert="horz" lIns="91440" tIns="45720" rIns="91440" bIns="45720" rtlCol="0"/>
-          <a:lstStyle>
-            <a:lvl1pPr algn="l">
-              <a:defRPr sz="1200"/>
-            </a:lvl1pPr>
-          </a:lstStyle>
-          <a:p>
-            <a:endParaRPr lang="en-US"/>
-          </a:p>
-        </p:txBody>
-      </p:sp>
-      <p:sp>
-        <p:nvSpPr>
-          <p:cNvPr id="3" name="Date Placeholder 2"/>
-          <p:cNvSpPr>
-            <a:spLocks noGrp="1"/>
-          </p:cNvSpPr>
-          <p:nvPr>
-            <p:ph type="dt" idx="1"/>
-          </p:nvPr>
-        </p:nvSpPr>
-        <p:spPr>
-          <a:xfrm>
-            <a:off x="3884613" y="0"/>
-            <a:ext cx="2971800" cy="458788"/>
-          </a:xfrm>
-          <a:prstGeom prst="rect">
-            <a:avLst/>
-          </a:prstGeom>
-        </p:spPr>
-        <p:txBody>
-          <a:bodyPr vert="horz" lIns="91440" tIns="45720" rIns="91440" bIns="45720" rtlCol="0"/>
-          <a:lstStyle>
-            <a:lvl1pPr algn="r">
-              <a:defRPr sz="1200"/>
-            </a:lvl1pPr>
-          </a:lstStyle>
-          <a:p>
-            <a:fld id="{5282F153-3F37-0F45-9E97-73ACFA13230C}" type="datetimeFigureOut">
-              <a:rPr lang="en-US"/>
-              <a:t>7/23/19</a:t>
-            </a:fld>
-            <a:endParaRPr lang="en-US"/>
-          </a:p>
-        </p:txBody>
-      </p:sp>
-      <p:sp>
-        <p:nvSpPr>
-          <p:cNvPr id="4" name="Slide Image Placeholder 3"/>
-          <p:cNvSpPr>
-            <a:spLocks noGrp="1" noRot="1" noChangeAspect="1"/>
-          </p:cNvSpPr>
-          <p:nvPr>
-            <p:ph type="sldImg" idx="2"/>
-          </p:nvPr>
-        </p:nvSpPr>
-        <p:spPr>
-          <a:xfrm>
-            <a:off x="685800" y="1143000"/>
-            <a:ext cx="5486400" cy="3086100"/>
-          </a:xfrm>
-          <a:prstGeom prst="rect">
-            <a:avLst/>
-          </a:prstGeom>
-          <a:noFill/>
-          <a:ln w="12700">
-            <a:solidFill>
-              <a:prstClr val="black"/>
-            </a:solidFill>
-          </a:ln>
-        </p:spPr>
-        <p:txBody>
-          <a:bodyPr vert="horz" lIns="91440" tIns="45720" rIns="91440" bIns="45720" rtlCol="0" anchor="ctr"/>
-          <a:lstStyle/>
-          <a:p>
-            <a:endParaRPr lang="en-US"/>
-          </a:p>
-        </p:txBody>
-      </p:sp>
-      <p:sp>
-        <p:nvSpPr>
-          <p:cNvPr id="5" name="Notes Placeholder 4"/>
-          <p:cNvSpPr>
-            <a:spLocks noGrp="1"/>
-          </p:cNvSpPr>
-          <p:nvPr>
-            <p:ph type="body" sz="quarter" idx="3"/>
-          </p:nvPr>
-        </p:nvSpPr>
-        <p:spPr>
-          <a:xfrm>
-            <a:off x="685800" y="4400550"/>
-            <a:ext cx="5486400" cy="3600450"/>
-          </a:xfrm>
-          <a:prstGeom prst="rect">
-            <a:avLst/>
-          </a:prstGeom>
-        </p:spPr>
-        <p:txBody>
-          <a:bodyPr vert="horz" lIns="91440" tIns="45720" rIns="91440" bIns="45720" rtlCol="0"/>
-          <a:lstStyle/>
-          <a:p>
-            <a:pPr lvl="0"/>
-            <a:r>
-              <a:rPr lang="en-US"/>
-              <a:t>Click to edit Master text styles</a:t>
-            </a:r>
-          </a:p>
-          <a:p>
-            <a:pPr lvl="1"/>
-            <a:r>
-              <a:rPr lang="en-US"/>
-              <a:t>Second level</a:t>
-            </a:r>
-          </a:p>
-          <a:p>
-            <a:pPr lvl="2"/>
-            <a:r>
-              <a:rPr lang="en-US"/>
-              <a:t>Third level</a:t>
-            </a:r>
-          </a:p>
-          <a:p>
-            <a:pPr lvl="3"/>
-            <a:r>
-              <a:rPr lang="en-US"/>
-              <a:t>Fourth level</a:t>
-            </a:r>
-          </a:p>
-          <a:p>
-            <a:pPr lvl="4"/>
-            <a:r>
-              <a:rPr lang="en-US"/>
-              <a:t>Fifth level</a:t>
-            </a:r>
-          </a:p>
-        </p:txBody>
-      </p:sp>
-      <p:sp>
-        <p:nvSpPr>
-          <p:cNvPr id="6" name="Footer Placeholder 5"/>
-          <p:cNvSpPr>
-            <a:spLocks noGrp="1"/>
-          </p:cNvSpPr>
-          <p:nvPr>
-            <p:ph type="ftr" sz="quarter" idx="4"/>
-          </p:nvPr>
-        </p:nvSpPr>
-        <p:spPr>
-          <a:xfrm>
-            <a:off x="0" y="8685213"/>
-            <a:ext cx="2971800" cy="458787"/>
-          </a:xfrm>
-          <a:prstGeom prst="rect">
-            <a:avLst/>
-          </a:prstGeom>
-        </p:spPr>
-        <p:txBody>
-          <a:bodyPr vert="horz" lIns="91440" tIns="45720" rIns="91440" bIns="45720" rtlCol="0" anchor="b"/>
-          <a:lstStyle>
-            <a:lvl1pPr algn="l">
-              <a:defRPr sz="1200"/>
-            </a:lvl1pPr>
-          </a:lstStyle>
-          <a:p>
-            <a:endParaRPr lang="en-US"/>
-          </a:p>
-        </p:txBody>
-      </p:sp>
-      <p:sp>
-        <p:nvSpPr>
-          <p:cNvPr id="7" name="Slide Number Placeholder 6"/>
-          <p:cNvSpPr>
-            <a:spLocks noGrp="1"/>
-          </p:cNvSpPr>
-          <p:nvPr>
-            <p:ph type="sldNum" sz="quarter" idx="5"/>
-          </p:nvPr>
-        </p:nvSpPr>
-        <p:spPr>
-          <a:xfrm>
-            <a:off x="3884613" y="8685213"/>
-            <a:ext cx="2971800" cy="458787"/>
-          </a:xfrm>
-          <a:prstGeom prst="rect">
-            <a:avLst/>
-          </a:prstGeom>
-        </p:spPr>
-        <p:txBody>
-          <a:bodyPr vert="horz" lIns="91440" tIns="45720" rIns="91440" bIns="45720" rtlCol="0" anchor="b"/>
-          <a:lstStyle>
-            <a:lvl1pPr algn="r">
-              <a:defRPr sz="1200"/>
-            </a:lvl1pPr>
-          </a:lstStyle>
-          <a:p>
-            <a:fld id="{CE5E9CC1-C706-0F49-92D6-E571CC5EEA8F}" type="slidenum">
-              <a:rPr lang="en-US"/>
-              <a:t>‹#›</a:t>
-            </a:fld>
-            <a:endParaRPr lang="en-US"/>
-          </a:p>
-        </p:txBody>
-      </p:sp>
     </p:spTree>
     <p:extLst>
       <p:ext uri="{BB962C8B-B14F-4D97-AF65-F5344CB8AC3E}">
-        <p14:creationId xmlns:p14="http://schemas.microsoft.com/office/powerpoint/2010/main" val="1024086991"/>
+        <p14:creationId xmlns:p14="http://schemas.microsoft.com/office/powerpoint/2010/main" val="1821463113"/>
       </p:ext>
     </p:extLst>
   </p:cSld>
@@ -1455,7 +1242,6 @@
               <a:rPr lang="en-US" dirty="0"/>
               <a:t>Introduce NestHR by Pixelate Nest: one platform for employees, attendance (including biometric devices), leave, payroll and performance. This deck shows the real product and then proves how it behaves at 2,000 employees.</a:t>
             </a:r>
-            <a:endParaRPr lang="en-US" dirty="0"/>
           </a:p>
         </p:txBody>
       </p:sp>
@@ -1543,7 +1329,6 @@
               <a:rPr lang="en-US" dirty="0"/>
               <a:t>Rules are configured once and applied to all employees automatically.</a:t>
             </a:r>
-            <a:endParaRPr lang="en-US" dirty="0"/>
           </a:p>
         </p:txBody>
       </p:sp>
@@ -1631,7 +1416,6 @@
               <a:rPr lang="en-US" dirty="0"/>
               <a:t>Late approvals keep payroll deductions fair and auditable.</a:t>
             </a:r>
-            <a:endParaRPr lang="en-US" dirty="0"/>
           </a:p>
         </p:txBody>
       </p:sp>
@@ -1719,7 +1503,6 @@
               <a:rPr lang="en-US" dirty="0"/>
               <a:t>Payroll for 1,881 employees ran in about 2.0 seconds in the test.</a:t>
             </a:r>
-            <a:endParaRPr lang="en-US" dirty="0"/>
           </a:p>
         </p:txBody>
       </p:sp>
@@ -1807,7 +1590,6 @@
               <a:rPr lang="en-US" dirty="0"/>
               <a:t>Performance overview for 1,952 staff returns in about 0.36 s.</a:t>
             </a:r>
-            <a:endParaRPr lang="en-US" dirty="0"/>
           </a:p>
         </p:txBody>
       </p:sp>
@@ -1895,7 +1677,6 @@
               <a:rPr lang="en-US" dirty="0"/>
               <a:t>Loans link directly to payroll so EMIs are never missed.</a:t>
             </a:r>
-            <a:endParaRPr lang="en-US" dirty="0"/>
           </a:p>
         </p:txBody>
       </p:sp>
@@ -1983,7 +1764,6 @@
               <a:rPr lang="en-US" dirty="0"/>
               <a:t>Lightweight task tracking and broadcast announcements.</a:t>
             </a:r>
-            <a:endParaRPr lang="en-US" dirty="0"/>
           </a:p>
         </p:txBody>
       </p:sp>
@@ -2071,7 +1851,6 @@
               <a:rPr lang="en-US" dirty="0"/>
               <a:t>Biometric terminals push punches to the server (ADMS). Punches are matched to employees and become attendance automatically. Device logs show every communication for troubleshooting.</a:t>
             </a:r>
-            <a:endParaRPr lang="en-US" dirty="0"/>
           </a:p>
         </p:txBody>
       </p:sp>
@@ -2159,7 +1938,6 @@
               <a:rPr lang="en-US" dirty="0"/>
               <a:t>Security basics for HR data: encryption at rest for documents, OTP and 2FA login, login lock after repeated failures, audit trail and role-based access.</a:t>
             </a:r>
-            <a:endParaRPr lang="en-US" dirty="0"/>
           </a:p>
         </p:txBody>
       </p:sp>
@@ -2247,7 +2025,6 @@
               <a:rPr lang="en-US" dirty="0"/>
               <a:t>These are the responsive web screens at phone width. A native NestHR mobile app (React Native) is also available for employees.</a:t>
             </a:r>
-            <a:endParaRPr lang="en-US" dirty="0"/>
           </a:p>
         </p:txBody>
       </p:sp>
@@ -2335,7 +2112,6 @@
               <a:rPr lang="en-US" dirty="0"/>
               <a:t>Now the part the tender cares about most: what happens when the company has 2,000 employees.</a:t>
             </a:r>
-            <a:endParaRPr lang="en-US" dirty="0"/>
           </a:p>
         </p:txBody>
       </p:sp>
@@ -2423,7 +2199,6 @@
               <a:rPr lang="en-US" dirty="0"/>
               <a:t>Headline slide. All figures were measured on a test copy with 2,000 employees and about 112,000 attendance records (60 days). Details and test conditions are in the scalability section.</a:t>
             </a:r>
-            <a:endParaRPr lang="en-US" dirty="0"/>
           </a:p>
         </p:txBody>
       </p:sp>
@@ -2511,7 +2286,6 @@
               <a:rPr lang="en-US" dirty="0"/>
               <a:t>Be transparent: this is a lab test on a local machine. Real servers add network latency but also have dedicated resources.</a:t>
             </a:r>
-            <a:endParaRPr lang="en-US" dirty="0"/>
           </a:p>
         </p:txBody>
       </p:sp>
@@ -2599,7 +2373,6 @@
               <a:rPr lang="en-US" dirty="0"/>
               <a:t>We deliberately looked for weak spots and fixed them in the product before this submission.</a:t>
             </a:r>
-            <a:endParaRPr lang="en-US" dirty="0"/>
           </a:p>
         </p:txBody>
       </p:sp>
@@ -2687,7 +2460,6 @@
               <a:rPr lang="en-US" dirty="0"/>
               <a:t>Clients and devices talk to a clustered Node.js API. MongoDB holds data with indexes on the hot paths. Documents are encrypted. WhatsApp and push notifications are sent asynchronously.</a:t>
             </a:r>
-            <a:endParaRPr lang="en-US" dirty="0"/>
           </a:p>
         </p:txBody>
       </p:sp>
@@ -2775,7 +2547,6 @@
               <a:rPr lang="en-US" dirty="0"/>
               <a:t>Explain the morning rush: 2,000 people punch within about 10 minutes, roughly 3 punches per second. The system ingests 155 per second.</a:t>
             </a:r>
-            <a:endParaRPr lang="en-US" dirty="0"/>
           </a:p>
         </p:txBody>
       </p:sp>
@@ -2863,7 +2634,6 @@
               <a:rPr lang="en-US" dirty="0"/>
               <a:t>Milliseconds, lower is better. Employee list of 50 is 27 ms. Dashboard cold is 562 ms and 4 ms when cached.</a:t>
             </a:r>
-            <a:endParaRPr lang="en-US" dirty="0"/>
           </a:p>
         </p:txBody>
       </p:sp>
@@ -2951,7 +2721,6 @@
               <a:rPr lang="en-US" dirty="0"/>
               <a:t>Payroll processed 1,881 active employees in about 2 seconds, including attendance, leave, loans and deductions.</a:t>
             </a:r>
-            <a:endParaRPr lang="en-US" dirty="0"/>
           </a:p>
         </p:txBody>
       </p:sp>
@@ -3039,7 +2808,6 @@
               <a:rPr lang="en-US" dirty="0"/>
               <a:t>60 simulated users hammering heavy screens at the same time. One worker: 17 req/s, p50 3.3 s. Four workers: 49 req/s, p50 0.88 s, p95 2.4 s. Zero errors in both.</a:t>
             </a:r>
-            <a:endParaRPr lang="en-US" dirty="0"/>
           </a:p>
         </p:txBody>
       </p:sp>
@@ -3127,7 +2895,6 @@
               <a:rPr lang="en-US" dirty="0"/>
               <a:t>Attendance is about 182 bytes per record plus index. 2,000 employees produce roughly 680k records a year, around 160 MB with indexes. Payroll about 19 MB a year. About 0.9 GB over five years.</a:t>
             </a:r>
-            <a:endParaRPr lang="en-US" dirty="0"/>
           </a:p>
         </p:txBody>
       </p:sp>
@@ -3215,7 +2982,6 @@
               <a:rPr lang="en-US" dirty="0"/>
               <a:t>Typical timeline; adjust per the tender.</a:t>
             </a:r>
-            <a:endParaRPr lang="en-US" dirty="0"/>
           </a:p>
         </p:txBody>
       </p:sp>
@@ -3303,7 +3069,6 @@
               <a:rPr lang="en-US" dirty="0"/>
               <a:t>Close: offer a live demo and a pilot with a subset of employees.</a:t>
             </a:r>
-            <a:endParaRPr lang="en-US" dirty="0"/>
           </a:p>
         </p:txBody>
       </p:sp>
@@ -3391,7 +3156,6 @@
               <a:rPr lang="en-US" dirty="0"/>
               <a:t>Walk through the modules quickly; each one has its own slide next.</a:t>
             </a:r>
-            <a:endParaRPr lang="en-US" dirty="0"/>
           </a:p>
         </p:txBody>
       </p:sp>
@@ -3479,7 +3243,6 @@
               <a:rPr lang="en-US" dirty="0"/>
               <a:t>The dashboard is what HR opens first. Counts are computed in one pass and cached for 30 seconds, so many HR users can keep it open.</a:t>
             </a:r>
-            <a:endParaRPr lang="en-US" dirty="0"/>
           </a:p>
         </p:txBody>
       </p:sp>
@@ -3567,7 +3330,6 @@
               <a:rPr lang="en-US" dirty="0"/>
               <a:t>Employees page loads 50 at a time in about 27 ms, search in 28 ms. Loading all 2,000 at once takes about 0.3 s.</a:t>
             </a:r>
-            <a:endParaRPr lang="en-US" dirty="0"/>
           </a:p>
         </p:txBody>
       </p:sp>
@@ -3655,7 +3417,6 @@
               <a:rPr lang="en-US" dirty="0"/>
               <a:t>Bulk import is limited to 200 rows per upload for safety; for the initial 2,000 we load data in batches or via a one-time migration which we handle.</a:t>
             </a:r>
-            <a:endParaRPr lang="en-US" dirty="0"/>
           </a:p>
         </p:txBody>
       </p:sp>
@@ -3743,7 +3504,6 @@
               <a:rPr lang="en-US" dirty="0"/>
               <a:t>The attendance screen loads one day at a time, so it stays fast regardless of company size: 1,881 rows in 0.19 s.</a:t>
             </a:r>
-            <a:endParaRPr lang="en-US" dirty="0"/>
           </a:p>
         </p:txBody>
       </p:sp>
@@ -3831,7 +3591,6 @@
               <a:rPr lang="en-US" dirty="0"/>
               <a:t>Leave balances for all 2,000 take about 0.7 s; the very first call of a month takes about 3 s because balances are created.</a:t>
             </a:r>
-            <a:endParaRPr lang="en-US" dirty="0"/>
           </a:p>
         </p:txBody>
       </p:sp>
@@ -3919,7 +3678,6 @@
               <a:rPr lang="en-US" dirty="0"/>
               <a:t>Holidays feed the attendance and payroll calculations so nobody is marked absent on a holiday.</a:t>
             </a:r>
-            <a:endParaRPr lang="en-US" dirty="0"/>
           </a:p>
         </p:txBody>
       </p:sp>
@@ -3997,6 +3755,7 @@
         <a:solidFill>
           <a:srgbClr val="FFFFFF"/>
         </a:solidFill>
+        <a:effectLst/>
       </p:bgPr>
     </p:bg>
     <p:spTree>
@@ -4034,7 +3793,7 @@
           <a:bodyPr wrap="square" lIns="0" tIns="0" rIns="0" bIns="0" rtlCol="0" anchor="ctr"/>
           <a:lstStyle/>
           <a:p>
-            <a:pPr indent="0" marL="0">
+            <a:pPr marL="0" indent="0">
               <a:buNone/>
             </a:pPr>
             <a:r>
@@ -4055,9 +3814,11 @@
       <p:sp>
         <p:nvSpPr>
           <p:cNvPr id="3" name="Text 1"/>
-          <p:cNvSpPr/>
+          <p:cNvSpPr>
+            <a:spLocks noGrp="1"/>
+          </p:cNvSpPr>
           <p:nvPr>
-            <p:ph idx="101" type="title" hasCustomPrompt="1"/>
+            <p:ph type="title" idx="101" hasCustomPrompt="1"/>
           </p:nvPr>
         </p:nvSpPr>
         <p:spPr>
@@ -4074,7 +3835,7 @@
         <p:txBody>
           <a:bodyPr wrap="square" rtlCol="0"/>
           <a:lstStyle>
-            <a:lvl1pPr indent="0" marL="0">
+            <a:lvl1pPr marL="0" indent="0">
               <a:buNone/>
               <a:defRPr lang="en-US" sz="2800" b="1" dirty="0">
                 <a:solidFill>
@@ -4087,7 +3848,7 @@
             </a:lvl1pPr>
           </a:lstStyle>
           <a:p>
-            <a:pPr indent="0" marL="0">
+            <a:pPr marL="0" indent="0">
               <a:buNone/>
             </a:pPr>
             <a:endParaRPr lang="en-US" sz="2800" dirty="0"/>
@@ -4114,7 +3875,7 @@
           </a:prstGeom>
           <a:extLst>
             <a:ext uri="{C572A759-6A51-4108-AA02-DFA0A04FC94B}">
-              <ma14:wrappingTextBoxFlag xmlns:ma14="http://schemas.microsoft.com/office/mac/drawingml/2011/main" val="0"/>
+              <ma14:wrappingTextBoxFlag xmlns:ma14="http://schemas.microsoft.com/office/mac/drawingml/2011/main" xmlns="" val="0"/>
             </a:ext>
           </a:extLst>
         </p:spPr>
@@ -4135,8 +3896,8 @@
           <a:p>
             <a:pPr algn="l"/>
             <a:fld id="{F7021451-1387-4CA6-816F-3879F97B5CBC}" type="slidenum">
-              <a:rPr b="0" lang="en-US"/>
-              <a:t>1002</a:t>
+              <a:rPr lang="en-US" b="0"/>
+              <a:t>‹#›</a:t>
             </a:fld>
             <a:endParaRPr lang="en-US"/>
           </a:p>
@@ -4158,6 +3919,7 @@
         <a:solidFill>
           <a:srgbClr val="0F172A"/>
         </a:solidFill>
+        <a:effectLst/>
       </p:bgPr>
     </p:bg>
     <p:spTree>
@@ -4177,9 +3939,11 @@
       <p:sp>
         <p:nvSpPr>
           <p:cNvPr id="2" name="Text 0"/>
-          <p:cNvSpPr/>
+          <p:cNvSpPr>
+            <a:spLocks noGrp="1"/>
+          </p:cNvSpPr>
           <p:nvPr>
-            <p:ph idx="100" type="title" hasCustomPrompt="1"/>
+            <p:ph type="title" idx="100" hasCustomPrompt="1"/>
           </p:nvPr>
         </p:nvSpPr>
         <p:spPr>
@@ -4196,7 +3960,7 @@
         <p:txBody>
           <a:bodyPr wrap="square" rtlCol="0"/>
           <a:lstStyle>
-            <a:lvl1pPr indent="0" marL="0">
+            <a:lvl1pPr marL="0" indent="0">
               <a:buNone/>
               <a:defRPr lang="en-US" sz="4000" b="1" dirty="0">
                 <a:solidFill>
@@ -4209,7 +3973,7 @@
             </a:lvl1pPr>
           </a:lstStyle>
           <a:p>
-            <a:pPr indent="0" marL="0">
+            <a:pPr marL="0" indent="0">
               <a:buNone/>
             </a:pPr>
             <a:endParaRPr lang="en-US" sz="4000" dirty="0"/>
@@ -4227,6 +3991,11 @@
 <file path=ppt/slideMasters/slideMaster1.xml><?xml version="1.0" encoding="utf-8"?>
 <p:sldMaster xmlns:a="http://schemas.openxmlformats.org/drawingml/2006/main" xmlns:r="http://schemas.openxmlformats.org/officeDocument/2006/relationships" xmlns:p="http://schemas.openxmlformats.org/presentationml/2006/main">
   <p:cSld>
+    <p:bg>
+      <p:bgRef idx="1001">
+        <a:schemeClr val="bg1"/>
+      </p:bgRef>
+    </p:bg>
     <p:spTree>
       <p:nvGrpSpPr>
         <p:cNvPr id="1" name=""/>
@@ -4261,7 +4030,7 @@
           </a:prstGeom>
           <a:extLst>
             <a:ext uri="{C572A759-6A51-4108-AA02-DFA0A04FC94B}">
-              <ma14:wrappingTextBoxFlag xmlns:ma14="http://schemas.microsoft.com/office/mac/drawingml/2011/main" val="0"/>
+              <ma14:wrappingTextBoxFlag xmlns:ma14="http://schemas.microsoft.com/office/mac/drawingml/2011/main" xmlns="" val="0"/>
             </a:ext>
           </a:extLst>
         </p:spPr>
@@ -4282,8 +4051,8 @@
           <a:p>
             <a:pPr algn="l"/>
             <a:fld id="{F7021451-1387-4CA6-816F-3879F97B5CBC}" type="slidenum">
-              <a:rPr b="0" lang="en-US"/>
-              <a:t>null</a:t>
+              <a:rPr lang="en-US" b="0"/>
+              <a:t>‹#›</a:t>
             </a:fld>
             <a:endParaRPr lang="en-US"/>
           </a:p>
@@ -4570,14 +4339,14 @@
       </p:grpSpPr>
       <p:pic>
         <p:nvPicPr>
-          <p:cNvPr id="2" name="Image 0" descr="D:/projects/Pixelate Nest/hrms/frontend/assets/nesthr_white.png">    </p:cNvPr>
+          <p:cNvPr id="2" name="Image 0" descr="D:/projects/Pixelate Nest/hrms/frontend/assets/nesthr_white.png"/>
           <p:cNvPicPr>
             <a:picLocks noChangeAspect="1"/>
           </p:cNvPicPr>
           <p:nvPr/>
         </p:nvPicPr>
         <p:blipFill>
-          <a:blip r:embed="rId1"/>
+          <a:blip r:embed="rId3"/>
           <a:stretch>
             <a:fillRect/>
           </a:stretch>
@@ -4595,9 +4364,11 @@
       <p:sp>
         <p:nvSpPr>
           <p:cNvPr id="3" name="Text 0"/>
-          <p:cNvSpPr/>
+          <p:cNvSpPr>
+            <a:spLocks noGrp="1"/>
+          </p:cNvSpPr>
           <p:nvPr>
-            <p:ph idx="100" type="title" hasCustomPrompt="1"/>
+            <p:ph type="title" idx="100" hasCustomPrompt="1"/>
           </p:nvPr>
         </p:nvSpPr>
         <p:spPr>
@@ -4615,7 +4386,7 @@
           <a:bodyPr wrap="square" lIns="0" tIns="0" rIns="0" bIns="0" rtlCol="0" anchor="ctr"/>
           <a:lstStyle/>
           <a:p>
-            <a:pPr indent="0" marL="0">
+            <a:pPr marL="0" indent="0">
               <a:buNone/>
             </a:pPr>
             <a:r>
@@ -4654,7 +4425,7 @@
           <a:bodyPr wrap="square" lIns="0" tIns="0" rIns="0" bIns="0" rtlCol="0" anchor="ctr"/>
           <a:lstStyle/>
           <a:p>
-            <a:pPr indent="0" marL="0">
+            <a:pPr marL="0" indent="0">
               <a:buNone/>
             </a:pPr>
             <a:r>
@@ -4693,6 +4464,13 @@
             <a:prstDash val="solid"/>
           </a:ln>
         </p:spPr>
+        <p:txBody>
+          <a:bodyPr/>
+          <a:lstStyle/>
+          <a:p>
+            <a:endParaRPr lang="en-IN"/>
+          </a:p>
+        </p:txBody>
       </p:sp>
       <p:sp>
         <p:nvSpPr>
@@ -4715,7 +4493,7 @@
           <a:bodyPr wrap="square" lIns="0" tIns="0" rIns="0" bIns="0" rtlCol="0" anchor="ctr"/>
           <a:lstStyle/>
           <a:p>
-            <a:pPr algn="ctr" indent="0" marL="0">
+            <a:pPr marL="0" indent="0" algn="ctr">
               <a:buNone/>
             </a:pPr>
             <a:r>
@@ -4732,15 +4510,15 @@
       </p:sp>
       <p:pic>
         <p:nvPicPr>
-          <p:cNvPr id="7" name="Image 1" descr="img/dashboard.jpg">    </p:cNvPr>
+          <p:cNvPr id="7" name="Image 1" descr="img/dashboard.jpg"/>
           <p:cNvPicPr>
             <a:picLocks noChangeAspect="1"/>
           </p:cNvPicPr>
           <p:nvPr/>
         </p:nvPicPr>
         <p:blipFill>
-          <a:blip r:embed="rId2"/>
-          <a:srcRect l="0" r="0" t="0" b="0"/>
+          <a:blip r:embed="rId4"/>
+          <a:srcRect/>
           <a:stretch/>
         </p:blipFill>
         <p:spPr>
@@ -4781,9 +4559,11 @@
       <p:sp>
         <p:nvSpPr>
           <p:cNvPr id="2" name="Text 1"/>
-          <p:cNvSpPr/>
+          <p:cNvSpPr>
+            <a:spLocks noGrp="1"/>
+          </p:cNvSpPr>
           <p:nvPr>
-            <p:ph idx="101" type="title" hasCustomPrompt="1"/>
+            <p:ph type="title" idx="101" hasCustomPrompt="1"/>
           </p:nvPr>
         </p:nvSpPr>
         <p:spPr>
@@ -4801,7 +4581,7 @@
           <a:bodyPr wrap="square" lIns="0" tIns="0" rIns="0" bIns="0" rtlCol="0" anchor="ctr"/>
           <a:lstStyle/>
           <a:p>
-            <a:pPr indent="0" marL="0">
+            <a:pPr marL="0" indent="0">
               <a:buNone/>
             </a:pPr>
             <a:r>
@@ -4928,17 +4708,24 @@
             <a:prstDash val="solid"/>
           </a:ln>
         </p:spPr>
+        <p:txBody>
+          <a:bodyPr/>
+          <a:lstStyle/>
+          <a:p>
+            <a:endParaRPr lang="en-IN"/>
+          </a:p>
+        </p:txBody>
       </p:sp>
       <p:pic>
         <p:nvPicPr>
-          <p:cNvPr id="6" name="Image 0" descr="img/attendance-settings.jpg">    </p:cNvPr>
+          <p:cNvPr id="6" name="Image 0" descr="img/attendance-settings.jpg"/>
           <p:cNvPicPr>
             <a:picLocks noChangeAspect="1"/>
           </p:cNvPicPr>
           <p:nvPr/>
         </p:nvPicPr>
         <p:blipFill>
-          <a:blip r:embed="rId1"/>
+          <a:blip r:embed="rId3"/>
           <a:stretch>
             <a:fillRect/>
           </a:stretch>
@@ -4974,6 +4761,13 @@
             <a:prstDash val="solid"/>
           </a:ln>
         </p:spPr>
+        <p:txBody>
+          <a:bodyPr/>
+          <a:lstStyle/>
+          <a:p>
+            <a:endParaRPr lang="en-IN"/>
+          </a:p>
+        </p:txBody>
       </p:sp>
       <p:sp>
         <p:nvSpPr>
@@ -4995,7 +4789,7 @@
           </a:prstGeom>
           <a:extLst>
             <a:ext uri="{C572A759-6A51-4108-AA02-DFA0A04FC94B}">
-              <ma14:wrappingTextBoxFlag xmlns:ma14="http://schemas.microsoft.com/office/mac/drawingml/2011/main" val="0"/>
+              <ma14:wrappingTextBoxFlag xmlns:ma14="http://schemas.microsoft.com/office/mac/drawingml/2011/main" xmlns="" val="0"/>
             </a:ext>
           </a:extLst>
         </p:spPr>
@@ -5016,7 +4810,7 @@
           <a:p>
             <a:pPr algn="l"/>
             <a:fld id="{F7021451-1387-4CA6-816F-3879F97B5CBC}" type="slidenum">
-              <a:rPr b="0" lang="en-US"/>
+              <a:rPr lang="en-US" b="0"/>
               <a:t>10</a:t>
             </a:fld>
             <a:endParaRPr lang="en-US"/>
@@ -5051,9 +4845,11 @@
       <p:sp>
         <p:nvSpPr>
           <p:cNvPr id="2" name="Text 1"/>
-          <p:cNvSpPr/>
+          <p:cNvSpPr>
+            <a:spLocks noGrp="1"/>
+          </p:cNvSpPr>
           <p:nvPr>
-            <p:ph idx="101" type="title" hasCustomPrompt="1"/>
+            <p:ph type="title" idx="101" hasCustomPrompt="1"/>
           </p:nvPr>
         </p:nvSpPr>
         <p:spPr>
@@ -5071,7 +4867,7 @@
           <a:bodyPr wrap="square" lIns="0" tIns="0" rIns="0" bIns="0" rtlCol="0" anchor="ctr"/>
           <a:lstStyle/>
           <a:p>
-            <a:pPr indent="0" marL="0">
+            <a:pPr marL="0" indent="0">
               <a:buNone/>
             </a:pPr>
             <a:r>
@@ -5198,17 +4994,24 @@
             <a:prstDash val="solid"/>
           </a:ln>
         </p:spPr>
+        <p:txBody>
+          <a:bodyPr/>
+          <a:lstStyle/>
+          <a:p>
+            <a:endParaRPr lang="en-IN"/>
+          </a:p>
+        </p:txBody>
       </p:sp>
       <p:pic>
         <p:nvPicPr>
-          <p:cNvPr id="6" name="Image 0" descr="img/late-approvals.jpg">    </p:cNvPr>
+          <p:cNvPr id="6" name="Image 0" descr="img/late-approvals.jpg"/>
           <p:cNvPicPr>
             <a:picLocks noChangeAspect="1"/>
           </p:cNvPicPr>
           <p:nvPr/>
         </p:nvPicPr>
         <p:blipFill>
-          <a:blip r:embed="rId1"/>
+          <a:blip r:embed="rId3"/>
           <a:stretch>
             <a:fillRect/>
           </a:stretch>
@@ -5244,6 +5047,13 @@
             <a:prstDash val="solid"/>
           </a:ln>
         </p:spPr>
+        <p:txBody>
+          <a:bodyPr/>
+          <a:lstStyle/>
+          <a:p>
+            <a:endParaRPr lang="en-IN"/>
+          </a:p>
+        </p:txBody>
       </p:sp>
       <p:sp>
         <p:nvSpPr>
@@ -5265,7 +5075,7 @@
           </a:prstGeom>
           <a:extLst>
             <a:ext uri="{C572A759-6A51-4108-AA02-DFA0A04FC94B}">
-              <ma14:wrappingTextBoxFlag xmlns:ma14="http://schemas.microsoft.com/office/mac/drawingml/2011/main" val="0"/>
+              <ma14:wrappingTextBoxFlag xmlns:ma14="http://schemas.microsoft.com/office/mac/drawingml/2011/main" xmlns="" val="0"/>
             </a:ext>
           </a:extLst>
         </p:spPr>
@@ -5286,7 +5096,7 @@
           <a:p>
             <a:pPr algn="l"/>
             <a:fld id="{F7021451-1387-4CA6-816F-3879F97B5CBC}" type="slidenum">
-              <a:rPr b="0" lang="en-US"/>
+              <a:rPr lang="en-US" b="0"/>
               <a:t>11</a:t>
             </a:fld>
             <a:endParaRPr lang="en-US"/>
@@ -5321,9 +5131,11 @@
       <p:sp>
         <p:nvSpPr>
           <p:cNvPr id="2" name="Text 1"/>
-          <p:cNvSpPr/>
+          <p:cNvSpPr>
+            <a:spLocks noGrp="1"/>
+          </p:cNvSpPr>
           <p:nvPr>
-            <p:ph idx="101" type="title" hasCustomPrompt="1"/>
+            <p:ph type="title" idx="101" hasCustomPrompt="1"/>
           </p:nvPr>
         </p:nvSpPr>
         <p:spPr>
@@ -5341,7 +5153,7 @@
           <a:bodyPr wrap="square" lIns="0" tIns="0" rIns="0" bIns="0" rtlCol="0" anchor="ctr"/>
           <a:lstStyle/>
           <a:p>
-            <a:pPr indent="0" marL="0">
+            <a:pPr marL="0" indent="0">
               <a:buNone/>
             </a:pPr>
             <a:r>
@@ -5468,17 +5280,24 @@
             <a:prstDash val="solid"/>
           </a:ln>
         </p:spPr>
+        <p:txBody>
+          <a:bodyPr/>
+          <a:lstStyle/>
+          <a:p>
+            <a:endParaRPr lang="en-IN"/>
+          </a:p>
+        </p:txBody>
       </p:sp>
       <p:pic>
         <p:nvPicPr>
-          <p:cNvPr id="6" name="Image 0" descr="img/payroll.jpg">    </p:cNvPr>
+          <p:cNvPr id="6" name="Image 0" descr="img/payroll.jpg"/>
           <p:cNvPicPr>
             <a:picLocks noChangeAspect="1"/>
           </p:cNvPicPr>
           <p:nvPr/>
         </p:nvPicPr>
         <p:blipFill>
-          <a:blip r:embed="rId1"/>
+          <a:blip r:embed="rId3"/>
           <a:stretch>
             <a:fillRect/>
           </a:stretch>
@@ -5514,6 +5333,13 @@
             <a:prstDash val="solid"/>
           </a:ln>
         </p:spPr>
+        <p:txBody>
+          <a:bodyPr/>
+          <a:lstStyle/>
+          <a:p>
+            <a:endParaRPr lang="en-IN"/>
+          </a:p>
+        </p:txBody>
       </p:sp>
       <p:sp>
         <p:nvSpPr>
@@ -5535,7 +5361,7 @@
           </a:prstGeom>
           <a:extLst>
             <a:ext uri="{C572A759-6A51-4108-AA02-DFA0A04FC94B}">
-              <ma14:wrappingTextBoxFlag xmlns:ma14="http://schemas.microsoft.com/office/mac/drawingml/2011/main" val="0"/>
+              <ma14:wrappingTextBoxFlag xmlns:ma14="http://schemas.microsoft.com/office/mac/drawingml/2011/main" xmlns="" val="0"/>
             </a:ext>
           </a:extLst>
         </p:spPr>
@@ -5556,7 +5382,7 @@
           <a:p>
             <a:pPr algn="l"/>
             <a:fld id="{F7021451-1387-4CA6-816F-3879F97B5CBC}" type="slidenum">
-              <a:rPr b="0" lang="en-US"/>
+              <a:rPr lang="en-US" b="0"/>
               <a:t>12</a:t>
             </a:fld>
             <a:endParaRPr lang="en-US"/>
@@ -5591,9 +5417,11 @@
       <p:sp>
         <p:nvSpPr>
           <p:cNvPr id="2" name="Text 1"/>
-          <p:cNvSpPr/>
+          <p:cNvSpPr>
+            <a:spLocks noGrp="1"/>
+          </p:cNvSpPr>
           <p:nvPr>
-            <p:ph idx="101" type="title" hasCustomPrompt="1"/>
+            <p:ph type="title" idx="101" hasCustomPrompt="1"/>
           </p:nvPr>
         </p:nvSpPr>
         <p:spPr>
@@ -5611,7 +5439,7 @@
           <a:bodyPr wrap="square" lIns="0" tIns="0" rIns="0" bIns="0" rtlCol="0" anchor="ctr"/>
           <a:lstStyle/>
           <a:p>
-            <a:pPr indent="0" marL="0">
+            <a:pPr marL="0" indent="0">
               <a:buNone/>
             </a:pPr>
             <a:r>
@@ -5738,17 +5566,24 @@
             <a:prstDash val="solid"/>
           </a:ln>
         </p:spPr>
+        <p:txBody>
+          <a:bodyPr/>
+          <a:lstStyle/>
+          <a:p>
+            <a:endParaRPr lang="en-IN"/>
+          </a:p>
+        </p:txBody>
       </p:sp>
       <p:pic>
         <p:nvPicPr>
-          <p:cNvPr id="6" name="Image 0" descr="img/performance.jpg">    </p:cNvPr>
+          <p:cNvPr id="6" name="Image 0" descr="img/performance.jpg"/>
           <p:cNvPicPr>
             <a:picLocks noChangeAspect="1"/>
           </p:cNvPicPr>
           <p:nvPr/>
         </p:nvPicPr>
         <p:blipFill>
-          <a:blip r:embed="rId1"/>
+          <a:blip r:embed="rId3"/>
           <a:stretch>
             <a:fillRect/>
           </a:stretch>
@@ -5784,6 +5619,13 @@
             <a:prstDash val="solid"/>
           </a:ln>
         </p:spPr>
+        <p:txBody>
+          <a:bodyPr/>
+          <a:lstStyle/>
+          <a:p>
+            <a:endParaRPr lang="en-IN"/>
+          </a:p>
+        </p:txBody>
       </p:sp>
       <p:sp>
         <p:nvSpPr>
@@ -5805,7 +5647,7 @@
           </a:prstGeom>
           <a:extLst>
             <a:ext uri="{C572A759-6A51-4108-AA02-DFA0A04FC94B}">
-              <ma14:wrappingTextBoxFlag xmlns:ma14="http://schemas.microsoft.com/office/mac/drawingml/2011/main" val="0"/>
+              <ma14:wrappingTextBoxFlag xmlns:ma14="http://schemas.microsoft.com/office/mac/drawingml/2011/main" xmlns="" val="0"/>
             </a:ext>
           </a:extLst>
         </p:spPr>
@@ -5826,7 +5668,7 @@
           <a:p>
             <a:pPr algn="l"/>
             <a:fld id="{F7021451-1387-4CA6-816F-3879F97B5CBC}" type="slidenum">
-              <a:rPr b="0" lang="en-US"/>
+              <a:rPr lang="en-US" b="0"/>
               <a:t>13</a:t>
             </a:fld>
             <a:endParaRPr lang="en-US"/>
@@ -5861,9 +5703,11 @@
       <p:sp>
         <p:nvSpPr>
           <p:cNvPr id="2" name="Text 1"/>
-          <p:cNvSpPr/>
+          <p:cNvSpPr>
+            <a:spLocks noGrp="1"/>
+          </p:cNvSpPr>
           <p:nvPr>
-            <p:ph idx="101" type="title" hasCustomPrompt="1"/>
+            <p:ph type="title" idx="101" hasCustomPrompt="1"/>
           </p:nvPr>
         </p:nvSpPr>
         <p:spPr>
@@ -5881,7 +5725,7 @@
           <a:bodyPr wrap="square" lIns="0" tIns="0" rIns="0" bIns="0" rtlCol="0" anchor="ctr"/>
           <a:lstStyle/>
           <a:p>
-            <a:pPr indent="0" marL="0">
+            <a:pPr marL="0" indent="0">
               <a:buNone/>
             </a:pPr>
             <a:r>
@@ -6008,17 +5852,24 @@
             <a:prstDash val="solid"/>
           </a:ln>
         </p:spPr>
+        <p:txBody>
+          <a:bodyPr/>
+          <a:lstStyle/>
+          <a:p>
+            <a:endParaRPr lang="en-IN"/>
+          </a:p>
+        </p:txBody>
       </p:sp>
       <p:pic>
         <p:nvPicPr>
-          <p:cNvPr id="6" name="Image 0" descr="img/loans.jpg">    </p:cNvPr>
+          <p:cNvPr id="6" name="Image 0" descr="img/loans.jpg"/>
           <p:cNvPicPr>
             <a:picLocks noChangeAspect="1"/>
           </p:cNvPicPr>
           <p:nvPr/>
         </p:nvPicPr>
         <p:blipFill>
-          <a:blip r:embed="rId1"/>
+          <a:blip r:embed="rId3"/>
           <a:stretch>
             <a:fillRect/>
           </a:stretch>
@@ -6054,6 +5905,13 @@
             <a:prstDash val="solid"/>
           </a:ln>
         </p:spPr>
+        <p:txBody>
+          <a:bodyPr/>
+          <a:lstStyle/>
+          <a:p>
+            <a:endParaRPr lang="en-IN"/>
+          </a:p>
+        </p:txBody>
       </p:sp>
       <p:sp>
         <p:nvSpPr>
@@ -6075,7 +5933,7 @@
           </a:prstGeom>
           <a:extLst>
             <a:ext uri="{C572A759-6A51-4108-AA02-DFA0A04FC94B}">
-              <ma14:wrappingTextBoxFlag xmlns:ma14="http://schemas.microsoft.com/office/mac/drawingml/2011/main" val="0"/>
+              <ma14:wrappingTextBoxFlag xmlns:ma14="http://schemas.microsoft.com/office/mac/drawingml/2011/main" xmlns="" val="0"/>
             </a:ext>
           </a:extLst>
         </p:spPr>
@@ -6096,7 +5954,7 @@
           <a:p>
             <a:pPr algn="l"/>
             <a:fld id="{F7021451-1387-4CA6-816F-3879F97B5CBC}" type="slidenum">
-              <a:rPr b="0" lang="en-US"/>
+              <a:rPr lang="en-US" b="0"/>
               <a:t>14</a:t>
             </a:fld>
             <a:endParaRPr lang="en-US"/>
@@ -6131,9 +5989,11 @@
       <p:sp>
         <p:nvSpPr>
           <p:cNvPr id="2" name="Text 1"/>
-          <p:cNvSpPr/>
+          <p:cNvSpPr>
+            <a:spLocks noGrp="1"/>
+          </p:cNvSpPr>
           <p:nvPr>
-            <p:ph idx="101" type="title" hasCustomPrompt="1"/>
+            <p:ph type="title" idx="101" hasCustomPrompt="1"/>
           </p:nvPr>
         </p:nvSpPr>
         <p:spPr>
@@ -6151,7 +6011,7 @@
           <a:bodyPr wrap="square" lIns="0" tIns="0" rIns="0" bIns="0" rtlCol="0" anchor="ctr"/>
           <a:lstStyle/>
           <a:p>
-            <a:pPr indent="0" marL="0">
+            <a:pPr marL="0" indent="0">
               <a:buNone/>
             </a:pPr>
             <a:r>
@@ -6278,17 +6138,24 @@
             <a:prstDash val="solid"/>
           </a:ln>
         </p:spPr>
+        <p:txBody>
+          <a:bodyPr/>
+          <a:lstStyle/>
+          <a:p>
+            <a:endParaRPr lang="en-IN"/>
+          </a:p>
+        </p:txBody>
       </p:sp>
       <p:pic>
         <p:nvPicPr>
-          <p:cNvPr id="6" name="Image 0" descr="img/tasks.jpg">    </p:cNvPr>
+          <p:cNvPr id="6" name="Image 0" descr="img/tasks.jpg"/>
           <p:cNvPicPr>
             <a:picLocks noChangeAspect="1"/>
           </p:cNvPicPr>
           <p:nvPr/>
         </p:nvPicPr>
         <p:blipFill>
-          <a:blip r:embed="rId1"/>
+          <a:blip r:embed="rId3"/>
           <a:stretch>
             <a:fillRect/>
           </a:stretch>
@@ -6324,6 +6191,13 @@
             <a:prstDash val="solid"/>
           </a:ln>
         </p:spPr>
+        <p:txBody>
+          <a:bodyPr/>
+          <a:lstStyle/>
+          <a:p>
+            <a:endParaRPr lang="en-IN"/>
+          </a:p>
+        </p:txBody>
       </p:sp>
       <p:sp>
         <p:nvSpPr>
@@ -6345,7 +6219,7 @@
           </a:prstGeom>
           <a:extLst>
             <a:ext uri="{C572A759-6A51-4108-AA02-DFA0A04FC94B}">
-              <ma14:wrappingTextBoxFlag xmlns:ma14="http://schemas.microsoft.com/office/mac/drawingml/2011/main" val="0"/>
+              <ma14:wrappingTextBoxFlag xmlns:ma14="http://schemas.microsoft.com/office/mac/drawingml/2011/main" xmlns="" val="0"/>
             </a:ext>
           </a:extLst>
         </p:spPr>
@@ -6366,7 +6240,7 @@
           <a:p>
             <a:pPr algn="l"/>
             <a:fld id="{F7021451-1387-4CA6-816F-3879F97B5CBC}" type="slidenum">
-              <a:rPr b="0" lang="en-US"/>
+              <a:rPr lang="en-US" b="0"/>
               <a:t>15</a:t>
             </a:fld>
             <a:endParaRPr lang="en-US"/>
@@ -6401,9 +6275,11 @@
       <p:sp>
         <p:nvSpPr>
           <p:cNvPr id="2" name="Text 1"/>
-          <p:cNvSpPr/>
+          <p:cNvSpPr>
+            <a:spLocks noGrp="1"/>
+          </p:cNvSpPr>
           <p:nvPr>
-            <p:ph idx="101" type="title" hasCustomPrompt="1"/>
+            <p:ph type="title" idx="101" hasCustomPrompt="1"/>
           </p:nvPr>
         </p:nvSpPr>
         <p:spPr>
@@ -6421,7 +6297,7 @@
           <a:bodyPr wrap="square" lIns="0" tIns="0" rIns="0" bIns="0" rtlCol="0" anchor="ctr"/>
           <a:lstStyle/>
           <a:p>
-            <a:pPr indent="0" marL="0">
+            <a:pPr marL="0" indent="0">
               <a:buNone/>
             </a:pPr>
             <a:r>
@@ -6569,17 +6445,24 @@
             <a:prstDash val="solid"/>
           </a:ln>
         </p:spPr>
+        <p:txBody>
+          <a:bodyPr/>
+          <a:lstStyle/>
+          <a:p>
+            <a:endParaRPr lang="en-IN"/>
+          </a:p>
+        </p:txBody>
       </p:sp>
       <p:pic>
         <p:nvPicPr>
-          <p:cNvPr id="6" name="Image 0" descr="img/biometric-logs.jpg">    </p:cNvPr>
+          <p:cNvPr id="6" name="Image 0" descr="img/biometric-logs.jpg"/>
           <p:cNvPicPr>
             <a:picLocks noChangeAspect="1"/>
           </p:cNvPicPr>
           <p:nvPr/>
         </p:nvPicPr>
         <p:blipFill>
-          <a:blip r:embed="rId1"/>
+          <a:blip r:embed="rId3"/>
           <a:stretch>
             <a:fillRect/>
           </a:stretch>
@@ -6615,6 +6498,13 @@
             <a:prstDash val="solid"/>
           </a:ln>
         </p:spPr>
+        <p:txBody>
+          <a:bodyPr/>
+          <a:lstStyle/>
+          <a:p>
+            <a:endParaRPr lang="en-IN"/>
+          </a:p>
+        </p:txBody>
       </p:sp>
       <p:sp>
         <p:nvSpPr>
@@ -6636,7 +6526,7 @@
           </a:prstGeom>
           <a:extLst>
             <a:ext uri="{C572A759-6A51-4108-AA02-DFA0A04FC94B}">
-              <ma14:wrappingTextBoxFlag xmlns:ma14="http://schemas.microsoft.com/office/mac/drawingml/2011/main" val="0"/>
+              <ma14:wrappingTextBoxFlag xmlns:ma14="http://schemas.microsoft.com/office/mac/drawingml/2011/main" xmlns="" val="0"/>
             </a:ext>
           </a:extLst>
         </p:spPr>
@@ -6657,7 +6547,7 @@
           <a:p>
             <a:pPr algn="l"/>
             <a:fld id="{F7021451-1387-4CA6-816F-3879F97B5CBC}" type="slidenum">
-              <a:rPr b="0" lang="en-US"/>
+              <a:rPr lang="en-US" b="0"/>
               <a:t>16</a:t>
             </a:fld>
             <a:endParaRPr lang="en-US"/>
@@ -6692,9 +6582,11 @@
       <p:sp>
         <p:nvSpPr>
           <p:cNvPr id="2" name="Text 1"/>
-          <p:cNvSpPr/>
+          <p:cNvSpPr>
+            <a:spLocks noGrp="1"/>
+          </p:cNvSpPr>
           <p:nvPr>
-            <p:ph idx="101" type="title" hasCustomPrompt="1"/>
+            <p:ph type="title" idx="101" hasCustomPrompt="1"/>
           </p:nvPr>
         </p:nvSpPr>
         <p:spPr>
@@ -6712,7 +6604,7 @@
           <a:bodyPr wrap="square" lIns="0" tIns="0" rIns="0" bIns="0" rtlCol="0" anchor="ctr"/>
           <a:lstStyle/>
           <a:p>
-            <a:pPr indent="0" marL="0">
+            <a:pPr marL="0" indent="0">
               <a:buNone/>
             </a:pPr>
             <a:r>
@@ -6754,6 +6646,13 @@
             <a:prstDash val="solid"/>
           </a:ln>
         </p:spPr>
+        <p:txBody>
+          <a:bodyPr/>
+          <a:lstStyle/>
+          <a:p>
+            <a:endParaRPr lang="en-IN"/>
+          </a:p>
+        </p:txBody>
       </p:sp>
       <p:sp>
         <p:nvSpPr>
@@ -6779,17 +6678,24 @@
             <a:prstDash val="solid"/>
           </a:ln>
         </p:spPr>
+        <p:txBody>
+          <a:bodyPr/>
+          <a:lstStyle/>
+          <a:p>
+            <a:endParaRPr lang="en-IN"/>
+          </a:p>
+        </p:txBody>
       </p:sp>
       <p:pic>
         <p:nvPicPr>
-          <p:cNvPr id="6" name="Image 0" descr="preencoded.png">    </p:cNvPr>
+          <p:cNvPr id="6" name="Image 0" descr="preencoded.png"/>
           <p:cNvPicPr>
             <a:picLocks noChangeAspect="1"/>
           </p:cNvPicPr>
           <p:nvPr/>
         </p:nvPicPr>
         <p:blipFill>
-          <a:blip r:embed="rId1"/>
+          <a:blip r:embed="rId3"/>
           <a:stretch>
             <a:fillRect/>
           </a:stretch>
@@ -6825,7 +6731,7 @@
           <a:bodyPr wrap="square" lIns="0" tIns="0" rIns="0" bIns="0" rtlCol="0" anchor="ctr"/>
           <a:lstStyle/>
           <a:p>
-            <a:pPr indent="0" marL="0">
+            <a:pPr marL="0" indent="0">
               <a:buNone/>
             </a:pPr>
             <a:r>
@@ -6864,6 +6770,13 @@
             <a:prstDash val="solid"/>
           </a:ln>
         </p:spPr>
+        <p:txBody>
+          <a:bodyPr/>
+          <a:lstStyle/>
+          <a:p>
+            <a:endParaRPr lang="en-IN"/>
+          </a:p>
+        </p:txBody>
       </p:sp>
       <p:sp>
         <p:nvSpPr>
@@ -6889,17 +6802,24 @@
             <a:prstDash val="solid"/>
           </a:ln>
         </p:spPr>
+        <p:txBody>
+          <a:bodyPr/>
+          <a:lstStyle/>
+          <a:p>
+            <a:endParaRPr lang="en-IN"/>
+          </a:p>
+        </p:txBody>
       </p:sp>
       <p:pic>
         <p:nvPicPr>
-          <p:cNvPr id="10" name="Image 1" descr="preencoded.png">    </p:cNvPr>
+          <p:cNvPr id="10" name="Image 1" descr="preencoded.png"/>
           <p:cNvPicPr>
             <a:picLocks noChangeAspect="1"/>
           </p:cNvPicPr>
           <p:nvPr/>
         </p:nvPicPr>
         <p:blipFill>
-          <a:blip r:embed="rId2"/>
+          <a:blip r:embed="rId4"/>
           <a:stretch>
             <a:fillRect/>
           </a:stretch>
@@ -6935,7 +6855,7 @@
           <a:bodyPr wrap="square" lIns="0" tIns="0" rIns="0" bIns="0" rtlCol="0" anchor="ctr"/>
           <a:lstStyle/>
           <a:p>
-            <a:pPr indent="0" marL="0">
+            <a:pPr marL="0" indent="0">
               <a:buNone/>
             </a:pPr>
             <a:r>
@@ -6974,6 +6894,13 @@
             <a:prstDash val="solid"/>
           </a:ln>
         </p:spPr>
+        <p:txBody>
+          <a:bodyPr/>
+          <a:lstStyle/>
+          <a:p>
+            <a:endParaRPr lang="en-IN"/>
+          </a:p>
+        </p:txBody>
       </p:sp>
       <p:sp>
         <p:nvSpPr>
@@ -6999,17 +6926,24 @@
             <a:prstDash val="solid"/>
           </a:ln>
         </p:spPr>
+        <p:txBody>
+          <a:bodyPr/>
+          <a:lstStyle/>
+          <a:p>
+            <a:endParaRPr lang="en-IN"/>
+          </a:p>
+        </p:txBody>
       </p:sp>
       <p:pic>
         <p:nvPicPr>
-          <p:cNvPr id="14" name="Image 2" descr="preencoded.png">    </p:cNvPr>
+          <p:cNvPr id="14" name="Image 2" descr="preencoded.png"/>
           <p:cNvPicPr>
             <a:picLocks noChangeAspect="1"/>
           </p:cNvPicPr>
           <p:nvPr/>
         </p:nvPicPr>
         <p:blipFill>
-          <a:blip r:embed="rId3"/>
+          <a:blip r:embed="rId5"/>
           <a:stretch>
             <a:fillRect/>
           </a:stretch>
@@ -7045,7 +6979,7 @@
           <a:bodyPr wrap="square" lIns="0" tIns="0" rIns="0" bIns="0" rtlCol="0" anchor="ctr"/>
           <a:lstStyle/>
           <a:p>
-            <a:pPr indent="0" marL="0">
+            <a:pPr marL="0" indent="0">
               <a:buNone/>
             </a:pPr>
             <a:r>
@@ -7084,6 +7018,13 @@
             <a:prstDash val="solid"/>
           </a:ln>
         </p:spPr>
+        <p:txBody>
+          <a:bodyPr/>
+          <a:lstStyle/>
+          <a:p>
+            <a:endParaRPr lang="en-IN"/>
+          </a:p>
+        </p:txBody>
       </p:sp>
       <p:sp>
         <p:nvSpPr>
@@ -7109,17 +7050,24 @@
             <a:prstDash val="solid"/>
           </a:ln>
         </p:spPr>
+        <p:txBody>
+          <a:bodyPr/>
+          <a:lstStyle/>
+          <a:p>
+            <a:endParaRPr lang="en-IN"/>
+          </a:p>
+        </p:txBody>
       </p:sp>
       <p:pic>
         <p:nvPicPr>
-          <p:cNvPr id="18" name="Image 3" descr="preencoded.png">    </p:cNvPr>
+          <p:cNvPr id="18" name="Image 3" descr="preencoded.png"/>
           <p:cNvPicPr>
             <a:picLocks noChangeAspect="1"/>
           </p:cNvPicPr>
           <p:nvPr/>
         </p:nvPicPr>
         <p:blipFill>
-          <a:blip r:embed="rId4"/>
+          <a:blip r:embed="rId6"/>
           <a:stretch>
             <a:fillRect/>
           </a:stretch>
@@ -7155,7 +7103,7 @@
           <a:bodyPr wrap="square" lIns="0" tIns="0" rIns="0" bIns="0" rtlCol="0" anchor="ctr"/>
           <a:lstStyle/>
           <a:p>
-            <a:pPr indent="0" marL="0">
+            <a:pPr marL="0" indent="0">
               <a:buNone/>
             </a:pPr>
             <a:r>
@@ -7194,6 +7142,13 @@
             <a:prstDash val="solid"/>
           </a:ln>
         </p:spPr>
+        <p:txBody>
+          <a:bodyPr/>
+          <a:lstStyle/>
+          <a:p>
+            <a:endParaRPr lang="en-IN"/>
+          </a:p>
+        </p:txBody>
       </p:sp>
       <p:sp>
         <p:nvSpPr>
@@ -7219,17 +7174,24 @@
             <a:prstDash val="solid"/>
           </a:ln>
         </p:spPr>
+        <p:txBody>
+          <a:bodyPr/>
+          <a:lstStyle/>
+          <a:p>
+            <a:endParaRPr lang="en-IN"/>
+          </a:p>
+        </p:txBody>
       </p:sp>
       <p:pic>
         <p:nvPicPr>
-          <p:cNvPr id="22" name="Image 4" descr="preencoded.png">    </p:cNvPr>
+          <p:cNvPr id="22" name="Image 4" descr="preencoded.png"/>
           <p:cNvPicPr>
             <a:picLocks noChangeAspect="1"/>
           </p:cNvPicPr>
           <p:nvPr/>
         </p:nvPicPr>
         <p:blipFill>
-          <a:blip r:embed="rId5"/>
+          <a:blip r:embed="rId3"/>
           <a:stretch>
             <a:fillRect/>
           </a:stretch>
@@ -7265,7 +7227,7 @@
           <a:bodyPr wrap="square" lIns="0" tIns="0" rIns="0" bIns="0" rtlCol="0" anchor="ctr"/>
           <a:lstStyle/>
           <a:p>
-            <a:pPr indent="0" marL="0">
+            <a:pPr marL="0" indent="0">
               <a:buNone/>
             </a:pPr>
             <a:r>
@@ -7304,6 +7266,13 @@
             <a:prstDash val="solid"/>
           </a:ln>
         </p:spPr>
+        <p:txBody>
+          <a:bodyPr/>
+          <a:lstStyle/>
+          <a:p>
+            <a:endParaRPr lang="en-IN"/>
+          </a:p>
+        </p:txBody>
       </p:sp>
       <p:sp>
         <p:nvSpPr>
@@ -7329,17 +7298,24 @@
             <a:prstDash val="solid"/>
           </a:ln>
         </p:spPr>
+        <p:txBody>
+          <a:bodyPr/>
+          <a:lstStyle/>
+          <a:p>
+            <a:endParaRPr lang="en-IN"/>
+          </a:p>
+        </p:txBody>
       </p:sp>
       <p:pic>
         <p:nvPicPr>
-          <p:cNvPr id="26" name="Image 5" descr="preencoded.png">    </p:cNvPr>
+          <p:cNvPr id="26" name="Image 5" descr="preencoded.png"/>
           <p:cNvPicPr>
             <a:picLocks noChangeAspect="1"/>
           </p:cNvPicPr>
           <p:nvPr/>
         </p:nvPicPr>
         <p:blipFill>
-          <a:blip r:embed="rId6"/>
+          <a:blip r:embed="rId7"/>
           <a:stretch>
             <a:fillRect/>
           </a:stretch>
@@ -7375,7 +7351,7 @@
           <a:bodyPr wrap="square" lIns="0" tIns="0" rIns="0" bIns="0" rtlCol="0" anchor="ctr"/>
           <a:lstStyle/>
           <a:p>
-            <a:pPr indent="0" marL="0">
+            <a:pPr marL="0" indent="0">
               <a:buNone/>
             </a:pPr>
             <a:r>
@@ -7414,17 +7390,24 @@
             <a:prstDash val="solid"/>
           </a:ln>
         </p:spPr>
+        <p:txBody>
+          <a:bodyPr/>
+          <a:lstStyle/>
+          <a:p>
+            <a:endParaRPr lang="en-IN"/>
+          </a:p>
+        </p:txBody>
       </p:sp>
       <p:pic>
         <p:nvPicPr>
-          <p:cNvPr id="29" name="Image 6" descr="img/documents.jpg">    </p:cNvPr>
+          <p:cNvPr id="29" name="Image 6" descr="img/documents.jpg"/>
           <p:cNvPicPr>
             <a:picLocks noChangeAspect="1"/>
           </p:cNvPicPr>
           <p:nvPr/>
         </p:nvPicPr>
         <p:blipFill>
-          <a:blip r:embed="rId7"/>
+          <a:blip r:embed="rId8"/>
           <a:stretch>
             <a:fillRect/>
           </a:stretch>
@@ -7460,10 +7443,17 @@
             <a:prstDash val="solid"/>
           </a:ln>
         </p:spPr>
-      </p:sp>
-      <p:sp>
-        <p:nvSpPr>
-          <p:cNvPr id="25" name="Slide Number Placeholder 0"/>
+        <p:txBody>
+          <a:bodyPr/>
+          <a:lstStyle/>
+          <a:p>
+            <a:endParaRPr lang="en-IN"/>
+          </a:p>
+        </p:txBody>
+      </p:sp>
+      <p:sp>
+        <p:nvSpPr>
+          <p:cNvPr id="3" name="Slide Number Placeholder 0"/>
           <p:cNvSpPr>
             <a:spLocks noGrp="1"/>
           </p:cNvSpPr>
@@ -7481,7 +7471,7 @@
           </a:prstGeom>
           <a:extLst>
             <a:ext uri="{C572A759-6A51-4108-AA02-DFA0A04FC94B}">
-              <ma14:wrappingTextBoxFlag xmlns:ma14="http://schemas.microsoft.com/office/mac/drawingml/2011/main" val="0"/>
+              <ma14:wrappingTextBoxFlag xmlns:ma14="http://schemas.microsoft.com/office/mac/drawingml/2011/main" xmlns="" val="0"/>
             </a:ext>
           </a:extLst>
         </p:spPr>
@@ -7502,7 +7492,7 @@
           <a:p>
             <a:pPr algn="l"/>
             <a:fld id="{F7021451-1387-4CA6-816F-3879F97B5CBC}" type="slidenum">
-              <a:rPr b="0" lang="en-US"/>
+              <a:rPr lang="en-US" b="0"/>
               <a:t>17</a:t>
             </a:fld>
             <a:endParaRPr lang="en-US"/>
@@ -7537,9 +7527,11 @@
       <p:sp>
         <p:nvSpPr>
           <p:cNvPr id="2" name="Text 1"/>
-          <p:cNvSpPr/>
+          <p:cNvSpPr>
+            <a:spLocks noGrp="1"/>
+          </p:cNvSpPr>
           <p:nvPr>
-            <p:ph idx="101" type="title" hasCustomPrompt="1"/>
+            <p:ph type="title" idx="101" hasCustomPrompt="1"/>
           </p:nvPr>
         </p:nvSpPr>
         <p:spPr>
@@ -7557,7 +7549,7 @@
           <a:bodyPr wrap="square" lIns="0" tIns="0" rIns="0" bIns="0" rtlCol="0" anchor="ctr"/>
           <a:lstStyle/>
           <a:p>
-            <a:pPr indent="0" marL="0">
+            <a:pPr marL="0" indent="0">
               <a:buNone/>
             </a:pPr>
             <a:r>
@@ -7599,18 +7591,25 @@
             <a:prstDash val="solid"/>
           </a:ln>
         </p:spPr>
+        <p:txBody>
+          <a:bodyPr/>
+          <a:lstStyle/>
+          <a:p>
+            <a:endParaRPr lang="en-IN"/>
+          </a:p>
+        </p:txBody>
       </p:sp>
       <p:pic>
         <p:nvPicPr>
-          <p:cNvPr id="5" name="Image 0" descr="img/m-dashboard.jpg">    </p:cNvPr>
+          <p:cNvPr id="5" name="Image 0" descr="img/m-dashboard.jpg"/>
           <p:cNvPicPr>
             <a:picLocks noChangeAspect="1"/>
           </p:cNvPicPr>
           <p:nvPr/>
         </p:nvPicPr>
         <p:blipFill>
-          <a:blip r:embed="rId1"/>
-          <a:srcRect l="0" r="0" t="0" b="0"/>
+          <a:blip r:embed="rId3"/>
+          <a:srcRect/>
           <a:stretch/>
         </p:blipFill>
         <p:spPr>
@@ -7644,6 +7643,13 @@
             <a:prstDash val="solid"/>
           </a:ln>
         </p:spPr>
+        <p:txBody>
+          <a:bodyPr/>
+          <a:lstStyle/>
+          <a:p>
+            <a:endParaRPr lang="en-IN"/>
+          </a:p>
+        </p:txBody>
       </p:sp>
       <p:sp>
         <p:nvSpPr>
@@ -7669,18 +7675,25 @@
             <a:prstDash val="solid"/>
           </a:ln>
         </p:spPr>
+        <p:txBody>
+          <a:bodyPr/>
+          <a:lstStyle/>
+          <a:p>
+            <a:endParaRPr lang="en-IN"/>
+          </a:p>
+        </p:txBody>
       </p:sp>
       <p:pic>
         <p:nvPicPr>
-          <p:cNvPr id="8" name="Image 1" descr="img/m-attendance.jpg">    </p:cNvPr>
+          <p:cNvPr id="8" name="Image 1" descr="img/m-attendance.jpg"/>
           <p:cNvPicPr>
             <a:picLocks noChangeAspect="1"/>
           </p:cNvPicPr>
           <p:nvPr/>
         </p:nvPicPr>
         <p:blipFill>
-          <a:blip r:embed="rId2"/>
-          <a:srcRect l="0" r="0" t="0" b="0"/>
+          <a:blip r:embed="rId4"/>
+          <a:srcRect/>
           <a:stretch/>
         </p:blipFill>
         <p:spPr>
@@ -7714,6 +7727,13 @@
             <a:prstDash val="solid"/>
           </a:ln>
         </p:spPr>
+        <p:txBody>
+          <a:bodyPr/>
+          <a:lstStyle/>
+          <a:p>
+            <a:endParaRPr lang="en-IN"/>
+          </a:p>
+        </p:txBody>
       </p:sp>
       <p:sp>
         <p:nvSpPr>
@@ -7739,18 +7759,25 @@
             <a:prstDash val="solid"/>
           </a:ln>
         </p:spPr>
+        <p:txBody>
+          <a:bodyPr/>
+          <a:lstStyle/>
+          <a:p>
+            <a:endParaRPr lang="en-IN"/>
+          </a:p>
+        </p:txBody>
       </p:sp>
       <p:pic>
         <p:nvPicPr>
-          <p:cNvPr id="11" name="Image 2" descr="img/m-leave.jpg">    </p:cNvPr>
+          <p:cNvPr id="11" name="Image 2" descr="img/m-leave.jpg"/>
           <p:cNvPicPr>
             <a:picLocks noChangeAspect="1"/>
           </p:cNvPicPr>
           <p:nvPr/>
         </p:nvPicPr>
         <p:blipFill>
-          <a:blip r:embed="rId3"/>
-          <a:srcRect l="0" r="0" t="0" b="0"/>
+          <a:blip r:embed="rId5"/>
+          <a:srcRect/>
           <a:stretch/>
         </p:blipFill>
         <p:spPr>
@@ -7784,6 +7811,13 @@
             <a:prstDash val="solid"/>
           </a:ln>
         </p:spPr>
+        <p:txBody>
+          <a:bodyPr/>
+          <a:lstStyle/>
+          <a:p>
+            <a:endParaRPr lang="en-IN"/>
+          </a:p>
+        </p:txBody>
       </p:sp>
       <p:sp>
         <p:nvSpPr>
@@ -7806,7 +7840,7 @@
           <a:bodyPr wrap="square" lIns="0" tIns="0" rIns="0" bIns="0" rtlCol="0" anchor="ctr"/>
           <a:lstStyle/>
           <a:p>
-            <a:pPr algn="ctr" indent="0" marL="0">
+            <a:pPr marL="0" indent="0" algn="ctr">
               <a:buNone/>
             </a:pPr>
             <a:r>
@@ -7841,7 +7875,7 @@
           </a:prstGeom>
           <a:extLst>
             <a:ext uri="{C572A759-6A51-4108-AA02-DFA0A04FC94B}">
-              <ma14:wrappingTextBoxFlag xmlns:ma14="http://schemas.microsoft.com/office/mac/drawingml/2011/main" val="0"/>
+              <ma14:wrappingTextBoxFlag xmlns:ma14="http://schemas.microsoft.com/office/mac/drawingml/2011/main" xmlns="" val="0"/>
             </a:ext>
           </a:extLst>
         </p:spPr>
@@ -7862,7 +7896,7 @@
           <a:p>
             <a:pPr algn="l"/>
             <a:fld id="{F7021451-1387-4CA6-816F-3879F97B5CBC}" type="slidenum">
-              <a:rPr b="0" lang="en-US"/>
+              <a:rPr lang="en-US" b="0"/>
               <a:t>18</a:t>
             </a:fld>
             <a:endParaRPr lang="en-US"/>
@@ -7897,9 +7931,11 @@
       <p:sp>
         <p:nvSpPr>
           <p:cNvPr id="2" name="Text 0"/>
-          <p:cNvSpPr/>
+          <p:cNvSpPr>
+            <a:spLocks noGrp="1"/>
+          </p:cNvSpPr>
           <p:nvPr>
-            <p:ph idx="100" type="title" hasCustomPrompt="1"/>
+            <p:ph type="title" idx="100" hasCustomPrompt="1"/>
           </p:nvPr>
         </p:nvSpPr>
         <p:spPr>
@@ -7917,7 +7953,7 @@
           <a:bodyPr wrap="square" lIns="0" tIns="0" rIns="0" bIns="0" rtlCol="0" anchor="ctr"/>
           <a:lstStyle/>
           <a:p>
-            <a:pPr indent="0" marL="0">
+            <a:pPr marL="0" indent="0">
               <a:buNone/>
             </a:pPr>
             <a:r>
@@ -7956,7 +7992,7 @@
           <a:bodyPr wrap="square" lIns="0" tIns="0" rIns="0" bIns="0" rtlCol="0" anchor="ctr"/>
           <a:lstStyle/>
           <a:p>
-            <a:pPr indent="0" marL="0">
+            <a:pPr marL="0" indent="0">
               <a:buNone/>
             </a:pPr>
             <a:r>
@@ -7999,9 +8035,11 @@
       <p:sp>
         <p:nvSpPr>
           <p:cNvPr id="2" name="Text 1"/>
-          <p:cNvSpPr/>
+          <p:cNvSpPr>
+            <a:spLocks noGrp="1"/>
+          </p:cNvSpPr>
           <p:nvPr>
-            <p:ph idx="101" type="title" hasCustomPrompt="1"/>
+            <p:ph type="title" idx="101" hasCustomPrompt="1"/>
           </p:nvPr>
         </p:nvSpPr>
         <p:spPr>
@@ -8019,7 +8057,7 @@
           <a:bodyPr wrap="square" lIns="0" tIns="0" rIns="0" bIns="0" rtlCol="0" anchor="ctr"/>
           <a:lstStyle/>
           <a:p>
-            <a:pPr indent="0" marL="0">
+            <a:pPr marL="0" indent="0">
               <a:buNone/>
             </a:pPr>
             <a:r>
@@ -8061,6 +8099,13 @@
             <a:prstDash val="solid"/>
           </a:ln>
         </p:spPr>
+        <p:txBody>
+          <a:bodyPr/>
+          <a:lstStyle/>
+          <a:p>
+            <a:endParaRPr lang="en-IN"/>
+          </a:p>
+        </p:txBody>
       </p:sp>
       <p:sp>
         <p:nvSpPr>
@@ -8086,6 +8131,13 @@
             <a:prstDash val="solid"/>
           </a:ln>
         </p:spPr>
+        <p:txBody>
+          <a:bodyPr/>
+          <a:lstStyle/>
+          <a:p>
+            <a:endParaRPr lang="en-IN"/>
+          </a:p>
+        </p:txBody>
       </p:sp>
       <p:sp>
         <p:nvSpPr>
@@ -8108,7 +8160,7 @@
           <a:bodyPr wrap="square" lIns="0" tIns="0" rIns="0" bIns="0" rtlCol="0" anchor="ctr"/>
           <a:lstStyle/>
           <a:p>
-            <a:pPr algn="ctr" indent="0" marL="0">
+            <a:pPr marL="0" indent="0" algn="ctr">
               <a:buNone/>
             </a:pPr>
             <a:r>
@@ -8144,7 +8196,7 @@
           <a:bodyPr wrap="square" lIns="0" tIns="0" rIns="0" bIns="0" rtlCol="0" anchor="t"/>
           <a:lstStyle/>
           <a:p>
-            <a:pPr algn="ctr" indent="0" marL="0">
+            <a:pPr marL="0" indent="0" algn="ctr">
               <a:buNone/>
             </a:pPr>
             <a:r>
@@ -8183,6 +8235,13 @@
             <a:prstDash val="solid"/>
           </a:ln>
         </p:spPr>
+        <p:txBody>
+          <a:bodyPr/>
+          <a:lstStyle/>
+          <a:p>
+            <a:endParaRPr lang="en-IN"/>
+          </a:p>
+        </p:txBody>
       </p:sp>
       <p:sp>
         <p:nvSpPr>
@@ -8208,6 +8267,13 @@
             <a:prstDash val="solid"/>
           </a:ln>
         </p:spPr>
+        <p:txBody>
+          <a:bodyPr/>
+          <a:lstStyle/>
+          <a:p>
+            <a:endParaRPr lang="en-IN"/>
+          </a:p>
+        </p:txBody>
       </p:sp>
       <p:sp>
         <p:nvSpPr>
@@ -8230,7 +8296,7 @@
           <a:bodyPr wrap="square" lIns="0" tIns="0" rIns="0" bIns="0" rtlCol="0" anchor="ctr"/>
           <a:lstStyle/>
           <a:p>
-            <a:pPr algn="ctr" indent="0" marL="0">
+            <a:pPr marL="0" indent="0" algn="ctr">
               <a:buNone/>
             </a:pPr>
             <a:r>
@@ -8266,7 +8332,7 @@
           <a:bodyPr wrap="square" lIns="0" tIns="0" rIns="0" bIns="0" rtlCol="0" anchor="t"/>
           <a:lstStyle/>
           <a:p>
-            <a:pPr algn="ctr" indent="0" marL="0">
+            <a:pPr marL="0" indent="0" algn="ctr">
               <a:buNone/>
             </a:pPr>
             <a:r>
@@ -8305,6 +8371,13 @@
             <a:prstDash val="solid"/>
           </a:ln>
         </p:spPr>
+        <p:txBody>
+          <a:bodyPr/>
+          <a:lstStyle/>
+          <a:p>
+            <a:endParaRPr lang="en-IN"/>
+          </a:p>
+        </p:txBody>
       </p:sp>
       <p:sp>
         <p:nvSpPr>
@@ -8330,6 +8403,13 @@
             <a:prstDash val="solid"/>
           </a:ln>
         </p:spPr>
+        <p:txBody>
+          <a:bodyPr/>
+          <a:lstStyle/>
+          <a:p>
+            <a:endParaRPr lang="en-IN"/>
+          </a:p>
+        </p:txBody>
       </p:sp>
       <p:sp>
         <p:nvSpPr>
@@ -8352,7 +8432,7 @@
           <a:bodyPr wrap="square" lIns="0" tIns="0" rIns="0" bIns="0" rtlCol="0" anchor="ctr"/>
           <a:lstStyle/>
           <a:p>
-            <a:pPr algn="ctr" indent="0" marL="0">
+            <a:pPr marL="0" indent="0" algn="ctr">
               <a:buNone/>
             </a:pPr>
             <a:r>
@@ -8388,7 +8468,7 @@
           <a:bodyPr wrap="square" lIns="0" tIns="0" rIns="0" bIns="0" rtlCol="0" anchor="t"/>
           <a:lstStyle/>
           <a:p>
-            <a:pPr algn="ctr" indent="0" marL="0">
+            <a:pPr marL="0" indent="0" algn="ctr">
               <a:buNone/>
             </a:pPr>
             <a:r>
@@ -8427,6 +8507,13 @@
             <a:prstDash val="solid"/>
           </a:ln>
         </p:spPr>
+        <p:txBody>
+          <a:bodyPr/>
+          <a:lstStyle/>
+          <a:p>
+            <a:endParaRPr lang="en-IN"/>
+          </a:p>
+        </p:txBody>
       </p:sp>
       <p:sp>
         <p:nvSpPr>
@@ -8452,6 +8539,13 @@
             <a:prstDash val="solid"/>
           </a:ln>
         </p:spPr>
+        <p:txBody>
+          <a:bodyPr/>
+          <a:lstStyle/>
+          <a:p>
+            <a:endParaRPr lang="en-IN"/>
+          </a:p>
+        </p:txBody>
       </p:sp>
       <p:sp>
         <p:nvSpPr>
@@ -8474,7 +8568,7 @@
           <a:bodyPr wrap="square" lIns="0" tIns="0" rIns="0" bIns="0" rtlCol="0" anchor="ctr"/>
           <a:lstStyle/>
           <a:p>
-            <a:pPr algn="ctr" indent="0" marL="0">
+            <a:pPr marL="0" indent="0" algn="ctr">
               <a:buNone/>
             </a:pPr>
             <a:r>
@@ -8510,7 +8604,7 @@
           <a:bodyPr wrap="square" lIns="0" tIns="0" rIns="0" bIns="0" rtlCol="0" anchor="t"/>
           <a:lstStyle/>
           <a:p>
-            <a:pPr algn="ctr" indent="0" marL="0">
+            <a:pPr marL="0" indent="0" algn="ctr">
               <a:buNone/>
             </a:pPr>
             <a:r>
@@ -8631,7 +8725,7 @@
           <a:bodyPr wrap="square" lIns="0" tIns="0" rIns="0" bIns="0" rtlCol="0" anchor="ctr"/>
           <a:lstStyle/>
           <a:p>
-            <a:pPr indent="0" marL="0">
+            <a:pPr marL="0" indent="0">
               <a:buNone/>
             </a:pPr>
             <a:r>
@@ -8666,7 +8760,7 @@
           </a:prstGeom>
           <a:extLst>
             <a:ext uri="{C572A759-6A51-4108-AA02-DFA0A04FC94B}">
-              <ma14:wrappingTextBoxFlag xmlns:ma14="http://schemas.microsoft.com/office/mac/drawingml/2011/main" val="0"/>
+              <ma14:wrappingTextBoxFlag xmlns:ma14="http://schemas.microsoft.com/office/mac/drawingml/2011/main" xmlns="" val="0"/>
             </a:ext>
           </a:extLst>
         </p:spPr>
@@ -8687,7 +8781,7 @@
           <a:p>
             <a:pPr algn="l"/>
             <a:fld id="{F7021451-1387-4CA6-816F-3879F97B5CBC}" type="slidenum">
-              <a:rPr b="0" lang="en-US"/>
+              <a:rPr lang="en-US" b="0"/>
               <a:t>2</a:t>
             </a:fld>
             <a:endParaRPr lang="en-US"/>
@@ -8722,9 +8816,11 @@
       <p:sp>
         <p:nvSpPr>
           <p:cNvPr id="2" name="Text 1"/>
-          <p:cNvSpPr/>
+          <p:cNvSpPr>
+            <a:spLocks noGrp="1"/>
+          </p:cNvSpPr>
           <p:nvPr>
-            <p:ph idx="101" type="title" hasCustomPrompt="1"/>
+            <p:ph type="title" idx="101" hasCustomPrompt="1"/>
           </p:nvPr>
         </p:nvSpPr>
         <p:spPr>
@@ -8742,7 +8838,7 @@
           <a:bodyPr wrap="square" lIns="0" tIns="0" rIns="0" bIns="0" rtlCol="0" anchor="ctr"/>
           <a:lstStyle/>
           <a:p>
-            <a:pPr indent="0" marL="0">
+            <a:pPr marL="0" indent="0">
               <a:buNone/>
             </a:pPr>
             <a:r>
@@ -8911,6 +9007,13 @@
             <a:prstDash val="solid"/>
           </a:ln>
         </p:spPr>
+        <p:txBody>
+          <a:bodyPr/>
+          <a:lstStyle/>
+          <a:p>
+            <a:endParaRPr lang="en-IN"/>
+          </a:p>
+        </p:txBody>
       </p:sp>
       <p:sp>
         <p:nvSpPr>
@@ -8933,7 +9036,7 @@
           <a:bodyPr wrap="square" lIns="0" tIns="0" rIns="0" bIns="0" rtlCol="0" anchor="t"/>
           <a:lstStyle/>
           <a:p>
-            <a:pPr indent="0" marL="0">
+            <a:pPr marL="0" indent="0">
               <a:buNone/>
             </a:pPr>
             <a:r>
@@ -8947,7 +9050,7 @@
             <a:endParaRPr lang="en-US" sz="1300" dirty="0"/>
           </a:p>
           <a:p>
-            <a:pPr indent="0" marL="0">
+            <a:pPr marL="0" indent="0">
               <a:buNone/>
             </a:pPr>
             <a:r>
@@ -8982,7 +9085,7 @@
           </a:prstGeom>
           <a:extLst>
             <a:ext uri="{C572A759-6A51-4108-AA02-DFA0A04FC94B}">
-              <ma14:wrappingTextBoxFlag xmlns:ma14="http://schemas.microsoft.com/office/mac/drawingml/2011/main" val="0"/>
+              <ma14:wrappingTextBoxFlag xmlns:ma14="http://schemas.microsoft.com/office/mac/drawingml/2011/main" xmlns="" val="0"/>
             </a:ext>
           </a:extLst>
         </p:spPr>
@@ -9003,7 +9106,7 @@
           <a:p>
             <a:pPr algn="l"/>
             <a:fld id="{F7021451-1387-4CA6-816F-3879F97B5CBC}" type="slidenum">
-              <a:rPr b="0" lang="en-US"/>
+              <a:rPr lang="en-US" b="0"/>
               <a:t>20</a:t>
             </a:fld>
             <a:endParaRPr lang="en-US"/>
@@ -9038,9 +9141,11 @@
       <p:sp>
         <p:nvSpPr>
           <p:cNvPr id="2" name="Text 1"/>
-          <p:cNvSpPr/>
+          <p:cNvSpPr>
+            <a:spLocks noGrp="1"/>
+          </p:cNvSpPr>
           <p:nvPr>
-            <p:ph idx="101" type="title" hasCustomPrompt="1"/>
+            <p:ph type="title" idx="101" hasCustomPrompt="1"/>
           </p:nvPr>
         </p:nvSpPr>
         <p:spPr>
@@ -9058,7 +9163,7 @@
           <a:bodyPr wrap="square" lIns="0" tIns="0" rIns="0" bIns="0" rtlCol="0" anchor="ctr"/>
           <a:lstStyle/>
           <a:p>
-            <a:pPr indent="0" marL="0">
+            <a:pPr marL="0" indent="0">
               <a:buNone/>
             </a:pPr>
             <a:r>
@@ -9100,17 +9205,24 @@
             <a:prstDash val="solid"/>
           </a:ln>
         </p:spPr>
+        <p:txBody>
+          <a:bodyPr/>
+          <a:lstStyle/>
+          <a:p>
+            <a:endParaRPr lang="en-IN"/>
+          </a:p>
+        </p:txBody>
       </p:sp>
       <p:pic>
         <p:nvPicPr>
-          <p:cNvPr id="5" name="Image 0" descr="preencoded.png">    </p:cNvPr>
+          <p:cNvPr id="5" name="Image 0" descr="preencoded.png"/>
           <p:cNvPicPr>
             <a:picLocks noChangeAspect="1"/>
           </p:cNvPicPr>
           <p:nvPr/>
         </p:nvPicPr>
         <p:blipFill>
-          <a:blip r:embed="rId1"/>
+          <a:blip r:embed="rId3"/>
           <a:stretch>
             <a:fillRect/>
           </a:stretch>
@@ -9146,7 +9258,7 @@
           <a:bodyPr wrap="square" lIns="0" tIns="0" rIns="0" bIns="0" rtlCol="0" anchor="ctr"/>
           <a:lstStyle/>
           <a:p>
-            <a:pPr indent="0" marL="0">
+            <a:pPr marL="0" indent="0">
               <a:buNone/>
             </a:pPr>
             <a:r>
@@ -9160,7 +9272,7 @@
             <a:endParaRPr lang="en-US" sz="1300" dirty="0"/>
           </a:p>
           <a:p>
-            <a:pPr indent="0" marL="0">
+            <a:pPr marL="0" indent="0">
               <a:buNone/>
             </a:pPr>
             <a:r>
@@ -9199,17 +9311,24 @@
             <a:prstDash val="solid"/>
           </a:ln>
         </p:spPr>
+        <p:txBody>
+          <a:bodyPr/>
+          <a:lstStyle/>
+          <a:p>
+            <a:endParaRPr lang="en-IN"/>
+          </a:p>
+        </p:txBody>
       </p:sp>
       <p:pic>
         <p:nvPicPr>
-          <p:cNvPr id="8" name="Image 1" descr="preencoded.png">    </p:cNvPr>
+          <p:cNvPr id="8" name="Image 1" descr="preencoded.png"/>
           <p:cNvPicPr>
             <a:picLocks noChangeAspect="1"/>
           </p:cNvPicPr>
           <p:nvPr/>
         </p:nvPicPr>
         <p:blipFill>
-          <a:blip r:embed="rId2"/>
+          <a:blip r:embed="rId3"/>
           <a:stretch>
             <a:fillRect/>
           </a:stretch>
@@ -9245,7 +9364,7 @@
           <a:bodyPr wrap="square" lIns="0" tIns="0" rIns="0" bIns="0" rtlCol="0" anchor="ctr"/>
           <a:lstStyle/>
           <a:p>
-            <a:pPr indent="0" marL="0">
+            <a:pPr marL="0" indent="0">
               <a:buNone/>
             </a:pPr>
             <a:r>
@@ -9259,7 +9378,7 @@
             <a:endParaRPr lang="en-US" sz="1300" dirty="0"/>
           </a:p>
           <a:p>
-            <a:pPr indent="0" marL="0">
+            <a:pPr marL="0" indent="0">
               <a:buNone/>
             </a:pPr>
             <a:r>
@@ -9298,10 +9417,17 @@
             <a:prstDash val="solid"/>
           </a:ln>
         </p:spPr>
+        <p:txBody>
+          <a:bodyPr/>
+          <a:lstStyle/>
+          <a:p>
+            <a:endParaRPr lang="en-IN"/>
+          </a:p>
+        </p:txBody>
       </p:sp>
       <p:pic>
         <p:nvPicPr>
-          <p:cNvPr id="11" name="Image 2" descr="preencoded.png">    </p:cNvPr>
+          <p:cNvPr id="11" name="Image 2" descr="preencoded.png"/>
           <p:cNvPicPr>
             <a:picLocks noChangeAspect="1"/>
           </p:cNvPicPr>
@@ -9344,7 +9470,7 @@
           <a:bodyPr wrap="square" lIns="0" tIns="0" rIns="0" bIns="0" rtlCol="0" anchor="ctr"/>
           <a:lstStyle/>
           <a:p>
-            <a:pPr indent="0" marL="0">
+            <a:pPr marL="0" indent="0">
               <a:buNone/>
             </a:pPr>
             <a:r>
@@ -9358,7 +9484,7 @@
             <a:endParaRPr lang="en-US" sz="1300" dirty="0"/>
           </a:p>
           <a:p>
-            <a:pPr indent="0" marL="0">
+            <a:pPr marL="0" indent="0">
               <a:buNone/>
             </a:pPr>
             <a:r>
@@ -9397,17 +9523,24 @@
             <a:prstDash val="solid"/>
           </a:ln>
         </p:spPr>
+        <p:txBody>
+          <a:bodyPr/>
+          <a:lstStyle/>
+          <a:p>
+            <a:endParaRPr lang="en-IN"/>
+          </a:p>
+        </p:txBody>
       </p:sp>
       <p:pic>
         <p:nvPicPr>
-          <p:cNvPr id="14" name="Image 3" descr="preencoded.png">    </p:cNvPr>
+          <p:cNvPr id="14" name="Image 3" descr="preencoded.png"/>
           <p:cNvPicPr>
             <a:picLocks noChangeAspect="1"/>
           </p:cNvPicPr>
           <p:nvPr/>
         </p:nvPicPr>
         <p:blipFill>
-          <a:blip r:embed="rId4"/>
+          <a:blip r:embed="rId3"/>
           <a:stretch>
             <a:fillRect/>
           </a:stretch>
@@ -9443,7 +9576,7 @@
           <a:bodyPr wrap="square" lIns="0" tIns="0" rIns="0" bIns="0" rtlCol="0" anchor="ctr"/>
           <a:lstStyle/>
           <a:p>
-            <a:pPr indent="0" marL="0">
+            <a:pPr marL="0" indent="0">
               <a:buNone/>
             </a:pPr>
             <a:r>
@@ -9457,7 +9590,7 @@
             <a:endParaRPr lang="en-US" sz="1300" dirty="0"/>
           </a:p>
           <a:p>
-            <a:pPr indent="0" marL="0">
+            <a:pPr marL="0" indent="0">
               <a:buNone/>
             </a:pPr>
             <a:r>
@@ -9496,17 +9629,24 @@
             <a:prstDash val="solid"/>
           </a:ln>
         </p:spPr>
+        <p:txBody>
+          <a:bodyPr/>
+          <a:lstStyle/>
+          <a:p>
+            <a:endParaRPr lang="en-IN"/>
+          </a:p>
+        </p:txBody>
       </p:sp>
       <p:pic>
         <p:nvPicPr>
-          <p:cNvPr id="17" name="Image 4" descr="preencoded.png">    </p:cNvPr>
+          <p:cNvPr id="17" name="Image 4" descr="preencoded.png"/>
           <p:cNvPicPr>
             <a:picLocks noChangeAspect="1"/>
           </p:cNvPicPr>
           <p:nvPr/>
         </p:nvPicPr>
         <p:blipFill>
-          <a:blip r:embed="rId5"/>
+          <a:blip r:embed="rId3"/>
           <a:stretch>
             <a:fillRect/>
           </a:stretch>
@@ -9542,7 +9682,7 @@
           <a:bodyPr wrap="square" lIns="0" tIns="0" rIns="0" bIns="0" rtlCol="0" anchor="ctr"/>
           <a:lstStyle/>
           <a:p>
-            <a:pPr indent="0" marL="0">
+            <a:pPr marL="0" indent="0">
               <a:buNone/>
             </a:pPr>
             <a:r>
@@ -9556,7 +9696,7 @@
             <a:endParaRPr lang="en-US" sz="1300" dirty="0"/>
           </a:p>
           <a:p>
-            <a:pPr indent="0" marL="0">
+            <a:pPr marL="0" indent="0">
               <a:buNone/>
             </a:pPr>
             <a:r>
@@ -9595,17 +9735,24 @@
             <a:prstDash val="solid"/>
           </a:ln>
         </p:spPr>
+        <p:txBody>
+          <a:bodyPr/>
+          <a:lstStyle/>
+          <a:p>
+            <a:endParaRPr lang="en-IN"/>
+          </a:p>
+        </p:txBody>
       </p:sp>
       <p:pic>
         <p:nvPicPr>
-          <p:cNvPr id="20" name="Image 5" descr="preencoded.png">    </p:cNvPr>
+          <p:cNvPr id="20" name="Image 5" descr="preencoded.png"/>
           <p:cNvPicPr>
             <a:picLocks noChangeAspect="1"/>
           </p:cNvPicPr>
           <p:nvPr/>
         </p:nvPicPr>
         <p:blipFill>
-          <a:blip r:embed="rId6"/>
+          <a:blip r:embed="rId3"/>
           <a:stretch>
             <a:fillRect/>
           </a:stretch>
@@ -9641,7 +9788,7 @@
           <a:bodyPr wrap="square" lIns="0" tIns="0" rIns="0" bIns="0" rtlCol="0" anchor="ctr"/>
           <a:lstStyle/>
           <a:p>
-            <a:pPr indent="0" marL="0">
+            <a:pPr marL="0" indent="0">
               <a:buNone/>
             </a:pPr>
             <a:r>
@@ -9655,7 +9802,7 @@
             <a:endParaRPr lang="en-US" sz="1300" dirty="0"/>
           </a:p>
           <a:p>
-            <a:pPr indent="0" marL="0">
+            <a:pPr marL="0" indent="0">
               <a:buNone/>
             </a:pPr>
             <a:r>
@@ -9690,7 +9837,7 @@
           </a:prstGeom>
           <a:extLst>
             <a:ext uri="{C572A759-6A51-4108-AA02-DFA0A04FC94B}">
-              <ma14:wrappingTextBoxFlag xmlns:ma14="http://schemas.microsoft.com/office/mac/drawingml/2011/main" val="0"/>
+              <ma14:wrappingTextBoxFlag xmlns:ma14="http://schemas.microsoft.com/office/mac/drawingml/2011/main" xmlns="" val="0"/>
             </a:ext>
           </a:extLst>
         </p:spPr>
@@ -9711,7 +9858,7 @@
           <a:p>
             <a:pPr algn="l"/>
             <a:fld id="{F7021451-1387-4CA6-816F-3879F97B5CBC}" type="slidenum">
-              <a:rPr b="0" lang="en-US"/>
+              <a:rPr lang="en-US" b="0"/>
               <a:t>21</a:t>
             </a:fld>
             <a:endParaRPr lang="en-US"/>
@@ -9746,9 +9893,11 @@
       <p:sp>
         <p:nvSpPr>
           <p:cNvPr id="2" name="Text 1"/>
-          <p:cNvSpPr/>
+          <p:cNvSpPr>
+            <a:spLocks noGrp="1"/>
+          </p:cNvSpPr>
           <p:nvPr>
-            <p:ph idx="101" type="title" hasCustomPrompt="1"/>
+            <p:ph type="title" idx="101" hasCustomPrompt="1"/>
           </p:nvPr>
         </p:nvSpPr>
         <p:spPr>
@@ -9766,7 +9915,7 @@
           <a:bodyPr wrap="square" lIns="0" tIns="0" rIns="0" bIns="0" rtlCol="0" anchor="ctr"/>
           <a:lstStyle/>
           <a:p>
-            <a:pPr indent="0" marL="0">
+            <a:pPr marL="0" indent="0">
               <a:buNone/>
             </a:pPr>
             <a:r>
@@ -9808,17 +9957,24 @@
             <a:prstDash val="solid"/>
           </a:ln>
         </p:spPr>
+        <p:txBody>
+          <a:bodyPr/>
+          <a:lstStyle/>
+          <a:p>
+            <a:endParaRPr lang="en-IN"/>
+          </a:p>
+        </p:txBody>
       </p:sp>
       <p:pic>
         <p:nvPicPr>
-          <p:cNvPr id="5" name="Image 0" descr="preencoded.png">    </p:cNvPr>
+          <p:cNvPr id="5" name="Image 0" descr="preencoded.png"/>
           <p:cNvPicPr>
             <a:picLocks noChangeAspect="1"/>
           </p:cNvPicPr>
           <p:nvPr/>
         </p:nvPicPr>
         <p:blipFill>
-          <a:blip r:embed="rId1"/>
+          <a:blip r:embed="rId3"/>
           <a:stretch>
             <a:fillRect/>
           </a:stretch>
@@ -9854,7 +10010,7 @@
           <a:bodyPr wrap="square" lIns="0" tIns="0" rIns="0" bIns="0" rtlCol="0" anchor="t"/>
           <a:lstStyle/>
           <a:p>
-            <a:pPr algn="ctr" indent="0" marL="0">
+            <a:pPr marL="0" indent="0" algn="ctr">
               <a:buNone/>
             </a:pPr>
             <a:r>
@@ -9868,7 +10024,7 @@
             <a:endParaRPr lang="en-US" sz="1300" dirty="0"/>
           </a:p>
           <a:p>
-            <a:pPr algn="ctr" indent="0" marL="0">
+            <a:pPr marL="0" indent="0" algn="ctr">
               <a:buNone/>
             </a:pPr>
             <a:r>
@@ -9907,17 +10063,24 @@
             <a:prstDash val="solid"/>
           </a:ln>
         </p:spPr>
+        <p:txBody>
+          <a:bodyPr/>
+          <a:lstStyle/>
+          <a:p>
+            <a:endParaRPr lang="en-IN"/>
+          </a:p>
+        </p:txBody>
       </p:sp>
       <p:pic>
         <p:nvPicPr>
-          <p:cNvPr id="8" name="Image 1" descr="preencoded.png">    </p:cNvPr>
+          <p:cNvPr id="8" name="Image 1" descr="preencoded.png"/>
           <p:cNvPicPr>
             <a:picLocks noChangeAspect="1"/>
           </p:cNvPicPr>
           <p:nvPr/>
         </p:nvPicPr>
         <p:blipFill>
-          <a:blip r:embed="rId2"/>
+          <a:blip r:embed="rId4"/>
           <a:stretch>
             <a:fillRect/>
           </a:stretch>
@@ -9953,7 +10116,7 @@
           <a:bodyPr wrap="square" lIns="0" tIns="0" rIns="0" bIns="0" rtlCol="0" anchor="t"/>
           <a:lstStyle/>
           <a:p>
-            <a:pPr algn="ctr" indent="0" marL="0">
+            <a:pPr marL="0" indent="0" algn="ctr">
               <a:buNone/>
             </a:pPr>
             <a:r>
@@ -9967,7 +10130,7 @@
             <a:endParaRPr lang="en-US" sz="1300" dirty="0"/>
           </a:p>
           <a:p>
-            <a:pPr algn="ctr" indent="0" marL="0">
+            <a:pPr marL="0" indent="0" algn="ctr">
               <a:buNone/>
             </a:pPr>
             <a:r>
@@ -10006,17 +10169,24 @@
             <a:prstDash val="solid"/>
           </a:ln>
         </p:spPr>
+        <p:txBody>
+          <a:bodyPr/>
+          <a:lstStyle/>
+          <a:p>
+            <a:endParaRPr lang="en-IN"/>
+          </a:p>
+        </p:txBody>
       </p:sp>
       <p:pic>
         <p:nvPicPr>
-          <p:cNvPr id="11" name="Image 2" descr="preencoded.png">    </p:cNvPr>
+          <p:cNvPr id="11" name="Image 2" descr="preencoded.png"/>
           <p:cNvPicPr>
             <a:picLocks noChangeAspect="1"/>
           </p:cNvPicPr>
           <p:nvPr/>
         </p:nvPicPr>
         <p:blipFill>
-          <a:blip r:embed="rId3"/>
+          <a:blip r:embed="rId5"/>
           <a:stretch>
             <a:fillRect/>
           </a:stretch>
@@ -10052,7 +10222,7 @@
           <a:bodyPr wrap="square" lIns="0" tIns="0" rIns="0" bIns="0" rtlCol="0" anchor="t"/>
           <a:lstStyle/>
           <a:p>
-            <a:pPr algn="ctr" indent="0" marL="0">
+            <a:pPr marL="0" indent="0" algn="ctr">
               <a:buNone/>
             </a:pPr>
             <a:r>
@@ -10066,7 +10236,7 @@
             <a:endParaRPr lang="en-US" sz="1300" dirty="0"/>
           </a:p>
           <a:p>
-            <a:pPr algn="ctr" indent="0" marL="0">
+            <a:pPr marL="0" indent="0" algn="ctr">
               <a:buNone/>
             </a:pPr>
             <a:r>
@@ -10105,17 +10275,24 @@
             <a:prstDash val="solid"/>
           </a:ln>
         </p:spPr>
+        <p:txBody>
+          <a:bodyPr/>
+          <a:lstStyle/>
+          <a:p>
+            <a:endParaRPr lang="en-IN"/>
+          </a:p>
+        </p:txBody>
       </p:sp>
       <p:pic>
         <p:nvPicPr>
-          <p:cNvPr id="14" name="Image 3" descr="preencoded.png">    </p:cNvPr>
+          <p:cNvPr id="14" name="Image 3" descr="preencoded.png"/>
           <p:cNvPicPr>
             <a:picLocks noChangeAspect="1"/>
           </p:cNvPicPr>
           <p:nvPr/>
         </p:nvPicPr>
         <p:blipFill>
-          <a:blip r:embed="rId4"/>
+          <a:blip r:embed="rId6"/>
           <a:stretch>
             <a:fillRect/>
           </a:stretch>
@@ -10151,7 +10328,7 @@
           <a:bodyPr wrap="square" lIns="0" tIns="0" rIns="0" bIns="0" rtlCol="0" anchor="t"/>
           <a:lstStyle/>
           <a:p>
-            <a:pPr algn="ctr" indent="0" marL="0">
+            <a:pPr marL="0" indent="0" algn="ctr">
               <a:buNone/>
             </a:pPr>
             <a:r>
@@ -10165,7 +10342,7 @@
             <a:endParaRPr lang="en-US" sz="1300" dirty="0"/>
           </a:p>
           <a:p>
-            <a:pPr algn="ctr" indent="0" marL="0">
+            <a:pPr marL="0" indent="0" algn="ctr">
               <a:buNone/>
             </a:pPr>
             <a:r>
@@ -10204,17 +10381,24 @@
             <a:prstDash val="solid"/>
           </a:ln>
         </p:spPr>
+        <p:txBody>
+          <a:bodyPr/>
+          <a:lstStyle/>
+          <a:p>
+            <a:endParaRPr lang="en-IN"/>
+          </a:p>
+        </p:txBody>
       </p:sp>
       <p:pic>
         <p:nvPicPr>
-          <p:cNvPr id="17" name="Image 4" descr="preencoded.png">    </p:cNvPr>
+          <p:cNvPr id="17" name="Image 4" descr="preencoded.png"/>
           <p:cNvPicPr>
             <a:picLocks noChangeAspect="1"/>
           </p:cNvPicPr>
           <p:nvPr/>
         </p:nvPicPr>
         <p:blipFill>
-          <a:blip r:embed="rId5"/>
+          <a:blip r:embed="rId7"/>
           <a:stretch>
             <a:fillRect/>
           </a:stretch>
@@ -10250,7 +10434,7 @@
           <a:bodyPr wrap="square" lIns="0" tIns="0" rIns="0" bIns="0" rtlCol="0" anchor="t"/>
           <a:lstStyle/>
           <a:p>
-            <a:pPr algn="ctr" indent="0" marL="0">
+            <a:pPr marL="0" indent="0" algn="ctr">
               <a:buNone/>
             </a:pPr>
             <a:r>
@@ -10264,7 +10448,7 @@
             <a:endParaRPr lang="en-US" sz="1300" dirty="0"/>
           </a:p>
           <a:p>
-            <a:pPr algn="ctr" indent="0" marL="0">
+            <a:pPr marL="0" indent="0" algn="ctr">
               <a:buNone/>
             </a:pPr>
             <a:r>
@@ -10302,6 +10486,13 @@
             <a:tailEnd type="triangle"/>
           </a:ln>
         </p:spPr>
+        <p:txBody>
+          <a:bodyPr/>
+          <a:lstStyle/>
+          <a:p>
+            <a:endParaRPr lang="en-IN"/>
+          </a:p>
+        </p:txBody>
       </p:sp>
       <p:sp>
         <p:nvSpPr>
@@ -10326,6 +10517,13 @@
             <a:tailEnd type="triangle"/>
           </a:ln>
         </p:spPr>
+        <p:txBody>
+          <a:bodyPr/>
+          <a:lstStyle/>
+          <a:p>
+            <a:endParaRPr lang="en-IN"/>
+          </a:p>
+        </p:txBody>
       </p:sp>
       <p:sp>
         <p:nvSpPr>
@@ -10350,6 +10548,13 @@
             <a:tailEnd type="triangle"/>
           </a:ln>
         </p:spPr>
+        <p:txBody>
+          <a:bodyPr/>
+          <a:lstStyle/>
+          <a:p>
+            <a:endParaRPr lang="en-IN"/>
+          </a:p>
+        </p:txBody>
       </p:sp>
       <p:sp>
         <p:nvSpPr>
@@ -10374,6 +10579,13 @@
             <a:tailEnd type="triangle"/>
           </a:ln>
         </p:spPr>
+        <p:txBody>
+          <a:bodyPr/>
+          <a:lstStyle/>
+          <a:p>
+            <a:endParaRPr lang="en-IN"/>
+          </a:p>
+        </p:txBody>
       </p:sp>
       <p:sp>
         <p:nvSpPr>
@@ -10396,7 +10608,7 @@
           <a:bodyPr wrap="square" lIns="0" tIns="0" rIns="0" bIns="0" rtlCol="0" anchor="ctr"/>
           <a:lstStyle/>
           <a:p>
-            <a:pPr algn="ctr" indent="0" marL="0">
+            <a:pPr marL="0" indent="0" algn="ctr">
               <a:buNone/>
             </a:pPr>
             <a:r>
@@ -10431,7 +10643,7 @@
           </a:prstGeom>
           <a:extLst>
             <a:ext uri="{C572A759-6A51-4108-AA02-DFA0A04FC94B}">
-              <ma14:wrappingTextBoxFlag xmlns:ma14="http://schemas.microsoft.com/office/mac/drawingml/2011/main" val="0"/>
+              <ma14:wrappingTextBoxFlag xmlns:ma14="http://schemas.microsoft.com/office/mac/drawingml/2011/main" xmlns="" val="0"/>
             </a:ext>
           </a:extLst>
         </p:spPr>
@@ -10452,7 +10664,7 @@
           <a:p>
             <a:pPr algn="l"/>
             <a:fld id="{F7021451-1387-4CA6-816F-3879F97B5CBC}" type="slidenum">
-              <a:rPr b="0" lang="en-US"/>
+              <a:rPr lang="en-US" b="0"/>
               <a:t>22</a:t>
             </a:fld>
             <a:endParaRPr lang="en-US"/>
@@ -10487,9 +10699,11 @@
       <p:sp>
         <p:nvSpPr>
           <p:cNvPr id="2" name="Text 1"/>
-          <p:cNvSpPr/>
+          <p:cNvSpPr>
+            <a:spLocks noGrp="1"/>
+          </p:cNvSpPr>
           <p:nvPr>
-            <p:ph idx="101" type="title" hasCustomPrompt="1"/>
+            <p:ph type="title" idx="101" hasCustomPrompt="1"/>
           </p:nvPr>
         </p:nvSpPr>
         <p:spPr>
@@ -10507,7 +10721,7 @@
           <a:bodyPr wrap="square" lIns="0" tIns="0" rIns="0" bIns="0" rtlCol="0" anchor="ctr"/>
           <a:lstStyle/>
           <a:p>
-            <a:pPr indent="0" marL="0">
+            <a:pPr marL="0" indent="0">
               <a:buNone/>
             </a:pPr>
             <a:r>
@@ -10549,17 +10763,24 @@
             <a:prstDash val="solid"/>
           </a:ln>
         </p:spPr>
+        <p:txBody>
+          <a:bodyPr/>
+          <a:lstStyle/>
+          <a:p>
+            <a:endParaRPr lang="en-IN"/>
+          </a:p>
+        </p:txBody>
       </p:sp>
       <p:pic>
         <p:nvPicPr>
-          <p:cNvPr id="5" name="Image 0" descr="img/attendance-2k.jpg">    </p:cNvPr>
+          <p:cNvPr id="5" name="Image 0" descr="img/attendance-2k.jpg"/>
           <p:cNvPicPr>
             <a:picLocks noChangeAspect="1"/>
           </p:cNvPicPr>
           <p:nvPr/>
         </p:nvPicPr>
         <p:blipFill>
-          <a:blip r:embed="rId1"/>
+          <a:blip r:embed="rId3"/>
           <a:stretch>
             <a:fillRect/>
           </a:stretch>
@@ -10595,6 +10816,13 @@
             <a:prstDash val="solid"/>
           </a:ln>
         </p:spPr>
+        <p:txBody>
+          <a:bodyPr/>
+          <a:lstStyle/>
+          <a:p>
+            <a:endParaRPr lang="en-IN"/>
+          </a:p>
+        </p:txBody>
       </p:sp>
       <p:sp>
         <p:nvSpPr>
@@ -10722,7 +10950,7 @@
           </a:prstGeom>
           <a:extLst>
             <a:ext uri="{C572A759-6A51-4108-AA02-DFA0A04FC94B}">
-              <ma14:wrappingTextBoxFlag xmlns:ma14="http://schemas.microsoft.com/office/mac/drawingml/2011/main" val="0"/>
+              <ma14:wrappingTextBoxFlag xmlns:ma14="http://schemas.microsoft.com/office/mac/drawingml/2011/main" xmlns="" val="0"/>
             </a:ext>
           </a:extLst>
         </p:spPr>
@@ -10743,7 +10971,7 @@
           <a:p>
             <a:pPr algn="l"/>
             <a:fld id="{F7021451-1387-4CA6-816F-3879F97B5CBC}" type="slidenum">
-              <a:rPr b="0" lang="en-US"/>
+              <a:rPr lang="en-US" b="0"/>
               <a:t>23</a:t>
             </a:fld>
             <a:endParaRPr lang="en-US"/>
@@ -10778,9 +11006,11 @@
       <p:sp>
         <p:nvSpPr>
           <p:cNvPr id="2" name="Text 1"/>
-          <p:cNvSpPr/>
+          <p:cNvSpPr>
+            <a:spLocks noGrp="1"/>
+          </p:cNvSpPr>
           <p:nvPr>
-            <p:ph idx="101" type="title" hasCustomPrompt="1"/>
+            <p:ph type="title" idx="101" hasCustomPrompt="1"/>
           </p:nvPr>
         </p:nvSpPr>
         <p:spPr>
@@ -10798,7 +11028,7 @@
           <a:bodyPr wrap="square" lIns="0" tIns="0" rIns="0" bIns="0" rtlCol="0" anchor="ctr"/>
           <a:lstStyle/>
           <a:p>
-            <a:pPr indent="0" marL="0">
+            <a:pPr marL="0" indent="0">
               <a:buNone/>
             </a:pPr>
             <a:r>
@@ -10818,7 +11048,7 @@
       </p:sp>
       <p:graphicFrame>
         <p:nvGraphicFramePr>
-          <p:cNvPr id="4" name="Chart 0" descr=""/>
+          <p:cNvPr id="4" name="Chart 0"/>
           <p:cNvGraphicFramePr/>
           <p:nvPr/>
         </p:nvGraphicFramePr>
@@ -10826,9 +11056,9 @@
           <a:off x="457200" y="1097280"/>
           <a:ext cx="8229600" cy="3566160"/>
         </p:xfrm>
-        <a:graphic xmlns:a="http://schemas.openxmlformats.org/drawingml/2006/main">
+        <a:graphic>
           <a:graphicData uri="http://schemas.openxmlformats.org/drawingml/2006/chart">
-            <c:chart xmlns:c="http://schemas.openxmlformats.org/drawingml/2006/chart" r:id="rId1"/>
+            <c:chart xmlns:c="http://schemas.openxmlformats.org/drawingml/2006/chart" xmlns:r="http://schemas.openxmlformats.org/officeDocument/2006/relationships" r:id="rId3"/>
           </a:graphicData>
         </a:graphic>
       </p:graphicFrame>
@@ -10852,7 +11082,7 @@
           </a:prstGeom>
           <a:extLst>
             <a:ext uri="{C572A759-6A51-4108-AA02-DFA0A04FC94B}">
-              <ma14:wrappingTextBoxFlag xmlns:ma14="http://schemas.microsoft.com/office/mac/drawingml/2011/main" val="0"/>
+              <ma14:wrappingTextBoxFlag xmlns:ma14="http://schemas.microsoft.com/office/mac/drawingml/2011/main" xmlns="" val="0"/>
             </a:ext>
           </a:extLst>
         </p:spPr>
@@ -10873,7 +11103,7 @@
           <a:p>
             <a:pPr algn="l"/>
             <a:fld id="{F7021451-1387-4CA6-816F-3879F97B5CBC}" type="slidenum">
-              <a:rPr b="0" lang="en-US"/>
+              <a:rPr lang="en-US" b="0"/>
               <a:t>24</a:t>
             </a:fld>
             <a:endParaRPr lang="en-US"/>
@@ -10908,9 +11138,11 @@
       <p:sp>
         <p:nvSpPr>
           <p:cNvPr id="2" name="Text 1"/>
-          <p:cNvSpPr/>
+          <p:cNvSpPr>
+            <a:spLocks noGrp="1"/>
+          </p:cNvSpPr>
           <p:nvPr>
-            <p:ph idx="101" type="title" hasCustomPrompt="1"/>
+            <p:ph type="title" idx="101" hasCustomPrompt="1"/>
           </p:nvPr>
         </p:nvSpPr>
         <p:spPr>
@@ -10928,7 +11160,7 @@
           <a:bodyPr wrap="square" lIns="0" tIns="0" rIns="0" bIns="0" rtlCol="0" anchor="ctr"/>
           <a:lstStyle/>
           <a:p>
-            <a:pPr indent="0" marL="0">
+            <a:pPr marL="0" indent="0">
               <a:buNone/>
             </a:pPr>
             <a:r>
@@ -10970,17 +11202,24 @@
             <a:prstDash val="solid"/>
           </a:ln>
         </p:spPr>
+        <p:txBody>
+          <a:bodyPr/>
+          <a:lstStyle/>
+          <a:p>
+            <a:endParaRPr lang="en-IN"/>
+          </a:p>
+        </p:txBody>
       </p:sp>
       <p:pic>
         <p:nvPicPr>
-          <p:cNvPr id="5" name="Image 0" descr="img/payroll-2k.jpg">    </p:cNvPr>
+          <p:cNvPr id="5" name="Image 0" descr="img/payroll-2k.jpg"/>
           <p:cNvPicPr>
             <a:picLocks noChangeAspect="1"/>
           </p:cNvPicPr>
           <p:nvPr/>
         </p:nvPicPr>
         <p:blipFill>
-          <a:blip r:embed="rId1"/>
+          <a:blip r:embed="rId3"/>
           <a:stretch>
             <a:fillRect/>
           </a:stretch>
@@ -11016,6 +11255,13 @@
             <a:prstDash val="solid"/>
           </a:ln>
         </p:spPr>
+        <p:txBody>
+          <a:bodyPr/>
+          <a:lstStyle/>
+          <a:p>
+            <a:endParaRPr lang="en-IN"/>
+          </a:p>
+        </p:txBody>
       </p:sp>
       <p:sp>
         <p:nvSpPr>
@@ -11041,6 +11287,13 @@
             <a:prstDash val="solid"/>
           </a:ln>
         </p:spPr>
+        <p:txBody>
+          <a:bodyPr/>
+          <a:lstStyle/>
+          <a:p>
+            <a:endParaRPr lang="en-IN"/>
+          </a:p>
+        </p:txBody>
       </p:sp>
       <p:sp>
         <p:nvSpPr>
@@ -11066,6 +11319,13 @@
             <a:prstDash val="solid"/>
           </a:ln>
         </p:spPr>
+        <p:txBody>
+          <a:bodyPr/>
+          <a:lstStyle/>
+          <a:p>
+            <a:endParaRPr lang="en-IN"/>
+          </a:p>
+        </p:txBody>
       </p:sp>
       <p:sp>
         <p:nvSpPr>
@@ -11088,7 +11348,7 @@
           <a:bodyPr wrap="square" lIns="0" tIns="0" rIns="0" bIns="0" rtlCol="0" anchor="ctr"/>
           <a:lstStyle/>
           <a:p>
-            <a:pPr algn="ctr" indent="0" marL="0">
+            <a:pPr marL="0" indent="0" algn="ctr">
               <a:buNone/>
             </a:pPr>
             <a:r>
@@ -11124,7 +11384,7 @@
           <a:bodyPr wrap="square" lIns="0" tIns="0" rIns="0" bIns="0" rtlCol="0" anchor="t"/>
           <a:lstStyle/>
           <a:p>
-            <a:pPr algn="ctr" indent="0" marL="0">
+            <a:pPr marL="0" indent="0" algn="ctr">
               <a:buNone/>
             </a:pPr>
             <a:r>
@@ -11244,7 +11504,7 @@
           </a:prstGeom>
           <a:extLst>
             <a:ext uri="{C572A759-6A51-4108-AA02-DFA0A04FC94B}">
-              <ma14:wrappingTextBoxFlag xmlns:ma14="http://schemas.microsoft.com/office/mac/drawingml/2011/main" val="0"/>
+              <ma14:wrappingTextBoxFlag xmlns:ma14="http://schemas.microsoft.com/office/mac/drawingml/2011/main" xmlns="" val="0"/>
             </a:ext>
           </a:extLst>
         </p:spPr>
@@ -11265,7 +11525,7 @@
           <a:p>
             <a:pPr algn="l"/>
             <a:fld id="{F7021451-1387-4CA6-816F-3879F97B5CBC}" type="slidenum">
-              <a:rPr b="0" lang="en-US"/>
+              <a:rPr lang="en-US" b="0"/>
               <a:t>25</a:t>
             </a:fld>
             <a:endParaRPr lang="en-US"/>
@@ -11300,9 +11560,11 @@
       <p:sp>
         <p:nvSpPr>
           <p:cNvPr id="2" name="Text 1"/>
-          <p:cNvSpPr/>
+          <p:cNvSpPr>
+            <a:spLocks noGrp="1"/>
+          </p:cNvSpPr>
           <p:nvPr>
-            <p:ph idx="101" type="title" hasCustomPrompt="1"/>
+            <p:ph type="title" idx="101" hasCustomPrompt="1"/>
           </p:nvPr>
         </p:nvSpPr>
         <p:spPr>
@@ -11320,7 +11582,7 @@
           <a:bodyPr wrap="square" lIns="0" tIns="0" rIns="0" bIns="0" rtlCol="0" anchor="ctr"/>
           <a:lstStyle/>
           <a:p>
-            <a:pPr indent="0" marL="0">
+            <a:pPr marL="0" indent="0">
               <a:buNone/>
             </a:pPr>
             <a:r>
@@ -11340,7 +11602,7 @@
       </p:sp>
       <p:graphicFrame>
         <p:nvGraphicFramePr>
-          <p:cNvPr id="4" name="Chart 0" descr=""/>
+          <p:cNvPr id="4" name="Chart 0"/>
           <p:cNvGraphicFramePr/>
           <p:nvPr/>
         </p:nvGraphicFramePr>
@@ -11348,15 +11610,15 @@
           <a:off x="457200" y="1188720"/>
           <a:ext cx="4023360" cy="3200400"/>
         </p:xfrm>
-        <a:graphic xmlns:a="http://schemas.openxmlformats.org/drawingml/2006/main">
+        <a:graphic>
           <a:graphicData uri="http://schemas.openxmlformats.org/drawingml/2006/chart">
-            <c:chart xmlns:c="http://schemas.openxmlformats.org/drawingml/2006/chart" r:id="rId1"/>
+            <c:chart xmlns:c="http://schemas.openxmlformats.org/drawingml/2006/chart" xmlns:r="http://schemas.openxmlformats.org/officeDocument/2006/relationships" r:id="rId3"/>
           </a:graphicData>
         </a:graphic>
       </p:graphicFrame>
       <p:graphicFrame>
         <p:nvGraphicFramePr>
-          <p:cNvPr id="5" name="Chart 1" descr=""/>
+          <p:cNvPr id="5" name="Chart 1"/>
           <p:cNvGraphicFramePr/>
           <p:nvPr/>
         </p:nvGraphicFramePr>
@@ -11364,9 +11626,9 @@
           <a:off x="4663440" y="1188720"/>
           <a:ext cx="4023360" cy="3200400"/>
         </p:xfrm>
-        <a:graphic xmlns:a="http://schemas.openxmlformats.org/drawingml/2006/main">
+        <a:graphic>
           <a:graphicData uri="http://schemas.openxmlformats.org/drawingml/2006/chart">
-            <c:chart xmlns:c="http://schemas.openxmlformats.org/drawingml/2006/chart" r:id="rId2"/>
+            <c:chart xmlns:c="http://schemas.openxmlformats.org/drawingml/2006/chart" xmlns:r="http://schemas.openxmlformats.org/officeDocument/2006/relationships" r:id="rId4"/>
           </a:graphicData>
         </a:graphic>
       </p:graphicFrame>
@@ -11391,7 +11653,7 @@
           <a:bodyPr wrap="square" lIns="0" tIns="0" rIns="0" bIns="0" rtlCol="0" anchor="ctr"/>
           <a:lstStyle/>
           <a:p>
-            <a:pPr algn="ctr" indent="0" marL="0">
+            <a:pPr marL="0" indent="0" algn="ctr">
               <a:buNone/>
             </a:pPr>
             <a:r>
@@ -11426,7 +11688,7 @@
           </a:prstGeom>
           <a:extLst>
             <a:ext uri="{C572A759-6A51-4108-AA02-DFA0A04FC94B}">
-              <ma14:wrappingTextBoxFlag xmlns:ma14="http://schemas.microsoft.com/office/mac/drawingml/2011/main" val="0"/>
+              <ma14:wrappingTextBoxFlag xmlns:ma14="http://schemas.microsoft.com/office/mac/drawingml/2011/main" xmlns="" val="0"/>
             </a:ext>
           </a:extLst>
         </p:spPr>
@@ -11447,7 +11709,7 @@
           <a:p>
             <a:pPr algn="l"/>
             <a:fld id="{F7021451-1387-4CA6-816F-3879F97B5CBC}" type="slidenum">
-              <a:rPr b="0" lang="en-US"/>
+              <a:rPr lang="en-US" b="0"/>
               <a:t>26</a:t>
             </a:fld>
             <a:endParaRPr lang="en-US"/>
@@ -11482,9 +11744,11 @@
       <p:sp>
         <p:nvSpPr>
           <p:cNvPr id="2" name="Text 1"/>
-          <p:cNvSpPr/>
+          <p:cNvSpPr>
+            <a:spLocks noGrp="1"/>
+          </p:cNvSpPr>
           <p:nvPr>
-            <p:ph idx="101" type="title" hasCustomPrompt="1"/>
+            <p:ph type="title" idx="101" hasCustomPrompt="1"/>
           </p:nvPr>
         </p:nvSpPr>
         <p:spPr>
@@ -11502,7 +11766,7 @@
           <a:bodyPr wrap="square" lIns="0" tIns="0" rIns="0" bIns="0" rtlCol="0" anchor="ctr"/>
           <a:lstStyle/>
           <a:p>
-            <a:pPr indent="0" marL="0">
+            <a:pPr marL="0" indent="0">
               <a:buNone/>
             </a:pPr>
             <a:r>
@@ -11544,6 +11808,13 @@
             <a:prstDash val="solid"/>
           </a:ln>
         </p:spPr>
+        <p:txBody>
+          <a:bodyPr/>
+          <a:lstStyle/>
+          <a:p>
+            <a:endParaRPr lang="en-IN"/>
+          </a:p>
+        </p:txBody>
       </p:sp>
       <p:sp>
         <p:nvSpPr>
@@ -11569,6 +11840,13 @@
             <a:prstDash val="solid"/>
           </a:ln>
         </p:spPr>
+        <p:txBody>
+          <a:bodyPr/>
+          <a:lstStyle/>
+          <a:p>
+            <a:endParaRPr lang="en-IN"/>
+          </a:p>
+        </p:txBody>
       </p:sp>
       <p:sp>
         <p:nvSpPr>
@@ -11591,7 +11869,7 @@
           <a:bodyPr wrap="square" lIns="0" tIns="0" rIns="0" bIns="0" rtlCol="0" anchor="ctr"/>
           <a:lstStyle/>
           <a:p>
-            <a:pPr algn="ctr" indent="0" marL="0">
+            <a:pPr marL="0" indent="0" algn="ctr">
               <a:buNone/>
             </a:pPr>
             <a:r>
@@ -11627,7 +11905,7 @@
           <a:bodyPr wrap="square" lIns="0" tIns="0" rIns="0" bIns="0" rtlCol="0" anchor="t"/>
           <a:lstStyle/>
           <a:p>
-            <a:pPr algn="ctr" indent="0" marL="0">
+            <a:pPr marL="0" indent="0" algn="ctr">
               <a:buNone/>
             </a:pPr>
             <a:r>
@@ -11666,6 +11944,13 @@
             <a:prstDash val="solid"/>
           </a:ln>
         </p:spPr>
+        <p:txBody>
+          <a:bodyPr/>
+          <a:lstStyle/>
+          <a:p>
+            <a:endParaRPr lang="en-IN"/>
+          </a:p>
+        </p:txBody>
       </p:sp>
       <p:sp>
         <p:nvSpPr>
@@ -11691,6 +11976,13 @@
             <a:prstDash val="solid"/>
           </a:ln>
         </p:spPr>
+        <p:txBody>
+          <a:bodyPr/>
+          <a:lstStyle/>
+          <a:p>
+            <a:endParaRPr lang="en-IN"/>
+          </a:p>
+        </p:txBody>
       </p:sp>
       <p:sp>
         <p:nvSpPr>
@@ -11713,7 +12005,7 @@
           <a:bodyPr wrap="square" lIns="0" tIns="0" rIns="0" bIns="0" rtlCol="0" anchor="ctr"/>
           <a:lstStyle/>
           <a:p>
-            <a:pPr algn="ctr" indent="0" marL="0">
+            <a:pPr marL="0" indent="0" algn="ctr">
               <a:buNone/>
             </a:pPr>
             <a:r>
@@ -11749,7 +12041,7 @@
           <a:bodyPr wrap="square" lIns="0" tIns="0" rIns="0" bIns="0" rtlCol="0" anchor="t"/>
           <a:lstStyle/>
           <a:p>
-            <a:pPr algn="ctr" indent="0" marL="0">
+            <a:pPr marL="0" indent="0" algn="ctr">
               <a:buNone/>
             </a:pPr>
             <a:r>
@@ -11788,6 +12080,13 @@
             <a:prstDash val="solid"/>
           </a:ln>
         </p:spPr>
+        <p:txBody>
+          <a:bodyPr/>
+          <a:lstStyle/>
+          <a:p>
+            <a:endParaRPr lang="en-IN"/>
+          </a:p>
+        </p:txBody>
       </p:sp>
       <p:sp>
         <p:nvSpPr>
@@ -11813,6 +12112,13 @@
             <a:prstDash val="solid"/>
           </a:ln>
         </p:spPr>
+        <p:txBody>
+          <a:bodyPr/>
+          <a:lstStyle/>
+          <a:p>
+            <a:endParaRPr lang="en-IN"/>
+          </a:p>
+        </p:txBody>
       </p:sp>
       <p:sp>
         <p:nvSpPr>
@@ -11835,7 +12141,7 @@
           <a:bodyPr wrap="square" lIns="0" tIns="0" rIns="0" bIns="0" rtlCol="0" anchor="ctr"/>
           <a:lstStyle/>
           <a:p>
-            <a:pPr algn="ctr" indent="0" marL="0">
+            <a:pPr marL="0" indent="0" algn="ctr">
               <a:buNone/>
             </a:pPr>
             <a:r>
@@ -11871,7 +12177,7 @@
           <a:bodyPr wrap="square" lIns="0" tIns="0" rIns="0" bIns="0" rtlCol="0" anchor="t"/>
           <a:lstStyle/>
           <a:p>
-            <a:pPr algn="ctr" indent="0" marL="0">
+            <a:pPr marL="0" indent="0" algn="ctr">
               <a:buNone/>
             </a:pPr>
             <a:r>
@@ -11910,6 +12216,13 @@
             <a:prstDash val="solid"/>
           </a:ln>
         </p:spPr>
+        <p:txBody>
+          <a:bodyPr/>
+          <a:lstStyle/>
+          <a:p>
+            <a:endParaRPr lang="en-IN"/>
+          </a:p>
+        </p:txBody>
       </p:sp>
       <p:sp>
         <p:nvSpPr>
@@ -11935,6 +12248,13 @@
             <a:prstDash val="solid"/>
           </a:ln>
         </p:spPr>
+        <p:txBody>
+          <a:bodyPr/>
+          <a:lstStyle/>
+          <a:p>
+            <a:endParaRPr lang="en-IN"/>
+          </a:p>
+        </p:txBody>
       </p:sp>
       <p:sp>
         <p:nvSpPr>
@@ -11957,7 +12277,7 @@
           <a:bodyPr wrap="square" lIns="0" tIns="0" rIns="0" bIns="0" rtlCol="0" anchor="ctr"/>
           <a:lstStyle/>
           <a:p>
-            <a:pPr algn="ctr" indent="0" marL="0">
+            <a:pPr marL="0" indent="0" algn="ctr">
               <a:buNone/>
             </a:pPr>
             <a:r>
@@ -11993,7 +12313,7 @@
           <a:bodyPr wrap="square" lIns="0" tIns="0" rIns="0" bIns="0" rtlCol="0" anchor="t"/>
           <a:lstStyle/>
           <a:p>
-            <a:pPr algn="ctr" indent="0" marL="0">
+            <a:pPr marL="0" indent="0" algn="ctr">
               <a:buNone/>
             </a:pPr>
             <a:r>
@@ -12113,7 +12433,7 @@
           </a:prstGeom>
           <a:extLst>
             <a:ext uri="{C572A759-6A51-4108-AA02-DFA0A04FC94B}">
-              <ma14:wrappingTextBoxFlag xmlns:ma14="http://schemas.microsoft.com/office/mac/drawingml/2011/main" val="0"/>
+              <ma14:wrappingTextBoxFlag xmlns:ma14="http://schemas.microsoft.com/office/mac/drawingml/2011/main" xmlns="" val="0"/>
             </a:ext>
           </a:extLst>
         </p:spPr>
@@ -12134,7 +12454,7 @@
           <a:p>
             <a:pPr algn="l"/>
             <a:fld id="{F7021451-1387-4CA6-816F-3879F97B5CBC}" type="slidenum">
-              <a:rPr b="0" lang="en-US"/>
+              <a:rPr lang="en-US" b="0"/>
               <a:t>27</a:t>
             </a:fld>
             <a:endParaRPr lang="en-US"/>
@@ -12169,9 +12489,11 @@
       <p:sp>
         <p:nvSpPr>
           <p:cNvPr id="2" name="Text 1"/>
-          <p:cNvSpPr/>
+          <p:cNvSpPr>
+            <a:spLocks noGrp="1"/>
+          </p:cNvSpPr>
           <p:nvPr>
-            <p:ph idx="101" type="title" hasCustomPrompt="1"/>
+            <p:ph type="title" idx="101" hasCustomPrompt="1"/>
           </p:nvPr>
         </p:nvSpPr>
         <p:spPr>
@@ -12189,7 +12511,7 @@
           <a:bodyPr wrap="square" lIns="0" tIns="0" rIns="0" bIns="0" rtlCol="0" anchor="ctr"/>
           <a:lstStyle/>
           <a:p>
-            <a:pPr indent="0" marL="0">
+            <a:pPr marL="0" indent="0">
               <a:buNone/>
             </a:pPr>
             <a:r>
@@ -12231,6 +12553,13 @@
             <a:prstDash val="solid"/>
           </a:ln>
         </p:spPr>
+        <p:txBody>
+          <a:bodyPr/>
+          <a:lstStyle/>
+          <a:p>
+            <a:endParaRPr lang="en-IN"/>
+          </a:p>
+        </p:txBody>
       </p:sp>
       <p:sp>
         <p:nvSpPr>
@@ -12253,7 +12582,7 @@
           <a:bodyPr wrap="square" lIns="0" tIns="0" rIns="0" bIns="0" rtlCol="0" anchor="ctr"/>
           <a:lstStyle/>
           <a:p>
-            <a:pPr algn="ctr" indent="0" marL="0">
+            <a:pPr marL="0" indent="0" algn="ctr">
               <a:buNone/>
             </a:pPr>
             <a:r>
@@ -12289,7 +12618,7 @@
           <a:bodyPr wrap="square" lIns="0" tIns="0" rIns="0" bIns="0" rtlCol="0" anchor="ctr"/>
           <a:lstStyle/>
           <a:p>
-            <a:pPr algn="ctr" indent="0" marL="0">
+            <a:pPr marL="0" indent="0" algn="ctr">
               <a:buNone/>
             </a:pPr>
             <a:r>
@@ -12325,7 +12654,7 @@
           <a:bodyPr wrap="square" lIns="0" tIns="0" rIns="0" bIns="0" rtlCol="0" anchor="t"/>
           <a:lstStyle/>
           <a:p>
-            <a:pPr algn="ctr" indent="0" marL="0">
+            <a:pPr marL="0" indent="0" algn="ctr">
               <a:buNone/>
             </a:pPr>
             <a:r>
@@ -12364,6 +12693,13 @@
             <a:prstDash val="solid"/>
           </a:ln>
         </p:spPr>
+        <p:txBody>
+          <a:bodyPr/>
+          <a:lstStyle/>
+          <a:p>
+            <a:endParaRPr lang="en-IN"/>
+          </a:p>
+        </p:txBody>
       </p:sp>
       <p:sp>
         <p:nvSpPr>
@@ -12386,7 +12722,7 @@
           <a:bodyPr wrap="square" lIns="0" tIns="0" rIns="0" bIns="0" rtlCol="0" anchor="ctr"/>
           <a:lstStyle/>
           <a:p>
-            <a:pPr algn="ctr" indent="0" marL="0">
+            <a:pPr marL="0" indent="0" algn="ctr">
               <a:buNone/>
             </a:pPr>
             <a:r>
@@ -12422,7 +12758,7 @@
           <a:bodyPr wrap="square" lIns="0" tIns="0" rIns="0" bIns="0" rtlCol="0" anchor="ctr"/>
           <a:lstStyle/>
           <a:p>
-            <a:pPr algn="ctr" indent="0" marL="0">
+            <a:pPr marL="0" indent="0" algn="ctr">
               <a:buNone/>
             </a:pPr>
             <a:r>
@@ -12458,7 +12794,7 @@
           <a:bodyPr wrap="square" lIns="0" tIns="0" rIns="0" bIns="0" rtlCol="0" anchor="t"/>
           <a:lstStyle/>
           <a:p>
-            <a:pPr algn="ctr" indent="0" marL="0">
+            <a:pPr marL="0" indent="0" algn="ctr">
               <a:buNone/>
             </a:pPr>
             <a:r>
@@ -12497,6 +12833,13 @@
             <a:prstDash val="solid"/>
           </a:ln>
         </p:spPr>
+        <p:txBody>
+          <a:bodyPr/>
+          <a:lstStyle/>
+          <a:p>
+            <a:endParaRPr lang="en-IN"/>
+          </a:p>
+        </p:txBody>
       </p:sp>
       <p:sp>
         <p:nvSpPr>
@@ -12519,7 +12862,7 @@
           <a:bodyPr wrap="square" lIns="0" tIns="0" rIns="0" bIns="0" rtlCol="0" anchor="ctr"/>
           <a:lstStyle/>
           <a:p>
-            <a:pPr algn="ctr" indent="0" marL="0">
+            <a:pPr marL="0" indent="0" algn="ctr">
               <a:buNone/>
             </a:pPr>
             <a:r>
@@ -12555,7 +12898,7 @@
           <a:bodyPr wrap="square" lIns="0" tIns="0" rIns="0" bIns="0" rtlCol="0" anchor="ctr"/>
           <a:lstStyle/>
           <a:p>
-            <a:pPr algn="ctr" indent="0" marL="0">
+            <a:pPr marL="0" indent="0" algn="ctr">
               <a:buNone/>
             </a:pPr>
             <a:r>
@@ -12591,7 +12934,7 @@
           <a:bodyPr wrap="square" lIns="0" tIns="0" rIns="0" bIns="0" rtlCol="0" anchor="t"/>
           <a:lstStyle/>
           <a:p>
-            <a:pPr algn="ctr" indent="0" marL="0">
+            <a:pPr marL="0" indent="0" algn="ctr">
               <a:buNone/>
             </a:pPr>
             <a:r>
@@ -12630,6 +12973,13 @@
             <a:prstDash val="solid"/>
           </a:ln>
         </p:spPr>
+        <p:txBody>
+          <a:bodyPr/>
+          <a:lstStyle/>
+          <a:p>
+            <a:endParaRPr lang="en-IN"/>
+          </a:p>
+        </p:txBody>
       </p:sp>
       <p:sp>
         <p:nvSpPr>
@@ -12652,7 +13002,7 @@
           <a:bodyPr wrap="square" lIns="0" tIns="0" rIns="0" bIns="0" rtlCol="0" anchor="ctr"/>
           <a:lstStyle/>
           <a:p>
-            <a:pPr algn="ctr" indent="0" marL="0">
+            <a:pPr marL="0" indent="0" algn="ctr">
               <a:buNone/>
             </a:pPr>
             <a:r>
@@ -12688,7 +13038,7 @@
           <a:bodyPr wrap="square" lIns="0" tIns="0" rIns="0" bIns="0" rtlCol="0" anchor="ctr"/>
           <a:lstStyle/>
           <a:p>
-            <a:pPr algn="ctr" indent="0" marL="0">
+            <a:pPr marL="0" indent="0" algn="ctr">
               <a:buNone/>
             </a:pPr>
             <a:r>
@@ -12724,7 +13074,7 @@
           <a:bodyPr wrap="square" lIns="0" tIns="0" rIns="0" bIns="0" rtlCol="0" anchor="t"/>
           <a:lstStyle/>
           <a:p>
-            <a:pPr algn="ctr" indent="0" marL="0">
+            <a:pPr marL="0" indent="0" algn="ctr">
               <a:buNone/>
             </a:pPr>
             <a:r>
@@ -12763,6 +13113,13 @@
             <a:prstDash val="solid"/>
           </a:ln>
         </p:spPr>
+        <p:txBody>
+          <a:bodyPr/>
+          <a:lstStyle/>
+          <a:p>
+            <a:endParaRPr lang="en-IN"/>
+          </a:p>
+        </p:txBody>
       </p:sp>
       <p:sp>
         <p:nvSpPr>
@@ -12785,7 +13142,7 @@
           <a:bodyPr wrap="square" lIns="0" tIns="0" rIns="0" bIns="0" rtlCol="0" anchor="ctr"/>
           <a:lstStyle/>
           <a:p>
-            <a:pPr algn="ctr" indent="0" marL="0">
+            <a:pPr marL="0" indent="0" algn="ctr">
               <a:buNone/>
             </a:pPr>
             <a:r>
@@ -12821,7 +13178,7 @@
           <a:bodyPr wrap="square" lIns="0" tIns="0" rIns="0" bIns="0" rtlCol="0" anchor="ctr"/>
           <a:lstStyle/>
           <a:p>
-            <a:pPr algn="ctr" indent="0" marL="0">
+            <a:pPr marL="0" indent="0" algn="ctr">
               <a:buNone/>
             </a:pPr>
             <a:r>
@@ -12857,7 +13214,7 @@
           <a:bodyPr wrap="square" lIns="0" tIns="0" rIns="0" bIns="0" rtlCol="0" anchor="t"/>
           <a:lstStyle/>
           <a:p>
-            <a:pPr algn="ctr" indent="0" marL="0">
+            <a:pPr marL="0" indent="0" algn="ctr">
               <a:buNone/>
             </a:pPr>
             <a:r>
@@ -12893,7 +13250,7 @@
           <a:bodyPr wrap="square" lIns="0" tIns="0" rIns="0" bIns="0" rtlCol="0" anchor="ctr"/>
           <a:lstStyle/>
           <a:p>
-            <a:pPr algn="ctr" indent="0" marL="0">
+            <a:pPr marL="0" indent="0" algn="ctr">
               <a:buNone/>
             </a:pPr>
             <a:r>
@@ -12928,7 +13285,7 @@
           </a:prstGeom>
           <a:extLst>
             <a:ext uri="{C572A759-6A51-4108-AA02-DFA0A04FC94B}">
-              <ma14:wrappingTextBoxFlag xmlns:ma14="http://schemas.microsoft.com/office/mac/drawingml/2011/main" val="0"/>
+              <ma14:wrappingTextBoxFlag xmlns:ma14="http://schemas.microsoft.com/office/mac/drawingml/2011/main" xmlns="" val="0"/>
             </a:ext>
           </a:extLst>
         </p:spPr>
@@ -12949,7 +13306,7 @@
           <a:p>
             <a:pPr algn="l"/>
             <a:fld id="{F7021451-1387-4CA6-816F-3879F97B5CBC}" type="slidenum">
-              <a:rPr b="0" lang="en-US"/>
+              <a:rPr lang="en-US" b="0"/>
               <a:t>28</a:t>
             </a:fld>
             <a:endParaRPr lang="en-US"/>
@@ -13002,7 +13359,7 @@
           <a:bodyPr wrap="square" lIns="0" tIns="0" rIns="0" bIns="0" rtlCol="0" anchor="ctr"/>
           <a:lstStyle/>
           <a:p>
-            <a:pPr indent="0" marL="0">
+            <a:pPr marL="0" indent="0">
               <a:buNone/>
             </a:pPr>
             <a:r>
@@ -13019,127 +13376,7 @@
       </p:sp>
       <p:pic>
         <p:nvPicPr>
-          <p:cNvPr id="3" name="Image 0" descr="preencoded.png">    </p:cNvPr>
-          <p:cNvPicPr>
-            <a:picLocks noChangeAspect="1"/>
-          </p:cNvPicPr>
-          <p:nvPr/>
-        </p:nvPicPr>
-        <p:blipFill>
-          <a:blip r:embed="rId1"/>
-          <a:stretch>
-            <a:fillRect/>
-          </a:stretch>
-        </p:blipFill>
-        <p:spPr>
-          <a:xfrm>
-            <a:off x="548640" y="1828800"/>
-            <a:ext cx="320040" cy="320040"/>
-          </a:xfrm>
-          <a:prstGeom prst="rect">
-            <a:avLst/>
-          </a:prstGeom>
-        </p:spPr>
-      </p:pic>
-      <p:sp>
-        <p:nvSpPr>
-          <p:cNvPr id="4" name="Text 1"/>
-          <p:cNvSpPr txBox="1"/>
-          <p:nvPr/>
-        </p:nvSpPr>
-        <p:spPr>
-          <a:xfrm>
-            <a:off x="1097280" y="1783080"/>
-            <a:ext cx="7315200" cy="411480"/>
-          </a:xfrm>
-          <a:prstGeom prst="rect">
-            <a:avLst/>
-          </a:prstGeom>
-          <a:noFill/>
-          <a:ln/>
-        </p:spPr>
-        <p:txBody>
-          <a:bodyPr wrap="square" lIns="0" tIns="0" rIns="0" bIns="0" rtlCol="0" anchor="ctr"/>
-          <a:lstStyle/>
-          <a:p>
-            <a:pPr indent="0" marL="0">
-              <a:buNone/>
-            </a:pPr>
-            <a:r>
-              <a:rPr lang="en-US" sz="1800" dirty="0">
-                <a:solidFill>
-                  <a:srgbClr val="FFFFFF"/>
-                </a:solidFill>
-              </a:rPr>
-              <a:t>+91 84069 12345 (WhatsApp)</a:t>
-            </a:r>
-            <a:endParaRPr lang="en-US" sz="1800" dirty="0"/>
-          </a:p>
-        </p:txBody>
-      </p:sp>
-      <p:pic>
-        <p:nvPicPr>
-          <p:cNvPr id="5" name="Image 1" descr="preencoded.png">    </p:cNvPr>
-          <p:cNvPicPr>
-            <a:picLocks noChangeAspect="1"/>
-          </p:cNvPicPr>
-          <p:nvPr/>
-        </p:nvPicPr>
-        <p:blipFill>
-          <a:blip r:embed="rId2"/>
-          <a:stretch>
-            <a:fillRect/>
-          </a:stretch>
-        </p:blipFill>
-        <p:spPr>
-          <a:xfrm>
-            <a:off x="548640" y="2468880"/>
-            <a:ext cx="320040" cy="320040"/>
-          </a:xfrm>
-          <a:prstGeom prst="rect">
-            <a:avLst/>
-          </a:prstGeom>
-        </p:spPr>
-      </p:pic>
-      <p:sp>
-        <p:nvSpPr>
-          <p:cNvPr id="6" name="Text 2"/>
-          <p:cNvSpPr txBox="1"/>
-          <p:nvPr/>
-        </p:nvSpPr>
-        <p:spPr>
-          <a:xfrm>
-            <a:off x="1097280" y="2423160"/>
-            <a:ext cx="7315200" cy="411480"/>
-          </a:xfrm>
-          <a:prstGeom prst="rect">
-            <a:avLst/>
-          </a:prstGeom>
-          <a:noFill/>
-          <a:ln/>
-        </p:spPr>
-        <p:txBody>
-          <a:bodyPr wrap="square" lIns="0" tIns="0" rIns="0" bIns="0" rtlCol="0" anchor="ctr"/>
-          <a:lstStyle/>
-          <a:p>
-            <a:pPr indent="0" marL="0">
-              <a:buNone/>
-            </a:pPr>
-            <a:r>
-              <a:rPr lang="en-US" sz="1800" dirty="0">
-                <a:solidFill>
-                  <a:srgbClr val="FFFFFF"/>
-                </a:solidFill>
-              </a:rPr>
-              <a:t>support@pixelatenest.com</a:t>
-            </a:r>
-            <a:endParaRPr lang="en-US" sz="1800" dirty="0"/>
-          </a:p>
-        </p:txBody>
-      </p:sp>
-      <p:pic>
-        <p:nvPicPr>
-          <p:cNvPr id="7" name="Image 2" descr="preencoded.png">    </p:cNvPr>
+          <p:cNvPr id="3" name="Image 0" descr="preencoded.png"/>
           <p:cNvPicPr>
             <a:picLocks noChangeAspect="1"/>
           </p:cNvPicPr>
@@ -13153,7 +13390,7 @@
         </p:blipFill>
         <p:spPr>
           <a:xfrm>
-            <a:off x="548640" y="3108960"/>
+            <a:off x="548640" y="1828800"/>
             <a:ext cx="320040" cy="320040"/>
           </a:xfrm>
           <a:prstGeom prst="rect">
@@ -13163,13 +13400,13 @@
       </p:pic>
       <p:sp>
         <p:nvSpPr>
-          <p:cNvPr id="8" name="Text 3"/>
+          <p:cNvPr id="4" name="Text 1"/>
           <p:cNvSpPr txBox="1"/>
           <p:nvPr/>
         </p:nvSpPr>
         <p:spPr>
           <a:xfrm>
-            <a:off x="1097280" y="3063240"/>
+            <a:off x="1097280" y="1783080"/>
             <a:ext cx="7315200" cy="411480"/>
           </a:xfrm>
           <a:prstGeom prst="rect">
@@ -13182,7 +13419,7 @@
           <a:bodyPr wrap="square" lIns="0" tIns="0" rIns="0" bIns="0" rtlCol="0" anchor="ctr"/>
           <a:lstStyle/>
           <a:p>
-            <a:pPr indent="0" marL="0">
+            <a:pPr marL="0" indent="0">
               <a:buNone/>
             </a:pPr>
             <a:r>
@@ -13191,7 +13428,7 @@
                   <a:srgbClr val="FFFFFF"/>
                 </a:solidFill>
               </a:rPr>
-              <a:t>www.pixelatenest.com</a:t>
+              <a:t>+91 84069 12345 (WhatsApp)</a:t>
             </a:r>
             <a:endParaRPr lang="en-US" sz="1800" dirty="0"/>
           </a:p>
@@ -13199,7 +13436,7 @@
       </p:sp>
       <p:pic>
         <p:nvPicPr>
-          <p:cNvPr id="9" name="Image 3" descr="preencoded.png">    </p:cNvPr>
+          <p:cNvPr id="5" name="Image 1" descr="preencoded.png"/>
           <p:cNvPicPr>
             <a:picLocks noChangeAspect="1"/>
           </p:cNvPicPr>
@@ -13213,6 +13450,126 @@
         </p:blipFill>
         <p:spPr>
           <a:xfrm>
+            <a:off x="548640" y="2468880"/>
+            <a:ext cx="320040" cy="320040"/>
+          </a:xfrm>
+          <a:prstGeom prst="rect">
+            <a:avLst/>
+          </a:prstGeom>
+        </p:spPr>
+      </p:pic>
+      <p:sp>
+        <p:nvSpPr>
+          <p:cNvPr id="6" name="Text 2"/>
+          <p:cNvSpPr txBox="1"/>
+          <p:nvPr/>
+        </p:nvSpPr>
+        <p:spPr>
+          <a:xfrm>
+            <a:off x="1097280" y="2423160"/>
+            <a:ext cx="7315200" cy="411480"/>
+          </a:xfrm>
+          <a:prstGeom prst="rect">
+            <a:avLst/>
+          </a:prstGeom>
+          <a:noFill/>
+          <a:ln/>
+        </p:spPr>
+        <p:txBody>
+          <a:bodyPr wrap="square" lIns="0" tIns="0" rIns="0" bIns="0" rtlCol="0" anchor="ctr"/>
+          <a:lstStyle/>
+          <a:p>
+            <a:pPr marL="0" indent="0">
+              <a:buNone/>
+            </a:pPr>
+            <a:r>
+              <a:rPr lang="en-US" sz="1800" dirty="0">
+                <a:solidFill>
+                  <a:srgbClr val="FFFFFF"/>
+                </a:solidFill>
+              </a:rPr>
+              <a:t>support@pixelatenest.com</a:t>
+            </a:r>
+            <a:endParaRPr lang="en-US" sz="1800" dirty="0"/>
+          </a:p>
+        </p:txBody>
+      </p:sp>
+      <p:pic>
+        <p:nvPicPr>
+          <p:cNvPr id="7" name="Image 2" descr="preencoded.png"/>
+          <p:cNvPicPr>
+            <a:picLocks noChangeAspect="1"/>
+          </p:cNvPicPr>
+          <p:nvPr/>
+        </p:nvPicPr>
+        <p:blipFill>
+          <a:blip r:embed="rId5"/>
+          <a:stretch>
+            <a:fillRect/>
+          </a:stretch>
+        </p:blipFill>
+        <p:spPr>
+          <a:xfrm>
+            <a:off x="548640" y="3108960"/>
+            <a:ext cx="320040" cy="320040"/>
+          </a:xfrm>
+          <a:prstGeom prst="rect">
+            <a:avLst/>
+          </a:prstGeom>
+        </p:spPr>
+      </p:pic>
+      <p:sp>
+        <p:nvSpPr>
+          <p:cNvPr id="8" name="Text 3"/>
+          <p:cNvSpPr txBox="1"/>
+          <p:nvPr/>
+        </p:nvSpPr>
+        <p:spPr>
+          <a:xfrm>
+            <a:off x="1097280" y="3063240"/>
+            <a:ext cx="7315200" cy="411480"/>
+          </a:xfrm>
+          <a:prstGeom prst="rect">
+            <a:avLst/>
+          </a:prstGeom>
+          <a:noFill/>
+          <a:ln/>
+        </p:spPr>
+        <p:txBody>
+          <a:bodyPr wrap="square" lIns="0" tIns="0" rIns="0" bIns="0" rtlCol="0" anchor="ctr"/>
+          <a:lstStyle/>
+          <a:p>
+            <a:pPr marL="0" indent="0">
+              <a:buNone/>
+            </a:pPr>
+            <a:r>
+              <a:rPr lang="en-US" sz="1800" dirty="0">
+                <a:solidFill>
+                  <a:srgbClr val="FFFFFF"/>
+                </a:solidFill>
+              </a:rPr>
+              <a:t>www.pixelatenest.com</a:t>
+            </a:r>
+            <a:endParaRPr lang="en-US" sz="1800" dirty="0"/>
+          </a:p>
+        </p:txBody>
+      </p:sp>
+      <p:pic>
+        <p:nvPicPr>
+          <p:cNvPr id="9" name="Image 3" descr="preencoded.png"/>
+          <p:cNvPicPr>
+            <a:picLocks noChangeAspect="1"/>
+          </p:cNvPicPr>
+          <p:nvPr/>
+        </p:nvPicPr>
+        <p:blipFill>
+          <a:blip r:embed="rId6"/>
+          <a:stretch>
+            <a:fillRect/>
+          </a:stretch>
+        </p:blipFill>
+        <p:spPr>
+          <a:xfrm>
             <a:off x="548640" y="3749040"/>
             <a:ext cx="320040" cy="320040"/>
           </a:xfrm>
@@ -13242,7 +13599,7 @@
           <a:bodyPr wrap="square" lIns="0" tIns="0" rIns="0" bIns="0" rtlCol="0" anchor="ctr"/>
           <a:lstStyle/>
           <a:p>
-            <a:pPr indent="0" marL="0">
+            <a:pPr marL="0" indent="0">
               <a:buNone/>
             </a:pPr>
             <a:r>
@@ -13254,36 +13611,6 @@
               <a:t>Kala Bhawan, Akharaghat Road, Muzaffarpur, Bihar 842001</a:t>
             </a:r>
             <a:endParaRPr lang="en-US" sz="1800" dirty="0"/>
-          </a:p>
-        </p:txBody>
-      </p:sp>
-      <p:sp>
-        <p:nvSpPr>
-          <p:cNvPr id="12" name="Text 0"/>
-          <p:cNvSpPr/>
-          <p:nvPr>
-            <p:ph idx="100" type="title" hasCustomPrompt="1"/>
-          </p:nvPr>
-        </p:nvSpPr>
-        <p:spPr>
-          <a:xfrm>
-            <a:off x="548640" y="1737360"/>
-            <a:ext cx="8046720" cy="1005840"/>
-          </a:xfrm>
-          <a:prstGeom prst="rect">
-            <a:avLst/>
-          </a:prstGeom>
-          <a:noFill/>
-          <a:ln/>
-        </p:spPr>
-        <p:txBody>
-          <a:bodyPr wrap="square" lIns="0" tIns="0" rIns="0" bIns="0" rtlCol="0" anchor="ctr"/>
-          <a:lstStyle/>
-          <a:p>
-            <a:pPr indent="0" marL="0">
-              <a:buNone/>
-            </a:pPr>
-            <a:endParaRPr lang="en-US" sz="4000" dirty="0"/>
           </a:p>
         </p:txBody>
       </p:sp>
@@ -13315,9 +13642,11 @@
       <p:sp>
         <p:nvSpPr>
           <p:cNvPr id="2" name="Text 1"/>
-          <p:cNvSpPr/>
+          <p:cNvSpPr>
+            <a:spLocks noGrp="1"/>
+          </p:cNvSpPr>
           <p:nvPr>
-            <p:ph idx="101" type="title" hasCustomPrompt="1"/>
+            <p:ph type="title" idx="101" hasCustomPrompt="1"/>
           </p:nvPr>
         </p:nvSpPr>
         <p:spPr>
@@ -13335,7 +13664,7 @@
           <a:bodyPr wrap="square" lIns="0" tIns="0" rIns="0" bIns="0" rtlCol="0" anchor="ctr"/>
           <a:lstStyle/>
           <a:p>
-            <a:pPr indent="0" marL="0">
+            <a:pPr marL="0" indent="0">
               <a:buNone/>
             </a:pPr>
             <a:r>
@@ -13377,6 +13706,13 @@
             <a:prstDash val="solid"/>
           </a:ln>
         </p:spPr>
+        <p:txBody>
+          <a:bodyPr/>
+          <a:lstStyle/>
+          <a:p>
+            <a:endParaRPr lang="en-IN"/>
+          </a:p>
+        </p:txBody>
       </p:sp>
       <p:sp>
         <p:nvSpPr>
@@ -13402,17 +13738,24 @@
             <a:prstDash val="solid"/>
           </a:ln>
         </p:spPr>
+        <p:txBody>
+          <a:bodyPr/>
+          <a:lstStyle/>
+          <a:p>
+            <a:endParaRPr lang="en-IN"/>
+          </a:p>
+        </p:txBody>
       </p:sp>
       <p:pic>
         <p:nvPicPr>
-          <p:cNvPr id="6" name="Image 0" descr="preencoded.png">    </p:cNvPr>
+          <p:cNvPr id="6" name="Image 0" descr="preencoded.png"/>
           <p:cNvPicPr>
             <a:picLocks noChangeAspect="1"/>
           </p:cNvPicPr>
           <p:nvPr/>
         </p:nvPicPr>
         <p:blipFill>
-          <a:blip r:embed="rId1"/>
+          <a:blip r:embed="rId3"/>
           <a:stretch>
             <a:fillRect/>
           </a:stretch>
@@ -13448,7 +13791,7 @@
           <a:bodyPr wrap="square" lIns="0" tIns="0" rIns="0" bIns="0" rtlCol="0" anchor="ctr"/>
           <a:lstStyle/>
           <a:p>
-            <a:pPr indent="0" marL="0">
+            <a:pPr marL="0" indent="0">
               <a:buNone/>
             </a:pPr>
             <a:r>
@@ -13487,6 +13830,13 @@
             <a:prstDash val="solid"/>
           </a:ln>
         </p:spPr>
+        <p:txBody>
+          <a:bodyPr/>
+          <a:lstStyle/>
+          <a:p>
+            <a:endParaRPr lang="en-IN"/>
+          </a:p>
+        </p:txBody>
       </p:sp>
       <p:sp>
         <p:nvSpPr>
@@ -13512,17 +13862,24 @@
             <a:prstDash val="solid"/>
           </a:ln>
         </p:spPr>
+        <p:txBody>
+          <a:bodyPr/>
+          <a:lstStyle/>
+          <a:p>
+            <a:endParaRPr lang="en-IN"/>
+          </a:p>
+        </p:txBody>
       </p:sp>
       <p:pic>
         <p:nvPicPr>
-          <p:cNvPr id="10" name="Image 1" descr="preencoded.png">    </p:cNvPr>
+          <p:cNvPr id="10" name="Image 1" descr="preencoded.png"/>
           <p:cNvPicPr>
             <a:picLocks noChangeAspect="1"/>
           </p:cNvPicPr>
           <p:nvPr/>
         </p:nvPicPr>
         <p:blipFill>
-          <a:blip r:embed="rId2"/>
+          <a:blip r:embed="rId4"/>
           <a:stretch>
             <a:fillRect/>
           </a:stretch>
@@ -13558,7 +13915,7 @@
           <a:bodyPr wrap="square" lIns="0" tIns="0" rIns="0" bIns="0" rtlCol="0" anchor="ctr"/>
           <a:lstStyle/>
           <a:p>
-            <a:pPr indent="0" marL="0">
+            <a:pPr marL="0" indent="0">
               <a:buNone/>
             </a:pPr>
             <a:r>
@@ -13597,6 +13954,13 @@
             <a:prstDash val="solid"/>
           </a:ln>
         </p:spPr>
+        <p:txBody>
+          <a:bodyPr/>
+          <a:lstStyle/>
+          <a:p>
+            <a:endParaRPr lang="en-IN"/>
+          </a:p>
+        </p:txBody>
       </p:sp>
       <p:sp>
         <p:nvSpPr>
@@ -13622,17 +13986,24 @@
             <a:prstDash val="solid"/>
           </a:ln>
         </p:spPr>
+        <p:txBody>
+          <a:bodyPr/>
+          <a:lstStyle/>
+          <a:p>
+            <a:endParaRPr lang="en-IN"/>
+          </a:p>
+        </p:txBody>
       </p:sp>
       <p:pic>
         <p:nvPicPr>
-          <p:cNvPr id="14" name="Image 2" descr="preencoded.png">    </p:cNvPr>
+          <p:cNvPr id="14" name="Image 2" descr="preencoded.png"/>
           <p:cNvPicPr>
             <a:picLocks noChangeAspect="1"/>
           </p:cNvPicPr>
           <p:nvPr/>
         </p:nvPicPr>
         <p:blipFill>
-          <a:blip r:embed="rId3"/>
+          <a:blip r:embed="rId5"/>
           <a:stretch>
             <a:fillRect/>
           </a:stretch>
@@ -13668,7 +14039,7 @@
           <a:bodyPr wrap="square" lIns="0" tIns="0" rIns="0" bIns="0" rtlCol="0" anchor="ctr"/>
           <a:lstStyle/>
           <a:p>
-            <a:pPr indent="0" marL="0">
+            <a:pPr marL="0" indent="0">
               <a:buNone/>
             </a:pPr>
             <a:r>
@@ -13707,6 +14078,13 @@
             <a:prstDash val="solid"/>
           </a:ln>
         </p:spPr>
+        <p:txBody>
+          <a:bodyPr/>
+          <a:lstStyle/>
+          <a:p>
+            <a:endParaRPr lang="en-IN"/>
+          </a:p>
+        </p:txBody>
       </p:sp>
       <p:sp>
         <p:nvSpPr>
@@ -13732,17 +14110,24 @@
             <a:prstDash val="solid"/>
           </a:ln>
         </p:spPr>
+        <p:txBody>
+          <a:bodyPr/>
+          <a:lstStyle/>
+          <a:p>
+            <a:endParaRPr lang="en-IN"/>
+          </a:p>
+        </p:txBody>
       </p:sp>
       <p:pic>
         <p:nvPicPr>
-          <p:cNvPr id="18" name="Image 3" descr="preencoded.png">    </p:cNvPr>
+          <p:cNvPr id="18" name="Image 3" descr="preencoded.png"/>
           <p:cNvPicPr>
             <a:picLocks noChangeAspect="1"/>
           </p:cNvPicPr>
           <p:nvPr/>
         </p:nvPicPr>
         <p:blipFill>
-          <a:blip r:embed="rId4"/>
+          <a:blip r:embed="rId6"/>
           <a:stretch>
             <a:fillRect/>
           </a:stretch>
@@ -13778,7 +14163,7 @@
           <a:bodyPr wrap="square" lIns="0" tIns="0" rIns="0" bIns="0" rtlCol="0" anchor="ctr"/>
           <a:lstStyle/>
           <a:p>
-            <a:pPr indent="0" marL="0">
+            <a:pPr marL="0" indent="0">
               <a:buNone/>
             </a:pPr>
             <a:r>
@@ -13817,6 +14202,13 @@
             <a:prstDash val="solid"/>
           </a:ln>
         </p:spPr>
+        <p:txBody>
+          <a:bodyPr/>
+          <a:lstStyle/>
+          <a:p>
+            <a:endParaRPr lang="en-IN"/>
+          </a:p>
+        </p:txBody>
       </p:sp>
       <p:sp>
         <p:nvSpPr>
@@ -13842,17 +14234,24 @@
             <a:prstDash val="solid"/>
           </a:ln>
         </p:spPr>
+        <p:txBody>
+          <a:bodyPr/>
+          <a:lstStyle/>
+          <a:p>
+            <a:endParaRPr lang="en-IN"/>
+          </a:p>
+        </p:txBody>
       </p:sp>
       <p:pic>
         <p:nvPicPr>
-          <p:cNvPr id="22" name="Image 4" descr="preencoded.png">    </p:cNvPr>
+          <p:cNvPr id="22" name="Image 4" descr="preencoded.png"/>
           <p:cNvPicPr>
             <a:picLocks noChangeAspect="1"/>
           </p:cNvPicPr>
           <p:nvPr/>
         </p:nvPicPr>
         <p:blipFill>
-          <a:blip r:embed="rId5"/>
+          <a:blip r:embed="rId7"/>
           <a:stretch>
             <a:fillRect/>
           </a:stretch>
@@ -13888,7 +14287,7 @@
           <a:bodyPr wrap="square" lIns="0" tIns="0" rIns="0" bIns="0" rtlCol="0" anchor="ctr"/>
           <a:lstStyle/>
           <a:p>
-            <a:pPr indent="0" marL="0">
+            <a:pPr marL="0" indent="0">
               <a:buNone/>
             </a:pPr>
             <a:r>
@@ -13927,6 +14326,13 @@
             <a:prstDash val="solid"/>
           </a:ln>
         </p:spPr>
+        <p:txBody>
+          <a:bodyPr/>
+          <a:lstStyle/>
+          <a:p>
+            <a:endParaRPr lang="en-IN"/>
+          </a:p>
+        </p:txBody>
       </p:sp>
       <p:sp>
         <p:nvSpPr>
@@ -13952,17 +14358,24 @@
             <a:prstDash val="solid"/>
           </a:ln>
         </p:spPr>
+        <p:txBody>
+          <a:bodyPr/>
+          <a:lstStyle/>
+          <a:p>
+            <a:endParaRPr lang="en-IN"/>
+          </a:p>
+        </p:txBody>
       </p:sp>
       <p:pic>
         <p:nvPicPr>
-          <p:cNvPr id="26" name="Image 5" descr="preencoded.png">    </p:cNvPr>
+          <p:cNvPr id="26" name="Image 5" descr="preencoded.png"/>
           <p:cNvPicPr>
             <a:picLocks noChangeAspect="1"/>
           </p:cNvPicPr>
           <p:nvPr/>
         </p:nvPicPr>
         <p:blipFill>
-          <a:blip r:embed="rId6"/>
+          <a:blip r:embed="rId8"/>
           <a:stretch>
             <a:fillRect/>
           </a:stretch>
@@ -13998,7 +14411,7 @@
           <a:bodyPr wrap="square" lIns="0" tIns="0" rIns="0" bIns="0" rtlCol="0" anchor="ctr"/>
           <a:lstStyle/>
           <a:p>
-            <a:pPr indent="0" marL="0">
+            <a:pPr marL="0" indent="0">
               <a:buNone/>
             </a:pPr>
             <a:r>
@@ -14037,6 +14450,13 @@
             <a:prstDash val="solid"/>
           </a:ln>
         </p:spPr>
+        <p:txBody>
+          <a:bodyPr/>
+          <a:lstStyle/>
+          <a:p>
+            <a:endParaRPr lang="en-IN"/>
+          </a:p>
+        </p:txBody>
       </p:sp>
       <p:sp>
         <p:nvSpPr>
@@ -14062,17 +14482,24 @@
             <a:prstDash val="solid"/>
           </a:ln>
         </p:spPr>
+        <p:txBody>
+          <a:bodyPr/>
+          <a:lstStyle/>
+          <a:p>
+            <a:endParaRPr lang="en-IN"/>
+          </a:p>
+        </p:txBody>
       </p:sp>
       <p:pic>
         <p:nvPicPr>
-          <p:cNvPr id="30" name="Image 6" descr="preencoded.png">    </p:cNvPr>
+          <p:cNvPr id="30" name="Image 6" descr="preencoded.png"/>
           <p:cNvPicPr>
             <a:picLocks noChangeAspect="1"/>
           </p:cNvPicPr>
           <p:nvPr/>
         </p:nvPicPr>
         <p:blipFill>
-          <a:blip r:embed="rId7"/>
+          <a:blip r:embed="rId9"/>
           <a:stretch>
             <a:fillRect/>
           </a:stretch>
@@ -14108,7 +14535,7 @@
           <a:bodyPr wrap="square" lIns="0" tIns="0" rIns="0" bIns="0" rtlCol="0" anchor="ctr"/>
           <a:lstStyle/>
           <a:p>
-            <a:pPr indent="0" marL="0">
+            <a:pPr marL="0" indent="0">
               <a:buNone/>
             </a:pPr>
             <a:r>
@@ -14147,6 +14574,13 @@
             <a:prstDash val="solid"/>
           </a:ln>
         </p:spPr>
+        <p:txBody>
+          <a:bodyPr/>
+          <a:lstStyle/>
+          <a:p>
+            <a:endParaRPr lang="en-IN"/>
+          </a:p>
+        </p:txBody>
       </p:sp>
       <p:sp>
         <p:nvSpPr>
@@ -14172,17 +14606,24 @@
             <a:prstDash val="solid"/>
           </a:ln>
         </p:spPr>
+        <p:txBody>
+          <a:bodyPr/>
+          <a:lstStyle/>
+          <a:p>
+            <a:endParaRPr lang="en-IN"/>
+          </a:p>
+        </p:txBody>
       </p:sp>
       <p:pic>
         <p:nvPicPr>
-          <p:cNvPr id="34" name="Image 7" descr="preencoded.png">    </p:cNvPr>
+          <p:cNvPr id="34" name="Image 7" descr="preencoded.png"/>
           <p:cNvPicPr>
             <a:picLocks noChangeAspect="1"/>
           </p:cNvPicPr>
           <p:nvPr/>
         </p:nvPicPr>
         <p:blipFill>
-          <a:blip r:embed="rId8"/>
+          <a:blip r:embed="rId10"/>
           <a:stretch>
             <a:fillRect/>
           </a:stretch>
@@ -14218,7 +14659,7 @@
           <a:bodyPr wrap="square" lIns="0" tIns="0" rIns="0" bIns="0" rtlCol="0" anchor="ctr"/>
           <a:lstStyle/>
           <a:p>
-            <a:pPr indent="0" marL="0">
+            <a:pPr marL="0" indent="0">
               <a:buNone/>
             </a:pPr>
             <a:r>
@@ -14257,6 +14698,13 @@
             <a:prstDash val="solid"/>
           </a:ln>
         </p:spPr>
+        <p:txBody>
+          <a:bodyPr/>
+          <a:lstStyle/>
+          <a:p>
+            <a:endParaRPr lang="en-IN"/>
+          </a:p>
+        </p:txBody>
       </p:sp>
       <p:sp>
         <p:nvSpPr>
@@ -14282,17 +14730,24 @@
             <a:prstDash val="solid"/>
           </a:ln>
         </p:spPr>
+        <p:txBody>
+          <a:bodyPr/>
+          <a:lstStyle/>
+          <a:p>
+            <a:endParaRPr lang="en-IN"/>
+          </a:p>
+        </p:txBody>
       </p:sp>
       <p:pic>
         <p:nvPicPr>
-          <p:cNvPr id="38" name="Image 8" descr="preencoded.png">    </p:cNvPr>
+          <p:cNvPr id="38" name="Image 8" descr="preencoded.png"/>
           <p:cNvPicPr>
             <a:picLocks noChangeAspect="1"/>
           </p:cNvPicPr>
           <p:nvPr/>
         </p:nvPicPr>
         <p:blipFill>
-          <a:blip r:embed="rId9"/>
+          <a:blip r:embed="rId11"/>
           <a:stretch>
             <a:fillRect/>
           </a:stretch>
@@ -14328,7 +14783,7 @@
           <a:bodyPr wrap="square" lIns="0" tIns="0" rIns="0" bIns="0" rtlCol="0" anchor="ctr"/>
           <a:lstStyle/>
           <a:p>
-            <a:pPr indent="0" marL="0">
+            <a:pPr marL="0" indent="0">
               <a:buNone/>
             </a:pPr>
             <a:r>
@@ -14367,6 +14822,13 @@
             <a:prstDash val="solid"/>
           </a:ln>
         </p:spPr>
+        <p:txBody>
+          <a:bodyPr/>
+          <a:lstStyle/>
+          <a:p>
+            <a:endParaRPr lang="en-IN"/>
+          </a:p>
+        </p:txBody>
       </p:sp>
       <p:sp>
         <p:nvSpPr>
@@ -14392,17 +14854,24 @@
             <a:prstDash val="solid"/>
           </a:ln>
         </p:spPr>
+        <p:txBody>
+          <a:bodyPr/>
+          <a:lstStyle/>
+          <a:p>
+            <a:endParaRPr lang="en-IN"/>
+          </a:p>
+        </p:txBody>
       </p:sp>
       <p:pic>
         <p:nvPicPr>
-          <p:cNvPr id="42" name="Image 9" descr="preencoded.png">    </p:cNvPr>
+          <p:cNvPr id="42" name="Image 9" descr="preencoded.png"/>
           <p:cNvPicPr>
             <a:picLocks noChangeAspect="1"/>
           </p:cNvPicPr>
           <p:nvPr/>
         </p:nvPicPr>
         <p:blipFill>
-          <a:blip r:embed="rId10"/>
+          <a:blip r:embed="rId12"/>
           <a:stretch>
             <a:fillRect/>
           </a:stretch>
@@ -14438,7 +14907,7 @@
           <a:bodyPr wrap="square" lIns="0" tIns="0" rIns="0" bIns="0" rtlCol="0" anchor="ctr"/>
           <a:lstStyle/>
           <a:p>
-            <a:pPr indent="0" marL="0">
+            <a:pPr marL="0" indent="0">
               <a:buNone/>
             </a:pPr>
             <a:r>
@@ -14477,6 +14946,13 @@
             <a:prstDash val="solid"/>
           </a:ln>
         </p:spPr>
+        <p:txBody>
+          <a:bodyPr/>
+          <a:lstStyle/>
+          <a:p>
+            <a:endParaRPr lang="en-IN"/>
+          </a:p>
+        </p:txBody>
       </p:sp>
       <p:sp>
         <p:nvSpPr>
@@ -14502,17 +14978,24 @@
             <a:prstDash val="solid"/>
           </a:ln>
         </p:spPr>
+        <p:txBody>
+          <a:bodyPr/>
+          <a:lstStyle/>
+          <a:p>
+            <a:endParaRPr lang="en-IN"/>
+          </a:p>
+        </p:txBody>
       </p:sp>
       <p:pic>
         <p:nvPicPr>
-          <p:cNvPr id="46" name="Image 10" descr="preencoded.png">    </p:cNvPr>
+          <p:cNvPr id="46" name="Image 10" descr="preencoded.png"/>
           <p:cNvPicPr>
             <a:picLocks noChangeAspect="1"/>
           </p:cNvPicPr>
           <p:nvPr/>
         </p:nvPicPr>
         <p:blipFill>
-          <a:blip r:embed="rId11"/>
+          <a:blip r:embed="rId13"/>
           <a:stretch>
             <a:fillRect/>
           </a:stretch>
@@ -14548,7 +15031,7 @@
           <a:bodyPr wrap="square" lIns="0" tIns="0" rIns="0" bIns="0" rtlCol="0" anchor="ctr"/>
           <a:lstStyle/>
           <a:p>
-            <a:pPr indent="0" marL="0">
+            <a:pPr marL="0" indent="0">
               <a:buNone/>
             </a:pPr>
             <a:r>
@@ -14587,6 +15070,13 @@
             <a:prstDash val="solid"/>
           </a:ln>
         </p:spPr>
+        <p:txBody>
+          <a:bodyPr/>
+          <a:lstStyle/>
+          <a:p>
+            <a:endParaRPr lang="en-IN"/>
+          </a:p>
+        </p:txBody>
       </p:sp>
       <p:sp>
         <p:nvSpPr>
@@ -14612,17 +15102,24 @@
             <a:prstDash val="solid"/>
           </a:ln>
         </p:spPr>
+        <p:txBody>
+          <a:bodyPr/>
+          <a:lstStyle/>
+          <a:p>
+            <a:endParaRPr lang="en-IN"/>
+          </a:p>
+        </p:txBody>
       </p:sp>
       <p:pic>
         <p:nvPicPr>
-          <p:cNvPr id="50" name="Image 11" descr="preencoded.png">    </p:cNvPr>
+          <p:cNvPr id="50" name="Image 11" descr="preencoded.png"/>
           <p:cNvPicPr>
             <a:picLocks noChangeAspect="1"/>
           </p:cNvPicPr>
           <p:nvPr/>
         </p:nvPicPr>
         <p:blipFill>
-          <a:blip r:embed="rId12"/>
+          <a:blip r:embed="rId14"/>
           <a:stretch>
             <a:fillRect/>
           </a:stretch>
@@ -14658,7 +15155,7 @@
           <a:bodyPr wrap="square" lIns="0" tIns="0" rIns="0" bIns="0" rtlCol="0" anchor="ctr"/>
           <a:lstStyle/>
           <a:p>
-            <a:pPr indent="0" marL="0">
+            <a:pPr marL="0" indent="0">
               <a:buNone/>
             </a:pPr>
             <a:r>
@@ -14675,7 +15172,7 @@
       </p:sp>
       <p:sp>
         <p:nvSpPr>
-          <p:cNvPr id="25" name="Slide Number Placeholder 0"/>
+          <p:cNvPr id="3" name="Slide Number Placeholder 0"/>
           <p:cNvSpPr>
             <a:spLocks noGrp="1"/>
           </p:cNvSpPr>
@@ -14693,7 +15190,7 @@
           </a:prstGeom>
           <a:extLst>
             <a:ext uri="{C572A759-6A51-4108-AA02-DFA0A04FC94B}">
-              <ma14:wrappingTextBoxFlag xmlns:ma14="http://schemas.microsoft.com/office/mac/drawingml/2011/main" val="0"/>
+              <ma14:wrappingTextBoxFlag xmlns:ma14="http://schemas.microsoft.com/office/mac/drawingml/2011/main" xmlns="" val="0"/>
             </a:ext>
           </a:extLst>
         </p:spPr>
@@ -14714,7 +15211,7 @@
           <a:p>
             <a:pPr algn="l"/>
             <a:fld id="{F7021451-1387-4CA6-816F-3879F97B5CBC}" type="slidenum">
-              <a:rPr b="0" lang="en-US"/>
+              <a:rPr lang="en-US" b="0"/>
               <a:t>3</a:t>
             </a:fld>
             <a:endParaRPr lang="en-US"/>
@@ -14749,9 +15246,11 @@
       <p:sp>
         <p:nvSpPr>
           <p:cNvPr id="2" name="Text 1"/>
-          <p:cNvSpPr/>
+          <p:cNvSpPr>
+            <a:spLocks noGrp="1"/>
+          </p:cNvSpPr>
           <p:nvPr>
-            <p:ph idx="101" type="title" hasCustomPrompt="1"/>
+            <p:ph type="title" idx="101" hasCustomPrompt="1"/>
           </p:nvPr>
         </p:nvSpPr>
         <p:spPr>
@@ -14769,7 +15268,7 @@
           <a:bodyPr wrap="square" lIns="0" tIns="0" rIns="0" bIns="0" rtlCol="0" anchor="ctr"/>
           <a:lstStyle/>
           <a:p>
-            <a:pPr indent="0" marL="0">
+            <a:pPr marL="0" indent="0">
               <a:buNone/>
             </a:pPr>
             <a:r>
@@ -14896,17 +15395,24 @@
             <a:prstDash val="solid"/>
           </a:ln>
         </p:spPr>
+        <p:txBody>
+          <a:bodyPr/>
+          <a:lstStyle/>
+          <a:p>
+            <a:endParaRPr lang="en-IN"/>
+          </a:p>
+        </p:txBody>
       </p:sp>
       <p:pic>
         <p:nvPicPr>
-          <p:cNvPr id="6" name="Image 0" descr="img/dashboard.jpg">    </p:cNvPr>
+          <p:cNvPr id="6" name="Image 0" descr="img/dashboard.jpg"/>
           <p:cNvPicPr>
             <a:picLocks noChangeAspect="1"/>
           </p:cNvPicPr>
           <p:nvPr/>
         </p:nvPicPr>
         <p:blipFill>
-          <a:blip r:embed="rId1"/>
+          <a:blip r:embed="rId3"/>
           <a:stretch>
             <a:fillRect/>
           </a:stretch>
@@ -14942,6 +15448,13 @@
             <a:prstDash val="solid"/>
           </a:ln>
         </p:spPr>
+        <p:txBody>
+          <a:bodyPr/>
+          <a:lstStyle/>
+          <a:p>
+            <a:endParaRPr lang="en-IN"/>
+          </a:p>
+        </p:txBody>
       </p:sp>
       <p:sp>
         <p:nvSpPr>
@@ -14963,7 +15476,7 @@
           </a:prstGeom>
           <a:extLst>
             <a:ext uri="{C572A759-6A51-4108-AA02-DFA0A04FC94B}">
-              <ma14:wrappingTextBoxFlag xmlns:ma14="http://schemas.microsoft.com/office/mac/drawingml/2011/main" val="0"/>
+              <ma14:wrappingTextBoxFlag xmlns:ma14="http://schemas.microsoft.com/office/mac/drawingml/2011/main" xmlns="" val="0"/>
             </a:ext>
           </a:extLst>
         </p:spPr>
@@ -14984,7 +15497,7 @@
           <a:p>
             <a:pPr algn="l"/>
             <a:fld id="{F7021451-1387-4CA6-816F-3879F97B5CBC}" type="slidenum">
-              <a:rPr b="0" lang="en-US"/>
+              <a:rPr lang="en-US" b="0"/>
               <a:t>4</a:t>
             </a:fld>
             <a:endParaRPr lang="en-US"/>
@@ -15019,9 +15532,11 @@
       <p:sp>
         <p:nvSpPr>
           <p:cNvPr id="2" name="Text 1"/>
-          <p:cNvSpPr/>
+          <p:cNvSpPr>
+            <a:spLocks noGrp="1"/>
+          </p:cNvSpPr>
           <p:nvPr>
-            <p:ph idx="101" type="title" hasCustomPrompt="1"/>
+            <p:ph type="title" idx="101" hasCustomPrompt="1"/>
           </p:nvPr>
         </p:nvSpPr>
         <p:spPr>
@@ -15039,7 +15554,7 @@
           <a:bodyPr wrap="square" lIns="0" tIns="0" rIns="0" bIns="0" rtlCol="0" anchor="ctr"/>
           <a:lstStyle/>
           <a:p>
-            <a:pPr indent="0" marL="0">
+            <a:pPr marL="0" indent="0">
               <a:buNone/>
             </a:pPr>
             <a:r>
@@ -15166,17 +15681,24 @@
             <a:prstDash val="solid"/>
           </a:ln>
         </p:spPr>
+        <p:txBody>
+          <a:bodyPr/>
+          <a:lstStyle/>
+          <a:p>
+            <a:endParaRPr lang="en-IN"/>
+          </a:p>
+        </p:txBody>
       </p:sp>
       <p:pic>
         <p:nvPicPr>
-          <p:cNvPr id="6" name="Image 0" descr="img/employees.jpg">    </p:cNvPr>
+          <p:cNvPr id="6" name="Image 0" descr="img/employees.jpg"/>
           <p:cNvPicPr>
             <a:picLocks noChangeAspect="1"/>
           </p:cNvPicPr>
           <p:nvPr/>
         </p:nvPicPr>
         <p:blipFill>
-          <a:blip r:embed="rId1"/>
+          <a:blip r:embed="rId3"/>
           <a:stretch>
             <a:fillRect/>
           </a:stretch>
@@ -15212,6 +15734,13 @@
             <a:prstDash val="solid"/>
           </a:ln>
         </p:spPr>
+        <p:txBody>
+          <a:bodyPr/>
+          <a:lstStyle/>
+          <a:p>
+            <a:endParaRPr lang="en-IN"/>
+          </a:p>
+        </p:txBody>
       </p:sp>
       <p:sp>
         <p:nvSpPr>
@@ -15233,7 +15762,7 @@
           </a:prstGeom>
           <a:extLst>
             <a:ext uri="{C572A759-6A51-4108-AA02-DFA0A04FC94B}">
-              <ma14:wrappingTextBoxFlag xmlns:ma14="http://schemas.microsoft.com/office/mac/drawingml/2011/main" val="0"/>
+              <ma14:wrappingTextBoxFlag xmlns:ma14="http://schemas.microsoft.com/office/mac/drawingml/2011/main" xmlns="" val="0"/>
             </a:ext>
           </a:extLst>
         </p:spPr>
@@ -15254,7 +15783,7 @@
           <a:p>
             <a:pPr algn="l"/>
             <a:fld id="{F7021451-1387-4CA6-816F-3879F97B5CBC}" type="slidenum">
-              <a:rPr b="0" lang="en-US"/>
+              <a:rPr lang="en-US" b="0"/>
               <a:t>5</a:t>
             </a:fld>
             <a:endParaRPr lang="en-US"/>
@@ -15289,9 +15818,11 @@
       <p:sp>
         <p:nvSpPr>
           <p:cNvPr id="2" name="Text 1"/>
-          <p:cNvSpPr/>
+          <p:cNvSpPr>
+            <a:spLocks noGrp="1"/>
+          </p:cNvSpPr>
           <p:nvPr>
-            <p:ph idx="101" type="title" hasCustomPrompt="1"/>
+            <p:ph type="title" idx="101" hasCustomPrompt="1"/>
           </p:nvPr>
         </p:nvSpPr>
         <p:spPr>
@@ -15309,7 +15840,7 @@
           <a:bodyPr wrap="square" lIns="0" tIns="0" rIns="0" bIns="0" rtlCol="0" anchor="ctr"/>
           <a:lstStyle/>
           <a:p>
-            <a:pPr indent="0" marL="0">
+            <a:pPr marL="0" indent="0">
               <a:buNone/>
             </a:pPr>
             <a:r>
@@ -15436,17 +15967,24 @@
             <a:prstDash val="solid"/>
           </a:ln>
         </p:spPr>
+        <p:txBody>
+          <a:bodyPr/>
+          <a:lstStyle/>
+          <a:p>
+            <a:endParaRPr lang="en-IN"/>
+          </a:p>
+        </p:txBody>
       </p:sp>
       <p:pic>
         <p:nvPicPr>
-          <p:cNvPr id="6" name="Image 0" descr="img/import-excel.jpg">    </p:cNvPr>
+          <p:cNvPr id="6" name="Image 0" descr="img/import-excel.jpg"/>
           <p:cNvPicPr>
             <a:picLocks noChangeAspect="1"/>
           </p:cNvPicPr>
           <p:nvPr/>
         </p:nvPicPr>
         <p:blipFill>
-          <a:blip r:embed="rId1"/>
+          <a:blip r:embed="rId3"/>
           <a:stretch>
             <a:fillRect/>
           </a:stretch>
@@ -15482,6 +16020,13 @@
             <a:prstDash val="solid"/>
           </a:ln>
         </p:spPr>
+        <p:txBody>
+          <a:bodyPr/>
+          <a:lstStyle/>
+          <a:p>
+            <a:endParaRPr lang="en-IN"/>
+          </a:p>
+        </p:txBody>
       </p:sp>
       <p:sp>
         <p:nvSpPr>
@@ -15503,7 +16048,7 @@
           </a:prstGeom>
           <a:extLst>
             <a:ext uri="{C572A759-6A51-4108-AA02-DFA0A04FC94B}">
-              <ma14:wrappingTextBoxFlag xmlns:ma14="http://schemas.microsoft.com/office/mac/drawingml/2011/main" val="0"/>
+              <ma14:wrappingTextBoxFlag xmlns:ma14="http://schemas.microsoft.com/office/mac/drawingml/2011/main" xmlns="" val="0"/>
             </a:ext>
           </a:extLst>
         </p:spPr>
@@ -15524,7 +16069,7 @@
           <a:p>
             <a:pPr algn="l"/>
             <a:fld id="{F7021451-1387-4CA6-816F-3879F97B5CBC}" type="slidenum">
-              <a:rPr b="0" lang="en-US"/>
+              <a:rPr lang="en-US" b="0"/>
               <a:t>6</a:t>
             </a:fld>
             <a:endParaRPr lang="en-US"/>
@@ -15559,9 +16104,11 @@
       <p:sp>
         <p:nvSpPr>
           <p:cNvPr id="2" name="Text 1"/>
-          <p:cNvSpPr/>
+          <p:cNvSpPr>
+            <a:spLocks noGrp="1"/>
+          </p:cNvSpPr>
           <p:nvPr>
-            <p:ph idx="101" type="title" hasCustomPrompt="1"/>
+            <p:ph type="title" idx="101" hasCustomPrompt="1"/>
           </p:nvPr>
         </p:nvSpPr>
         <p:spPr>
@@ -15579,7 +16126,7 @@
           <a:bodyPr wrap="square" lIns="0" tIns="0" rIns="0" bIns="0" rtlCol="0" anchor="ctr"/>
           <a:lstStyle/>
           <a:p>
-            <a:pPr indent="0" marL="0">
+            <a:pPr marL="0" indent="0">
               <a:buNone/>
             </a:pPr>
             <a:r>
@@ -15706,17 +16253,24 @@
             <a:prstDash val="solid"/>
           </a:ln>
         </p:spPr>
+        <p:txBody>
+          <a:bodyPr/>
+          <a:lstStyle/>
+          <a:p>
+            <a:endParaRPr lang="en-IN"/>
+          </a:p>
+        </p:txBody>
       </p:sp>
       <p:pic>
         <p:nvPicPr>
-          <p:cNvPr id="6" name="Image 0" descr="img/attendance.jpg">    </p:cNvPr>
+          <p:cNvPr id="6" name="Image 0" descr="img/attendance.jpg"/>
           <p:cNvPicPr>
             <a:picLocks noChangeAspect="1"/>
           </p:cNvPicPr>
           <p:nvPr/>
         </p:nvPicPr>
         <p:blipFill>
-          <a:blip r:embed="rId1"/>
+          <a:blip r:embed="rId3"/>
           <a:stretch>
             <a:fillRect/>
           </a:stretch>
@@ -15752,6 +16306,13 @@
             <a:prstDash val="solid"/>
           </a:ln>
         </p:spPr>
+        <p:txBody>
+          <a:bodyPr/>
+          <a:lstStyle/>
+          <a:p>
+            <a:endParaRPr lang="en-IN"/>
+          </a:p>
+        </p:txBody>
       </p:sp>
       <p:sp>
         <p:nvSpPr>
@@ -15773,7 +16334,7 @@
           </a:prstGeom>
           <a:extLst>
             <a:ext uri="{C572A759-6A51-4108-AA02-DFA0A04FC94B}">
-              <ma14:wrappingTextBoxFlag xmlns:ma14="http://schemas.microsoft.com/office/mac/drawingml/2011/main" val="0"/>
+              <ma14:wrappingTextBoxFlag xmlns:ma14="http://schemas.microsoft.com/office/mac/drawingml/2011/main" xmlns="" val="0"/>
             </a:ext>
           </a:extLst>
         </p:spPr>
@@ -15794,7 +16355,7 @@
           <a:p>
             <a:pPr algn="l"/>
             <a:fld id="{F7021451-1387-4CA6-816F-3879F97B5CBC}" type="slidenum">
-              <a:rPr b="0" lang="en-US"/>
+              <a:rPr lang="en-US" b="0"/>
               <a:t>7</a:t>
             </a:fld>
             <a:endParaRPr lang="en-US"/>
@@ -15829,9 +16390,11 @@
       <p:sp>
         <p:nvSpPr>
           <p:cNvPr id="2" name="Text 1"/>
-          <p:cNvSpPr/>
+          <p:cNvSpPr>
+            <a:spLocks noGrp="1"/>
+          </p:cNvSpPr>
           <p:nvPr>
-            <p:ph idx="101" type="title" hasCustomPrompt="1"/>
+            <p:ph type="title" idx="101" hasCustomPrompt="1"/>
           </p:nvPr>
         </p:nvSpPr>
         <p:spPr>
@@ -15849,7 +16412,7 @@
           <a:bodyPr wrap="square" lIns="0" tIns="0" rIns="0" bIns="0" rtlCol="0" anchor="ctr"/>
           <a:lstStyle/>
           <a:p>
-            <a:pPr indent="0" marL="0">
+            <a:pPr marL="0" indent="0">
               <a:buNone/>
             </a:pPr>
             <a:r>
@@ -15976,17 +16539,24 @@
             <a:prstDash val="solid"/>
           </a:ln>
         </p:spPr>
+        <p:txBody>
+          <a:bodyPr/>
+          <a:lstStyle/>
+          <a:p>
+            <a:endParaRPr lang="en-IN"/>
+          </a:p>
+        </p:txBody>
       </p:sp>
       <p:pic>
         <p:nvPicPr>
-          <p:cNvPr id="6" name="Image 0" descr="img/leave.jpg">    </p:cNvPr>
+          <p:cNvPr id="6" name="Image 0" descr="img/leave.jpg"/>
           <p:cNvPicPr>
             <a:picLocks noChangeAspect="1"/>
           </p:cNvPicPr>
           <p:nvPr/>
         </p:nvPicPr>
         <p:blipFill>
-          <a:blip r:embed="rId1"/>
+          <a:blip r:embed="rId3"/>
           <a:stretch>
             <a:fillRect/>
           </a:stretch>
@@ -16022,6 +16592,13 @@
             <a:prstDash val="solid"/>
           </a:ln>
         </p:spPr>
+        <p:txBody>
+          <a:bodyPr/>
+          <a:lstStyle/>
+          <a:p>
+            <a:endParaRPr lang="en-IN"/>
+          </a:p>
+        </p:txBody>
       </p:sp>
       <p:sp>
         <p:nvSpPr>
@@ -16043,7 +16620,7 @@
           </a:prstGeom>
           <a:extLst>
             <a:ext uri="{C572A759-6A51-4108-AA02-DFA0A04FC94B}">
-              <ma14:wrappingTextBoxFlag xmlns:ma14="http://schemas.microsoft.com/office/mac/drawingml/2011/main" val="0"/>
+              <ma14:wrappingTextBoxFlag xmlns:ma14="http://schemas.microsoft.com/office/mac/drawingml/2011/main" xmlns="" val="0"/>
             </a:ext>
           </a:extLst>
         </p:spPr>
@@ -16064,7 +16641,7 @@
           <a:p>
             <a:pPr algn="l"/>
             <a:fld id="{F7021451-1387-4CA6-816F-3879F97B5CBC}" type="slidenum">
-              <a:rPr b="0" lang="en-US"/>
+              <a:rPr lang="en-US" b="0"/>
               <a:t>8</a:t>
             </a:fld>
             <a:endParaRPr lang="en-US"/>
@@ -16099,9 +16676,11 @@
       <p:sp>
         <p:nvSpPr>
           <p:cNvPr id="2" name="Text 1"/>
-          <p:cNvSpPr/>
+          <p:cNvSpPr>
+            <a:spLocks noGrp="1"/>
+          </p:cNvSpPr>
           <p:nvPr>
-            <p:ph idx="101" type="title" hasCustomPrompt="1"/>
+            <p:ph type="title" idx="101" hasCustomPrompt="1"/>
           </p:nvPr>
         </p:nvSpPr>
         <p:spPr>
@@ -16119,7 +16698,7 @@
           <a:bodyPr wrap="square" lIns="0" tIns="0" rIns="0" bIns="0" rtlCol="0" anchor="ctr"/>
           <a:lstStyle/>
           <a:p>
-            <a:pPr indent="0" marL="0">
+            <a:pPr marL="0" indent="0">
               <a:buNone/>
             </a:pPr>
             <a:r>
@@ -16246,17 +16825,24 @@
             <a:prstDash val="solid"/>
           </a:ln>
         </p:spPr>
+        <p:txBody>
+          <a:bodyPr/>
+          <a:lstStyle/>
+          <a:p>
+            <a:endParaRPr lang="en-IN"/>
+          </a:p>
+        </p:txBody>
       </p:sp>
       <p:pic>
         <p:nvPicPr>
-          <p:cNvPr id="6" name="Image 0" descr="img/holidays.jpg">    </p:cNvPr>
+          <p:cNvPr id="6" name="Image 0" descr="img/holidays.jpg"/>
           <p:cNvPicPr>
             <a:picLocks noChangeAspect="1"/>
           </p:cNvPicPr>
           <p:nvPr/>
         </p:nvPicPr>
         <p:blipFill>
-          <a:blip r:embed="rId1"/>
+          <a:blip r:embed="rId3"/>
           <a:stretch>
             <a:fillRect/>
           </a:stretch>
@@ -16292,6 +16878,13 @@
             <a:prstDash val="solid"/>
           </a:ln>
         </p:spPr>
+        <p:txBody>
+          <a:bodyPr/>
+          <a:lstStyle/>
+          <a:p>
+            <a:endParaRPr lang="en-IN"/>
+          </a:p>
+        </p:txBody>
       </p:sp>
       <p:sp>
         <p:nvSpPr>
@@ -16313,7 +16906,7 @@
           </a:prstGeom>
           <a:extLst>
             <a:ext uri="{C572A759-6A51-4108-AA02-DFA0A04FC94B}">
-              <ma14:wrappingTextBoxFlag xmlns:ma14="http://schemas.microsoft.com/office/mac/drawingml/2011/main" val="0"/>
+              <ma14:wrappingTextBoxFlag xmlns:ma14="http://schemas.microsoft.com/office/mac/drawingml/2011/main" xmlns="" val="0"/>
             </a:ext>
           </a:extLst>
         </p:spPr>
@@ -16334,7 +16927,7 @@
           <a:p>
             <a:pPr algn="l"/>
             <a:fld id="{F7021451-1387-4CA6-816F-3879F97B5CBC}" type="slidenum">
-              <a:rPr b="0" lang="en-US"/>
+              <a:rPr lang="en-US" b="0"/>
               <a:t>9</a:t>
             </a:fld>
             <a:endParaRPr lang="en-US"/>
@@ -16642,4 +17235,319 @@
     </a:ext>
   </a:extLst>
 </a:theme>
+</file>
+
+<file path=ppt/theme/theme2.xml><?xml version="1.0" encoding="utf-8"?>
+<a:theme xmlns:a="http://schemas.openxmlformats.org/drawingml/2006/main" name="Office Theme">
+  <a:themeElements>
+    <a:clrScheme name="Office">
+      <a:dk1>
+        <a:sysClr val="windowText" lastClr="000000"/>
+      </a:dk1>
+      <a:lt1>
+        <a:sysClr val="window" lastClr="FFFFFF"/>
+      </a:lt1>
+      <a:dk2>
+        <a:srgbClr val="0E2841"/>
+      </a:dk2>
+      <a:lt2>
+        <a:srgbClr val="E8E8E8"/>
+      </a:lt2>
+      <a:accent1>
+        <a:srgbClr val="156082"/>
+      </a:accent1>
+      <a:accent2>
+        <a:srgbClr val="E97132"/>
+      </a:accent2>
+      <a:accent3>
+        <a:srgbClr val="196B24"/>
+      </a:accent3>
+      <a:accent4>
+        <a:srgbClr val="0F9ED5"/>
+      </a:accent4>
+      <a:accent5>
+        <a:srgbClr val="A02B93"/>
+      </a:accent5>
+      <a:accent6>
+        <a:srgbClr val="4EA72E"/>
+      </a:accent6>
+      <a:hlink>
+        <a:srgbClr val="467886"/>
+      </a:hlink>
+      <a:folHlink>
+        <a:srgbClr val="96607D"/>
+      </a:folHlink>
+    </a:clrScheme>
+    <a:fontScheme name="Office">
+      <a:majorFont>
+        <a:latin typeface="Aptos Display" panose="02110004020202020204"/>
+        <a:ea typeface=""/>
+        <a:cs typeface=""/>
+        <a:font script="Jpan" typeface="游ゴシック Light"/>
+        <a:font script="Hang" typeface="맑은 고딕"/>
+        <a:font script="Hans" typeface="等线 Light"/>
+        <a:font script="Hant" typeface="新細明體"/>
+        <a:font script="Arab" typeface="Times New Roman"/>
+        <a:font script="Hebr" typeface="Times New Roman"/>
+        <a:font script="Thai" typeface="Angsana New"/>
+        <a:font script="Ethi" typeface="Nyala"/>
+        <a:font script="Beng" typeface="Vrinda"/>
+        <a:font script="Gujr" typeface="Shruti"/>
+        <a:font script="Khmr" typeface="MoolBoran"/>
+        <a:font script="Knda" typeface="Tunga"/>
+        <a:font script="Guru" typeface="Raavi"/>
+        <a:font script="Cans" typeface="Euphemia"/>
+        <a:font script="Cher" typeface="Plantagenet Cherokee"/>
+        <a:font script="Yiii" typeface="Microsoft Yi Baiti"/>
+        <a:font script="Tibt" typeface="Microsoft Himalaya"/>
+        <a:font script="Thaa" typeface="MV Boli"/>
+        <a:font script="Deva" typeface="Mangal"/>
+        <a:font script="Telu" typeface="Gautami"/>
+        <a:font script="Taml" typeface="Latha"/>
+        <a:font script="Syrc" typeface="Estrangelo Edessa"/>
+        <a:font script="Orya" typeface="Kalinga"/>
+        <a:font script="Mlym" typeface="Kartika"/>
+        <a:font script="Laoo" typeface="DokChampa"/>
+        <a:font script="Sinh" typeface="Iskoola Pota"/>
+        <a:font script="Mong" typeface="Mongolian Baiti"/>
+        <a:font script="Viet" typeface="Times New Roman"/>
+        <a:font script="Uigh" typeface="Microsoft Uighur"/>
+        <a:font script="Geor" typeface="Sylfaen"/>
+        <a:font script="Armn" typeface="Arial"/>
+        <a:font script="Bugi" typeface="Leelawadee UI"/>
+        <a:font script="Bopo" typeface="Microsoft JhengHei"/>
+        <a:font script="Java" typeface="Javanese Text"/>
+        <a:font script="Lisu" typeface="Segoe UI"/>
+        <a:font script="Mymr" typeface="Myanmar Text"/>
+        <a:font script="Nkoo" typeface="Ebrima"/>
+        <a:font script="Olck" typeface="Nirmala UI"/>
+        <a:font script="Osma" typeface="Ebrima"/>
+        <a:font script="Phag" typeface="Phagspa"/>
+        <a:font script="Syrn" typeface="Estrangelo Edessa"/>
+        <a:font script="Syrj" typeface="Estrangelo Edessa"/>
+        <a:font script="Syre" typeface="Estrangelo Edessa"/>
+        <a:font script="Sora" typeface="Nirmala UI"/>
+        <a:font script="Tale" typeface="Microsoft Tai Le"/>
+        <a:font script="Talu" typeface="Microsoft New Tai Lue"/>
+        <a:font script="Tfng" typeface="Ebrima"/>
+      </a:majorFont>
+      <a:minorFont>
+        <a:latin typeface="Aptos" panose="02110004020202020204"/>
+        <a:ea typeface=""/>
+        <a:cs typeface=""/>
+        <a:font script="Jpan" typeface="游ゴシック"/>
+        <a:font script="Hang" typeface="맑은 고딕"/>
+        <a:font script="Hans" typeface="等线"/>
+        <a:font script="Hant" typeface="新細明體"/>
+        <a:font script="Arab" typeface="Arial"/>
+        <a:font script="Hebr" typeface="Arial"/>
+        <a:font script="Thai" typeface="Cordia New"/>
+        <a:font script="Ethi" typeface="Nyala"/>
+        <a:font script="Beng" typeface="Vrinda"/>
+        <a:font script="Gujr" typeface="Shruti"/>
+        <a:font script="Khmr" typeface="DaunPenh"/>
+        <a:font script="Knda" typeface="Tunga"/>
+        <a:font script="Guru" typeface="Raavi"/>
+        <a:font script="Cans" typeface="Euphemia"/>
+        <a:font script="Cher" typeface="Plantagenet Cherokee"/>
+        <a:font script="Yiii" typeface="Microsoft Yi Baiti"/>
+        <a:font script="Tibt" typeface="Microsoft Himalaya"/>
+        <a:font script="Thaa" typeface="MV Boli"/>
+        <a:font script="Deva" typeface="Mangal"/>
+        <a:font script="Telu" typeface="Gautami"/>
+        <a:font script="Taml" typeface="Latha"/>
+        <a:font script="Syrc" typeface="Estrangelo Edessa"/>
+        <a:font script="Orya" typeface="Kalinga"/>
+        <a:font script="Mlym" typeface="Kartika"/>
+        <a:font script="Laoo" typeface="DokChampa"/>
+        <a:font script="Sinh" typeface="Iskoola Pota"/>
+        <a:font script="Mong" typeface="Mongolian Baiti"/>
+        <a:font script="Viet" typeface="Arial"/>
+        <a:font script="Uigh" typeface="Microsoft Uighur"/>
+        <a:font script="Geor" typeface="Sylfaen"/>
+        <a:font script="Armn" typeface="Arial"/>
+        <a:font script="Bugi" typeface="Leelawadee UI"/>
+        <a:font script="Bopo" typeface="Microsoft JhengHei"/>
+        <a:font script="Java" typeface="Javanese Text"/>
+        <a:font script="Lisu" typeface="Segoe UI"/>
+        <a:font script="Mymr" typeface="Myanmar Text"/>
+        <a:font script="Nkoo" typeface="Ebrima"/>
+        <a:font script="Olck" typeface="Nirmala UI"/>
+        <a:font script="Osma" typeface="Ebrima"/>
+        <a:font script="Phag" typeface="Phagspa"/>
+        <a:font script="Syrn" typeface="Estrangelo Edessa"/>
+        <a:font script="Syrj" typeface="Estrangelo Edessa"/>
+        <a:font script="Syre" typeface="Estrangelo Edessa"/>
+        <a:font script="Sora" typeface="Nirmala UI"/>
+        <a:font script="Tale" typeface="Microsoft Tai Le"/>
+        <a:font script="Talu" typeface="Microsoft New Tai Lue"/>
+        <a:font script="Tfng" typeface="Ebrima"/>
+      </a:minorFont>
+    </a:fontScheme>
+    <a:fmtScheme name="Office">
+      <a:fillStyleLst>
+        <a:solidFill>
+          <a:schemeClr val="phClr"/>
+        </a:solidFill>
+        <a:gradFill rotWithShape="1">
+          <a:gsLst>
+            <a:gs pos="0">
+              <a:schemeClr val="phClr">
+                <a:lumMod val="110000"/>
+                <a:satMod val="105000"/>
+                <a:tint val="67000"/>
+              </a:schemeClr>
+            </a:gs>
+            <a:gs pos="50000">
+              <a:schemeClr val="phClr">
+                <a:lumMod val="105000"/>
+                <a:satMod val="103000"/>
+                <a:tint val="73000"/>
+              </a:schemeClr>
+            </a:gs>
+            <a:gs pos="100000">
+              <a:schemeClr val="phClr">
+                <a:lumMod val="105000"/>
+                <a:satMod val="109000"/>
+                <a:tint val="81000"/>
+              </a:schemeClr>
+            </a:gs>
+          </a:gsLst>
+          <a:lin ang="5400000" scaled="0"/>
+        </a:gradFill>
+        <a:gradFill rotWithShape="1">
+          <a:gsLst>
+            <a:gs pos="0">
+              <a:schemeClr val="phClr">
+                <a:satMod val="103000"/>
+                <a:lumMod val="102000"/>
+                <a:tint val="94000"/>
+              </a:schemeClr>
+            </a:gs>
+            <a:gs pos="50000">
+              <a:schemeClr val="phClr">
+                <a:satMod val="110000"/>
+                <a:lumMod val="100000"/>
+                <a:shade val="100000"/>
+              </a:schemeClr>
+            </a:gs>
+            <a:gs pos="100000">
+              <a:schemeClr val="phClr">
+                <a:lumMod val="99000"/>
+                <a:satMod val="120000"/>
+                <a:shade val="78000"/>
+              </a:schemeClr>
+            </a:gs>
+          </a:gsLst>
+          <a:lin ang="5400000" scaled="0"/>
+        </a:gradFill>
+      </a:fillStyleLst>
+      <a:lnStyleLst>
+        <a:ln w="12700" cap="flat" cmpd="sng" algn="ctr">
+          <a:solidFill>
+            <a:schemeClr val="phClr"/>
+          </a:solidFill>
+          <a:prstDash val="solid"/>
+          <a:miter lim="800000"/>
+        </a:ln>
+        <a:ln w="19050" cap="flat" cmpd="sng" algn="ctr">
+          <a:solidFill>
+            <a:schemeClr val="phClr"/>
+          </a:solidFill>
+          <a:prstDash val="solid"/>
+          <a:miter lim="800000"/>
+        </a:ln>
+        <a:ln w="25400" cap="flat" cmpd="sng" algn="ctr">
+          <a:solidFill>
+            <a:schemeClr val="phClr"/>
+          </a:solidFill>
+          <a:prstDash val="solid"/>
+          <a:miter lim="800000"/>
+        </a:ln>
+      </a:lnStyleLst>
+      <a:effectStyleLst>
+        <a:effectStyle>
+          <a:effectLst/>
+        </a:effectStyle>
+        <a:effectStyle>
+          <a:effectLst/>
+        </a:effectStyle>
+        <a:effectStyle>
+          <a:effectLst>
+            <a:outerShdw blurRad="57150" dist="19050" dir="5400000" algn="ctr" rotWithShape="0">
+              <a:srgbClr val="000000">
+                <a:alpha val="63000"/>
+              </a:srgbClr>
+            </a:outerShdw>
+          </a:effectLst>
+        </a:effectStyle>
+      </a:effectStyleLst>
+      <a:bgFillStyleLst>
+        <a:solidFill>
+          <a:schemeClr val="phClr"/>
+        </a:solidFill>
+        <a:solidFill>
+          <a:schemeClr val="phClr">
+            <a:tint val="95000"/>
+            <a:satMod val="170000"/>
+          </a:schemeClr>
+        </a:solidFill>
+        <a:gradFill rotWithShape="1">
+          <a:gsLst>
+            <a:gs pos="0">
+              <a:schemeClr val="phClr">
+                <a:tint val="93000"/>
+                <a:satMod val="150000"/>
+                <a:shade val="98000"/>
+                <a:lumMod val="102000"/>
+              </a:schemeClr>
+            </a:gs>
+            <a:gs pos="50000">
+              <a:schemeClr val="phClr">
+                <a:tint val="98000"/>
+                <a:satMod val="130000"/>
+                <a:shade val="90000"/>
+                <a:lumMod val="103000"/>
+              </a:schemeClr>
+            </a:gs>
+            <a:gs pos="100000">
+              <a:schemeClr val="phClr">
+                <a:shade val="63000"/>
+                <a:satMod val="120000"/>
+              </a:schemeClr>
+            </a:gs>
+          </a:gsLst>
+          <a:lin ang="5400000" scaled="0"/>
+        </a:gradFill>
+      </a:bgFillStyleLst>
+    </a:fmtScheme>
+  </a:themeElements>
+  <a:objectDefaults>
+    <a:lnDef>
+      <a:spPr/>
+      <a:bodyPr/>
+      <a:lstStyle/>
+      <a:style>
+        <a:lnRef idx="2">
+          <a:schemeClr val="accent1"/>
+        </a:lnRef>
+        <a:fillRef idx="0">
+          <a:schemeClr val="accent1"/>
+        </a:fillRef>
+        <a:effectRef idx="1">
+          <a:schemeClr val="accent1"/>
+        </a:effectRef>
+        <a:fontRef idx="minor">
+          <a:schemeClr val="tx1"/>
+        </a:fontRef>
+      </a:style>
+    </a:lnDef>
+  </a:objectDefaults>
+  <a:extraClrSchemeLst/>
+  <a:extLst>
+    <a:ext uri="{05A4C25C-085E-4340-85A3-A5531E510DB2}">
+      <thm15:themeFamily xmlns:thm15="http://schemas.microsoft.com/office/thememl/2012/main" name="Office Theme" id="{2E142A2C-CD16-42D6-873A-C26D2A0506FA}" vid="{1BDDFF52-6CD6-40A5-AB3C-68EB2F1E4D0A}"/>
+    </a:ext>
+  </a:extLst>
+</a:theme>
 </file>